--- a/Presentacion Tech Learn.pptx
+++ b/Presentacion Tech Learn.pptx
@@ -113,6 +113,11 @@
       </a:defRPr>
     </a:lvl9pPr>
   </p:defaultTextStyle>
+  <p:extLst>
+    <p:ext uri="{EFAFB233-063F-42B5-8137-9DF3F51BA10A}">
+      <p15:sldGuideLst xmlns:p15="http://schemas.microsoft.com/office/powerpoint/2012/main"/>
+    </p:ext>
+  </p:extLst>
 </p:presentation>
 </file>
 
@@ -312,7 +317,7 @@
           <a:p>
             <a:fld id="{32213886-AFFD-445E-9427-6DB448F87EF8}" type="datetimeFigureOut">
               <a:rPr lang="es-ES" smtClean="0"/>
-              <a:t>12/12/2025</a:t>
+              <a:t>19/12/2025</a:t>
             </a:fld>
             <a:endParaRPr lang="es-ES"/>
           </a:p>
@@ -533,7 +538,7 @@
           <a:p>
             <a:fld id="{32213886-AFFD-445E-9427-6DB448F87EF8}" type="datetimeFigureOut">
               <a:rPr lang="es-ES" smtClean="0"/>
-              <a:t>12/12/2025</a:t>
+              <a:t>19/12/2025</a:t>
             </a:fld>
             <a:endParaRPr lang="es-ES"/>
           </a:p>
@@ -713,7 +718,7 @@
           <a:p>
             <a:fld id="{32213886-AFFD-445E-9427-6DB448F87EF8}" type="datetimeFigureOut">
               <a:rPr lang="es-ES" smtClean="0"/>
-              <a:t>12/12/2025</a:t>
+              <a:t>19/12/2025</a:t>
             </a:fld>
             <a:endParaRPr lang="es-ES"/>
           </a:p>
@@ -905,7 +910,7 @@
           <a:p>
             <a:fld id="{32213886-AFFD-445E-9427-6DB448F87EF8}" type="datetimeFigureOut">
               <a:rPr lang="es-ES" smtClean="0"/>
-              <a:t>12/12/2025</a:t>
+              <a:t>19/12/2025</a:t>
             </a:fld>
             <a:endParaRPr lang="es-ES"/>
           </a:p>
@@ -1080,7 +1085,7 @@
           <a:p>
             <a:fld id="{32213886-AFFD-445E-9427-6DB448F87EF8}" type="datetimeFigureOut">
               <a:rPr lang="es-ES" smtClean="0"/>
-              <a:t>12/12/2025</a:t>
+              <a:t>19/12/2025</a:t>
             </a:fld>
             <a:endParaRPr lang="es-ES"/>
           </a:p>
@@ -1331,7 +1336,7 @@
           <a:p>
             <a:fld id="{32213886-AFFD-445E-9427-6DB448F87EF8}" type="datetimeFigureOut">
               <a:rPr lang="es-ES" smtClean="0"/>
-              <a:t>12/12/2025</a:t>
+              <a:t>19/12/2025</a:t>
             </a:fld>
             <a:endParaRPr lang="es-ES"/>
           </a:p>
@@ -1654,7 +1659,7 @@
           <a:p>
             <a:fld id="{32213886-AFFD-445E-9427-6DB448F87EF8}" type="datetimeFigureOut">
               <a:rPr lang="es-ES" smtClean="0"/>
-              <a:t>12/12/2025</a:t>
+              <a:t>19/12/2025</a:t>
             </a:fld>
             <a:endParaRPr lang="es-ES"/>
           </a:p>
@@ -2078,7 +2083,7 @@
           <a:p>
             <a:fld id="{32213886-AFFD-445E-9427-6DB448F87EF8}" type="datetimeFigureOut">
               <a:rPr lang="es-ES" smtClean="0"/>
-              <a:t>12/12/2025</a:t>
+              <a:t>19/12/2025</a:t>
             </a:fld>
             <a:endParaRPr lang="es-ES"/>
           </a:p>
@@ -2196,7 +2201,7 @@
           <a:p>
             <a:fld id="{32213886-AFFD-445E-9427-6DB448F87EF8}" type="datetimeFigureOut">
               <a:rPr lang="es-ES" smtClean="0"/>
-              <a:t>12/12/2025</a:t>
+              <a:t>19/12/2025</a:t>
             </a:fld>
             <a:endParaRPr lang="es-ES"/>
           </a:p>
@@ -2291,7 +2296,7 @@
           <a:p>
             <a:fld id="{32213886-AFFD-445E-9427-6DB448F87EF8}" type="datetimeFigureOut">
               <a:rPr lang="es-ES" smtClean="0"/>
-              <a:t>12/12/2025</a:t>
+              <a:t>19/12/2025</a:t>
             </a:fld>
             <a:endParaRPr lang="es-ES"/>
           </a:p>
@@ -2581,7 +2586,7 @@
           <a:p>
             <a:fld id="{32213886-AFFD-445E-9427-6DB448F87EF8}" type="datetimeFigureOut">
               <a:rPr lang="es-ES" smtClean="0"/>
-              <a:t>12/12/2025</a:t>
+              <a:t>19/12/2025</a:t>
             </a:fld>
             <a:endParaRPr lang="es-ES"/>
           </a:p>
@@ -2853,7 +2858,7 @@
           <a:p>
             <a:fld id="{32213886-AFFD-445E-9427-6DB448F87EF8}" type="datetimeFigureOut">
               <a:rPr lang="es-ES" smtClean="0"/>
-              <a:t>12/12/2025</a:t>
+              <a:t>19/12/2025</a:t>
             </a:fld>
             <a:endParaRPr lang="es-ES"/>
           </a:p>
@@ -3107,7 +3112,7 @@
           <a:p>
             <a:fld id="{32213886-AFFD-445E-9427-6DB448F87EF8}" type="datetimeFigureOut">
               <a:rPr lang="es-ES" smtClean="0"/>
-              <a:t>12/12/2025</a:t>
+              <a:t>19/12/2025</a:t>
             </a:fld>
             <a:endParaRPr lang="es-ES"/>
           </a:p>
@@ -3678,8 +3683,37 @@
                   <a:srgbClr val="002060"/>
                 </a:solidFill>
               </a:rPr>
-              <a:t>Noelia</a:t>
-            </a:r>
+              <a:t>Noelia </a:t>
+            </a:r>
+            <a:r>
+              <a:rPr lang="es-ES" sz="3200" b="1" u="sng" dirty="0" err="1">
+                <a:solidFill>
+                  <a:srgbClr val="002060"/>
+                </a:solidFill>
+              </a:rPr>
+              <a:t>Alafarga</a:t>
+            </a:r>
+            <a:r>
+              <a:rPr lang="es-ES" sz="3200" b="1" u="sng" dirty="0">
+                <a:solidFill>
+                  <a:srgbClr val="002060"/>
+                </a:solidFill>
+              </a:rPr>
+              <a:t> </a:t>
+            </a:r>
+            <a:r>
+              <a:rPr lang="es-ES" sz="3200" b="1" u="sng" dirty="0" err="1">
+                <a:solidFill>
+                  <a:srgbClr val="002060"/>
+                </a:solidFill>
+              </a:rPr>
+              <a:t>Payá</a:t>
+            </a:r>
+            <a:endParaRPr lang="es-ES" sz="3200" b="1" u="sng" dirty="0">
+              <a:solidFill>
+                <a:srgbClr val="002060"/>
+              </a:solidFill>
+            </a:endParaRPr>
           </a:p>
         </p:txBody>
       </p:sp>

--- a/Presentacion Tech Learn.pptx
+++ b/Presentacion Tech Learn.pptx
@@ -8,13 +8,21 @@
     <p:sldId id="256" r:id="rId2"/>
     <p:sldId id="257" r:id="rId3"/>
     <p:sldId id="258" r:id="rId4"/>
-    <p:sldId id="259" r:id="rId5"/>
-    <p:sldId id="260" r:id="rId6"/>
-    <p:sldId id="261" r:id="rId7"/>
-    <p:sldId id="262" r:id="rId8"/>
-    <p:sldId id="263" r:id="rId9"/>
-    <p:sldId id="264" r:id="rId10"/>
-    <p:sldId id="265" r:id="rId11"/>
+    <p:sldId id="268" r:id="rId5"/>
+    <p:sldId id="267" r:id="rId6"/>
+    <p:sldId id="269" r:id="rId7"/>
+    <p:sldId id="260" r:id="rId8"/>
+    <p:sldId id="266" r:id="rId9"/>
+    <p:sldId id="270" r:id="rId10"/>
+    <p:sldId id="259" r:id="rId11"/>
+    <p:sldId id="261" r:id="rId12"/>
+    <p:sldId id="271" r:id="rId13"/>
+    <p:sldId id="262" r:id="rId14"/>
+    <p:sldId id="263" r:id="rId15"/>
+    <p:sldId id="272" r:id="rId16"/>
+    <p:sldId id="264" r:id="rId17"/>
+    <p:sldId id="265" r:id="rId18"/>
+    <p:sldId id="273" r:id="rId19"/>
   </p:sldIdLst>
   <p:sldSz cx="12192000" cy="6858000"/>
   <p:notesSz cx="6858000" cy="9144000"/>
@@ -3738,6 +3746,847 @@
         <p:cNvPr id="1" name="">
           <a:extLst>
             <a:ext uri="{FF2B5EF4-FFF2-40B4-BE49-F238E27FC236}">
+              <a16:creationId xmlns:a16="http://schemas.microsoft.com/office/drawing/2014/main" id="{E119C401-D4B8-6335-4299-51358D01BB03}"/>
+            </a:ext>
+          </a:extLst>
+        </p:cNvPr>
+        <p:cNvGrpSpPr/>
+        <p:nvPr/>
+      </p:nvGrpSpPr>
+      <p:grpSpPr>
+        <a:xfrm>
+          <a:off x="0" y="0"/>
+          <a:ext cx="0" cy="0"/>
+          <a:chOff x="0" y="0"/>
+          <a:chExt cx="0" cy="0"/>
+        </a:xfrm>
+      </p:grpSpPr>
+      <p:sp>
+        <p:nvSpPr>
+          <p:cNvPr id="2" name="Título 1">
+            <a:extLst>
+              <a:ext uri="{FF2B5EF4-FFF2-40B4-BE49-F238E27FC236}">
+                <a16:creationId xmlns:a16="http://schemas.microsoft.com/office/drawing/2014/main" id="{9CCF1B91-4590-DAD9-6234-08742835CBB2}"/>
+              </a:ext>
+            </a:extLst>
+          </p:cNvPr>
+          <p:cNvSpPr>
+            <a:spLocks noGrp="1"/>
+          </p:cNvSpPr>
+          <p:nvPr>
+            <p:ph type="title"/>
+          </p:nvPr>
+        </p:nvSpPr>
+        <p:spPr>
+          <a:xfrm>
+            <a:off x="207391" y="289089"/>
+            <a:ext cx="11726943" cy="785567"/>
+          </a:xfrm>
+        </p:spPr>
+        <p:txBody>
+          <a:bodyPr>
+            <a:normAutofit/>
+          </a:bodyPr>
+          <a:lstStyle/>
+          <a:p>
+            <a:pPr algn="ctr"/>
+            <a:r>
+              <a:rPr lang="es-ES" sz="4000" b="1" u="sng" dirty="0">
+                <a:solidFill>
+                  <a:srgbClr val="00B0F0"/>
+                </a:solidFill>
+              </a:rPr>
+              <a:t>Recordar Contraseña</a:t>
+            </a:r>
+          </a:p>
+        </p:txBody>
+      </p:sp>
+      <p:sp>
+        <p:nvSpPr>
+          <p:cNvPr id="3" name="Marcador de texto 2">
+            <a:extLst>
+              <a:ext uri="{FF2B5EF4-FFF2-40B4-BE49-F238E27FC236}">
+                <a16:creationId xmlns:a16="http://schemas.microsoft.com/office/drawing/2014/main" id="{728CD9F5-1223-187B-640D-584DF592E104}"/>
+              </a:ext>
+            </a:extLst>
+          </p:cNvPr>
+          <p:cNvSpPr>
+            <a:spLocks noGrp="1"/>
+          </p:cNvSpPr>
+          <p:nvPr>
+            <p:ph type="body" sz="half" idx="2"/>
+          </p:nvPr>
+        </p:nvSpPr>
+        <p:spPr>
+          <a:xfrm>
+            <a:off x="257666" y="1074656"/>
+            <a:ext cx="11676669" cy="5494255"/>
+          </a:xfrm>
+        </p:spPr>
+        <p:txBody>
+          <a:bodyPr anchor="t">
+            <a:normAutofit/>
+          </a:bodyPr>
+          <a:lstStyle/>
+          <a:p>
+            <a:r>
+              <a:rPr lang="es-ES" sz="2800" b="1" dirty="0">
+                <a:solidFill>
+                  <a:srgbClr val="00B0F0"/>
+                </a:solidFill>
+              </a:rPr>
+              <a:t>Esta pagina es para Recordar Contraseña poniendo el Email y la Contraseña dos veces. Al pulsar Cambiar Contraseña la cambia e inicia sesión.</a:t>
+            </a:r>
+          </a:p>
+          <a:p>
+            <a:pPr algn="l"/>
+            <a:endParaRPr lang="es-ES" sz="2800" b="1" dirty="0">
+              <a:solidFill>
+                <a:srgbClr val="00B0F0"/>
+              </a:solidFill>
+            </a:endParaRPr>
+          </a:p>
+        </p:txBody>
+      </p:sp>
+    </p:spTree>
+    <p:extLst>
+      <p:ext uri="{BB962C8B-B14F-4D97-AF65-F5344CB8AC3E}">
+        <p14:creationId xmlns:p14="http://schemas.microsoft.com/office/powerpoint/2010/main" val="3496824983"/>
+      </p:ext>
+    </p:extLst>
+  </p:cSld>
+  <p:clrMapOvr>
+    <a:masterClrMapping/>
+  </p:clrMapOvr>
+</p:sld>
+</file>
+
+<file path=ppt/slides/slide11.xml><?xml version="1.0" encoding="utf-8"?>
+<p:sld xmlns:a="http://schemas.openxmlformats.org/drawingml/2006/main" xmlns:r="http://schemas.openxmlformats.org/officeDocument/2006/relationships" xmlns:p="http://schemas.openxmlformats.org/presentationml/2006/main">
+  <p:cSld>
+    <p:spTree>
+      <p:nvGrpSpPr>
+        <p:cNvPr id="1" name="">
+          <a:extLst>
+            <a:ext uri="{FF2B5EF4-FFF2-40B4-BE49-F238E27FC236}">
+              <a16:creationId xmlns:a16="http://schemas.microsoft.com/office/drawing/2014/main" id="{8734807C-99FC-F8E9-35A7-FF96B280E77C}"/>
+            </a:ext>
+          </a:extLst>
+        </p:cNvPr>
+        <p:cNvGrpSpPr/>
+        <p:nvPr/>
+      </p:nvGrpSpPr>
+      <p:grpSpPr>
+        <a:xfrm>
+          <a:off x="0" y="0"/>
+          <a:ext cx="0" cy="0"/>
+          <a:chOff x="0" y="0"/>
+          <a:chExt cx="0" cy="0"/>
+        </a:xfrm>
+      </p:grpSpPr>
+      <p:sp>
+        <p:nvSpPr>
+          <p:cNvPr id="2" name="Título 1">
+            <a:extLst>
+              <a:ext uri="{FF2B5EF4-FFF2-40B4-BE49-F238E27FC236}">
+                <a16:creationId xmlns:a16="http://schemas.microsoft.com/office/drawing/2014/main" id="{FEEC6AD6-694C-BEFB-E8DE-FF33A6EFB253}"/>
+              </a:ext>
+            </a:extLst>
+          </p:cNvPr>
+          <p:cNvSpPr>
+            <a:spLocks noGrp="1"/>
+          </p:cNvSpPr>
+          <p:nvPr>
+            <p:ph type="title"/>
+          </p:nvPr>
+        </p:nvSpPr>
+        <p:spPr>
+          <a:xfrm>
+            <a:off x="207391" y="289089"/>
+            <a:ext cx="11726943" cy="785567"/>
+          </a:xfrm>
+        </p:spPr>
+        <p:txBody>
+          <a:bodyPr>
+            <a:normAutofit/>
+          </a:bodyPr>
+          <a:lstStyle/>
+          <a:p>
+            <a:pPr algn="ctr"/>
+            <a:r>
+              <a:rPr lang="es-ES" sz="4000" b="1" u="sng" dirty="0">
+                <a:solidFill>
+                  <a:srgbClr val="00B0F0"/>
+                </a:solidFill>
+              </a:rPr>
+              <a:t>Productos</a:t>
+            </a:r>
+          </a:p>
+        </p:txBody>
+      </p:sp>
+      <p:sp>
+        <p:nvSpPr>
+          <p:cNvPr id="3" name="Marcador de texto 2">
+            <a:extLst>
+              <a:ext uri="{FF2B5EF4-FFF2-40B4-BE49-F238E27FC236}">
+                <a16:creationId xmlns:a16="http://schemas.microsoft.com/office/drawing/2014/main" id="{5FEE8E04-F9F5-0CD4-3CBB-E1F050D9D12D}"/>
+              </a:ext>
+            </a:extLst>
+          </p:cNvPr>
+          <p:cNvSpPr>
+            <a:spLocks noGrp="1"/>
+          </p:cNvSpPr>
+          <p:nvPr>
+            <p:ph type="body" sz="half" idx="2"/>
+          </p:nvPr>
+        </p:nvSpPr>
+        <p:spPr>
+          <a:xfrm>
+            <a:off x="257666" y="1074656"/>
+            <a:ext cx="11676669" cy="5494255"/>
+          </a:xfrm>
+        </p:spPr>
+        <p:txBody>
+          <a:bodyPr anchor="t">
+            <a:normAutofit/>
+          </a:bodyPr>
+          <a:lstStyle/>
+          <a:p>
+            <a:pPr algn="l"/>
+            <a:r>
+              <a:rPr lang="es-ES" sz="2800" b="1" dirty="0">
+                <a:solidFill>
+                  <a:srgbClr val="00B0F0"/>
+                </a:solidFill>
+              </a:rPr>
+              <a:t>Esta pagina tiene todos los productos con nombre, precio e imagen. Al pulsar Añadir con la sesión iniciada se te añade a Cesta.</a:t>
+            </a:r>
+          </a:p>
+        </p:txBody>
+      </p:sp>
+    </p:spTree>
+    <p:extLst>
+      <p:ext uri="{BB962C8B-B14F-4D97-AF65-F5344CB8AC3E}">
+        <p14:creationId xmlns:p14="http://schemas.microsoft.com/office/powerpoint/2010/main" val="1380892801"/>
+      </p:ext>
+    </p:extLst>
+  </p:cSld>
+  <p:clrMapOvr>
+    <a:masterClrMapping/>
+  </p:clrMapOvr>
+</p:sld>
+</file>
+
+<file path=ppt/slides/slide12.xml><?xml version="1.0" encoding="utf-8"?>
+<p:sld xmlns:a="http://schemas.openxmlformats.org/drawingml/2006/main" xmlns:r="http://schemas.openxmlformats.org/officeDocument/2006/relationships" xmlns:p="http://schemas.openxmlformats.org/presentationml/2006/main">
+  <p:cSld>
+    <p:spTree>
+      <p:nvGrpSpPr>
+        <p:cNvPr id="1" name="">
+          <a:extLst>
+            <a:ext uri="{FF2B5EF4-FFF2-40B4-BE49-F238E27FC236}">
+              <a16:creationId xmlns:a16="http://schemas.microsoft.com/office/drawing/2014/main" id="{A93A105A-C873-DEDC-EB60-CBCC883854BA}"/>
+            </a:ext>
+          </a:extLst>
+        </p:cNvPr>
+        <p:cNvGrpSpPr/>
+        <p:nvPr/>
+      </p:nvGrpSpPr>
+      <p:grpSpPr>
+        <a:xfrm>
+          <a:off x="0" y="0"/>
+          <a:ext cx="0" cy="0"/>
+          <a:chOff x="0" y="0"/>
+          <a:chExt cx="0" cy="0"/>
+        </a:xfrm>
+      </p:grpSpPr>
+      <p:sp>
+        <p:nvSpPr>
+          <p:cNvPr id="2" name="Título 1">
+            <a:extLst>
+              <a:ext uri="{FF2B5EF4-FFF2-40B4-BE49-F238E27FC236}">
+                <a16:creationId xmlns:a16="http://schemas.microsoft.com/office/drawing/2014/main" id="{A0A4596C-F139-FECA-BCD7-72882CA4C6A2}"/>
+              </a:ext>
+            </a:extLst>
+          </p:cNvPr>
+          <p:cNvSpPr>
+            <a:spLocks noGrp="1"/>
+          </p:cNvSpPr>
+          <p:nvPr>
+            <p:ph type="title"/>
+          </p:nvPr>
+        </p:nvSpPr>
+        <p:spPr>
+          <a:xfrm>
+            <a:off x="207391" y="289089"/>
+            <a:ext cx="11726943" cy="785567"/>
+          </a:xfrm>
+        </p:spPr>
+        <p:txBody>
+          <a:bodyPr>
+            <a:normAutofit/>
+          </a:bodyPr>
+          <a:lstStyle/>
+          <a:p>
+            <a:pPr algn="ctr"/>
+            <a:r>
+              <a:rPr lang="es-ES" sz="4000" b="1" u="sng" dirty="0">
+                <a:solidFill>
+                  <a:srgbClr val="00B0F0"/>
+                </a:solidFill>
+              </a:rPr>
+              <a:t>Detalles Producto</a:t>
+            </a:r>
+          </a:p>
+        </p:txBody>
+      </p:sp>
+      <p:sp>
+        <p:nvSpPr>
+          <p:cNvPr id="3" name="Marcador de texto 2">
+            <a:extLst>
+              <a:ext uri="{FF2B5EF4-FFF2-40B4-BE49-F238E27FC236}">
+                <a16:creationId xmlns:a16="http://schemas.microsoft.com/office/drawing/2014/main" id="{C3E575B8-4E1B-A9FA-7D49-265E207E3559}"/>
+              </a:ext>
+            </a:extLst>
+          </p:cNvPr>
+          <p:cNvSpPr>
+            <a:spLocks noGrp="1"/>
+          </p:cNvSpPr>
+          <p:nvPr>
+            <p:ph type="body" sz="half" idx="2"/>
+          </p:nvPr>
+        </p:nvSpPr>
+        <p:spPr>
+          <a:xfrm>
+            <a:off x="257666" y="1074656"/>
+            <a:ext cx="11676669" cy="5494255"/>
+          </a:xfrm>
+        </p:spPr>
+        <p:txBody>
+          <a:bodyPr anchor="t">
+            <a:normAutofit/>
+          </a:bodyPr>
+          <a:lstStyle/>
+          <a:p>
+            <a:pPr algn="l"/>
+            <a:r>
+              <a:rPr lang="es-ES" sz="2800" b="1" dirty="0">
+                <a:solidFill>
+                  <a:srgbClr val="00B0F0"/>
+                </a:solidFill>
+              </a:rPr>
+              <a:t>Esta pagina tiene los detalles del producto (nombre, descripcion corta y larga, precio, imagen, características, galería de imágenes, comentarios y valoraciones). Al pulsar Añadir con la sesión iniciada se te añade a Cesta.</a:t>
+            </a:r>
+          </a:p>
+        </p:txBody>
+      </p:sp>
+    </p:spTree>
+    <p:extLst>
+      <p:ext uri="{BB962C8B-B14F-4D97-AF65-F5344CB8AC3E}">
+        <p14:creationId xmlns:p14="http://schemas.microsoft.com/office/powerpoint/2010/main" val="960200844"/>
+      </p:ext>
+    </p:extLst>
+  </p:cSld>
+  <p:clrMapOvr>
+    <a:masterClrMapping/>
+  </p:clrMapOvr>
+</p:sld>
+</file>
+
+<file path=ppt/slides/slide13.xml><?xml version="1.0" encoding="utf-8"?>
+<p:sld xmlns:a="http://schemas.openxmlformats.org/drawingml/2006/main" xmlns:r="http://schemas.openxmlformats.org/officeDocument/2006/relationships" xmlns:p="http://schemas.openxmlformats.org/presentationml/2006/main">
+  <p:cSld>
+    <p:spTree>
+      <p:nvGrpSpPr>
+        <p:cNvPr id="1" name="">
+          <a:extLst>
+            <a:ext uri="{FF2B5EF4-FFF2-40B4-BE49-F238E27FC236}">
+              <a16:creationId xmlns:a16="http://schemas.microsoft.com/office/drawing/2014/main" id="{4BF9874A-19C9-8D09-CF26-05F8169BF4FD}"/>
+            </a:ext>
+          </a:extLst>
+        </p:cNvPr>
+        <p:cNvGrpSpPr/>
+        <p:nvPr/>
+      </p:nvGrpSpPr>
+      <p:grpSpPr>
+        <a:xfrm>
+          <a:off x="0" y="0"/>
+          <a:ext cx="0" cy="0"/>
+          <a:chOff x="0" y="0"/>
+          <a:chExt cx="0" cy="0"/>
+        </a:xfrm>
+      </p:grpSpPr>
+      <p:sp>
+        <p:nvSpPr>
+          <p:cNvPr id="2" name="Título 1">
+            <a:extLst>
+              <a:ext uri="{FF2B5EF4-FFF2-40B4-BE49-F238E27FC236}">
+                <a16:creationId xmlns:a16="http://schemas.microsoft.com/office/drawing/2014/main" id="{E579921F-0C04-1CD1-6B65-4471E3655DCD}"/>
+              </a:ext>
+            </a:extLst>
+          </p:cNvPr>
+          <p:cNvSpPr>
+            <a:spLocks noGrp="1"/>
+          </p:cNvSpPr>
+          <p:nvPr>
+            <p:ph type="title"/>
+          </p:nvPr>
+        </p:nvSpPr>
+        <p:spPr>
+          <a:xfrm>
+            <a:off x="207391" y="289089"/>
+            <a:ext cx="11726943" cy="785567"/>
+          </a:xfrm>
+        </p:spPr>
+        <p:txBody>
+          <a:bodyPr>
+            <a:normAutofit/>
+          </a:bodyPr>
+          <a:lstStyle/>
+          <a:p>
+            <a:pPr algn="ctr"/>
+            <a:r>
+              <a:rPr lang="es-ES" sz="4000" b="1" u="sng" dirty="0">
+                <a:solidFill>
+                  <a:srgbClr val="00B0F0"/>
+                </a:solidFill>
+              </a:rPr>
+              <a:t>Cesta</a:t>
+            </a:r>
+          </a:p>
+        </p:txBody>
+      </p:sp>
+      <p:sp>
+        <p:nvSpPr>
+          <p:cNvPr id="3" name="Marcador de texto 2">
+            <a:extLst>
+              <a:ext uri="{FF2B5EF4-FFF2-40B4-BE49-F238E27FC236}">
+                <a16:creationId xmlns:a16="http://schemas.microsoft.com/office/drawing/2014/main" id="{BD717E3C-37B7-FB89-2E47-509730C09DD1}"/>
+              </a:ext>
+            </a:extLst>
+          </p:cNvPr>
+          <p:cNvSpPr>
+            <a:spLocks noGrp="1"/>
+          </p:cNvSpPr>
+          <p:nvPr>
+            <p:ph type="body" sz="half" idx="2"/>
+          </p:nvPr>
+        </p:nvSpPr>
+        <p:spPr>
+          <a:xfrm>
+            <a:off x="257666" y="1074656"/>
+            <a:ext cx="11676669" cy="5494255"/>
+          </a:xfrm>
+        </p:spPr>
+        <p:txBody>
+          <a:bodyPr anchor="t">
+            <a:normAutofit/>
+          </a:bodyPr>
+          <a:lstStyle/>
+          <a:p>
+            <a:pPr algn="l"/>
+            <a:r>
+              <a:rPr lang="es-ES" sz="2800" b="1" dirty="0">
+                <a:solidFill>
+                  <a:srgbClr val="00B0F0"/>
+                </a:solidFill>
+              </a:rPr>
+              <a:t>Esta pagina tiene los productos añadidos (nombre, precio, imagen, cantidad, total y subtotal). Al pulsar Continuar con la sesión iniciada te lleva a Tarjetas de Pago.</a:t>
+            </a:r>
+          </a:p>
+          <a:p>
+            <a:pPr algn="l"/>
+            <a:endParaRPr lang="es-ES" sz="2800" b="1" dirty="0">
+              <a:solidFill>
+                <a:srgbClr val="00B0F0"/>
+              </a:solidFill>
+            </a:endParaRPr>
+          </a:p>
+        </p:txBody>
+      </p:sp>
+    </p:spTree>
+    <p:extLst>
+      <p:ext uri="{BB962C8B-B14F-4D97-AF65-F5344CB8AC3E}">
+        <p14:creationId xmlns:p14="http://schemas.microsoft.com/office/powerpoint/2010/main" val="1152180217"/>
+      </p:ext>
+    </p:extLst>
+  </p:cSld>
+  <p:clrMapOvr>
+    <a:masterClrMapping/>
+  </p:clrMapOvr>
+</p:sld>
+</file>
+
+<file path=ppt/slides/slide14.xml><?xml version="1.0" encoding="utf-8"?>
+<p:sld xmlns:a="http://schemas.openxmlformats.org/drawingml/2006/main" xmlns:r="http://schemas.openxmlformats.org/officeDocument/2006/relationships" xmlns:p="http://schemas.openxmlformats.org/presentationml/2006/main">
+  <p:cSld>
+    <p:spTree>
+      <p:nvGrpSpPr>
+        <p:cNvPr id="1" name="">
+          <a:extLst>
+            <a:ext uri="{FF2B5EF4-FFF2-40B4-BE49-F238E27FC236}">
+              <a16:creationId xmlns:a16="http://schemas.microsoft.com/office/drawing/2014/main" id="{77B6B23D-9BD4-51FA-B348-AF0D834EB444}"/>
+            </a:ext>
+          </a:extLst>
+        </p:cNvPr>
+        <p:cNvGrpSpPr/>
+        <p:nvPr/>
+      </p:nvGrpSpPr>
+      <p:grpSpPr>
+        <a:xfrm>
+          <a:off x="0" y="0"/>
+          <a:ext cx="0" cy="0"/>
+          <a:chOff x="0" y="0"/>
+          <a:chExt cx="0" cy="0"/>
+        </a:xfrm>
+      </p:grpSpPr>
+      <p:sp>
+        <p:nvSpPr>
+          <p:cNvPr id="2" name="Título 1">
+            <a:extLst>
+              <a:ext uri="{FF2B5EF4-FFF2-40B4-BE49-F238E27FC236}">
+                <a16:creationId xmlns:a16="http://schemas.microsoft.com/office/drawing/2014/main" id="{DFA6F264-69B9-887A-C8F2-649D802261E8}"/>
+              </a:ext>
+            </a:extLst>
+          </p:cNvPr>
+          <p:cNvSpPr>
+            <a:spLocks noGrp="1"/>
+          </p:cNvSpPr>
+          <p:nvPr>
+            <p:ph type="title"/>
+          </p:nvPr>
+        </p:nvSpPr>
+        <p:spPr>
+          <a:xfrm>
+            <a:off x="207391" y="289089"/>
+            <a:ext cx="11726943" cy="785567"/>
+          </a:xfrm>
+        </p:spPr>
+        <p:txBody>
+          <a:bodyPr>
+            <a:normAutofit/>
+          </a:bodyPr>
+          <a:lstStyle/>
+          <a:p>
+            <a:pPr algn="ctr"/>
+            <a:r>
+              <a:rPr lang="es-ES" sz="4000" b="1" u="sng" dirty="0">
+                <a:solidFill>
+                  <a:srgbClr val="00B0F0"/>
+                </a:solidFill>
+              </a:rPr>
+              <a:t>Tarjetas de Pago</a:t>
+            </a:r>
+          </a:p>
+        </p:txBody>
+      </p:sp>
+      <p:sp>
+        <p:nvSpPr>
+          <p:cNvPr id="3" name="Marcador de texto 2">
+            <a:extLst>
+              <a:ext uri="{FF2B5EF4-FFF2-40B4-BE49-F238E27FC236}">
+                <a16:creationId xmlns:a16="http://schemas.microsoft.com/office/drawing/2014/main" id="{458DDE8E-AC4E-D474-8D13-9197032F3E68}"/>
+              </a:ext>
+            </a:extLst>
+          </p:cNvPr>
+          <p:cNvSpPr>
+            <a:spLocks noGrp="1"/>
+          </p:cNvSpPr>
+          <p:nvPr>
+            <p:ph type="body" sz="half" idx="2"/>
+          </p:nvPr>
+        </p:nvSpPr>
+        <p:spPr>
+          <a:xfrm>
+            <a:off x="257666" y="1074656"/>
+            <a:ext cx="11676669" cy="5494255"/>
+          </a:xfrm>
+        </p:spPr>
+        <p:txBody>
+          <a:bodyPr anchor="t">
+            <a:normAutofit/>
+          </a:bodyPr>
+          <a:lstStyle/>
+          <a:p>
+            <a:r>
+              <a:rPr lang="es-ES" sz="2800" b="1" dirty="0">
+                <a:solidFill>
+                  <a:srgbClr val="00B0F0"/>
+                </a:solidFill>
+              </a:rPr>
+              <a:t>Esta pagina tiene las Tarjetas de Pago añadidas (nombre de usuario, fecha de caducidad, CCV). Al pulsar Añadir/Editar con la sesión iniciada te lleva a Editar Tarjetas de Pago. Al pulsar Continuar con la sesión iniciada te lleva a Finalizar Compra.</a:t>
+            </a:r>
+          </a:p>
+          <a:p>
+            <a:pPr algn="l"/>
+            <a:endParaRPr lang="es-ES" sz="2800" b="1" dirty="0">
+              <a:solidFill>
+                <a:srgbClr val="00B0F0"/>
+              </a:solidFill>
+            </a:endParaRPr>
+          </a:p>
+        </p:txBody>
+      </p:sp>
+    </p:spTree>
+    <p:extLst>
+      <p:ext uri="{BB962C8B-B14F-4D97-AF65-F5344CB8AC3E}">
+        <p14:creationId xmlns:p14="http://schemas.microsoft.com/office/powerpoint/2010/main" val="477548462"/>
+      </p:ext>
+    </p:extLst>
+  </p:cSld>
+  <p:clrMapOvr>
+    <a:masterClrMapping/>
+  </p:clrMapOvr>
+</p:sld>
+</file>
+
+<file path=ppt/slides/slide15.xml><?xml version="1.0" encoding="utf-8"?>
+<p:sld xmlns:a="http://schemas.openxmlformats.org/drawingml/2006/main" xmlns:r="http://schemas.openxmlformats.org/officeDocument/2006/relationships" xmlns:p="http://schemas.openxmlformats.org/presentationml/2006/main">
+  <p:cSld>
+    <p:spTree>
+      <p:nvGrpSpPr>
+        <p:cNvPr id="1" name="">
+          <a:extLst>
+            <a:ext uri="{FF2B5EF4-FFF2-40B4-BE49-F238E27FC236}">
+              <a16:creationId xmlns:a16="http://schemas.microsoft.com/office/drawing/2014/main" id="{08869C1E-9FC5-4CEE-C330-9DF66D59D9D2}"/>
+            </a:ext>
+          </a:extLst>
+        </p:cNvPr>
+        <p:cNvGrpSpPr/>
+        <p:nvPr/>
+      </p:nvGrpSpPr>
+      <p:grpSpPr>
+        <a:xfrm>
+          <a:off x="0" y="0"/>
+          <a:ext cx="0" cy="0"/>
+          <a:chOff x="0" y="0"/>
+          <a:chExt cx="0" cy="0"/>
+        </a:xfrm>
+      </p:grpSpPr>
+      <p:sp>
+        <p:nvSpPr>
+          <p:cNvPr id="2" name="Título 1">
+            <a:extLst>
+              <a:ext uri="{FF2B5EF4-FFF2-40B4-BE49-F238E27FC236}">
+                <a16:creationId xmlns:a16="http://schemas.microsoft.com/office/drawing/2014/main" id="{D1A4FC4E-F5FF-21CD-51CD-024F532D99B2}"/>
+              </a:ext>
+            </a:extLst>
+          </p:cNvPr>
+          <p:cNvSpPr>
+            <a:spLocks noGrp="1"/>
+          </p:cNvSpPr>
+          <p:nvPr>
+            <p:ph type="title"/>
+          </p:nvPr>
+        </p:nvSpPr>
+        <p:spPr>
+          <a:xfrm>
+            <a:off x="207391" y="289089"/>
+            <a:ext cx="11726943" cy="785567"/>
+          </a:xfrm>
+        </p:spPr>
+        <p:txBody>
+          <a:bodyPr>
+            <a:normAutofit/>
+          </a:bodyPr>
+          <a:lstStyle/>
+          <a:p>
+            <a:pPr algn="ctr"/>
+            <a:r>
+              <a:rPr lang="es-ES" sz="4000" b="1" u="sng" dirty="0">
+                <a:solidFill>
+                  <a:srgbClr val="00B0F0"/>
+                </a:solidFill>
+              </a:rPr>
+              <a:t>Editar Tarjetas de Pago</a:t>
+            </a:r>
+          </a:p>
+        </p:txBody>
+      </p:sp>
+      <p:sp>
+        <p:nvSpPr>
+          <p:cNvPr id="3" name="Marcador de texto 2">
+            <a:extLst>
+              <a:ext uri="{FF2B5EF4-FFF2-40B4-BE49-F238E27FC236}">
+                <a16:creationId xmlns:a16="http://schemas.microsoft.com/office/drawing/2014/main" id="{083C93DD-BA38-EB02-FD5E-C854D7ABCBB8}"/>
+              </a:ext>
+            </a:extLst>
+          </p:cNvPr>
+          <p:cNvSpPr>
+            <a:spLocks noGrp="1"/>
+          </p:cNvSpPr>
+          <p:nvPr>
+            <p:ph type="body" sz="half" idx="2"/>
+          </p:nvPr>
+        </p:nvSpPr>
+        <p:spPr>
+          <a:xfrm>
+            <a:off x="257666" y="1074656"/>
+            <a:ext cx="11676669" cy="5494255"/>
+          </a:xfrm>
+        </p:spPr>
+        <p:txBody>
+          <a:bodyPr anchor="t">
+            <a:normAutofit/>
+          </a:bodyPr>
+          <a:lstStyle/>
+          <a:p>
+            <a:r>
+              <a:rPr lang="es-ES" sz="2800" b="1" dirty="0">
+                <a:solidFill>
+                  <a:srgbClr val="00B0F0"/>
+                </a:solidFill>
+              </a:rPr>
+              <a:t>Esta pagina permite añadir o editar las Tarjetas de Pago (nombre de usuario, fecha de caducidad, CCV). Al pulsar Añadir/Editar con la sesión iniciada te lleva a Tarjetas de Pago. </a:t>
+            </a:r>
+          </a:p>
+        </p:txBody>
+      </p:sp>
+    </p:spTree>
+    <p:extLst>
+      <p:ext uri="{BB962C8B-B14F-4D97-AF65-F5344CB8AC3E}">
+        <p14:creationId xmlns:p14="http://schemas.microsoft.com/office/powerpoint/2010/main" val="3147110869"/>
+      </p:ext>
+    </p:extLst>
+  </p:cSld>
+  <p:clrMapOvr>
+    <a:masterClrMapping/>
+  </p:clrMapOvr>
+</p:sld>
+</file>
+
+<file path=ppt/slides/slide16.xml><?xml version="1.0" encoding="utf-8"?>
+<p:sld xmlns:a="http://schemas.openxmlformats.org/drawingml/2006/main" xmlns:r="http://schemas.openxmlformats.org/officeDocument/2006/relationships" xmlns:p="http://schemas.openxmlformats.org/presentationml/2006/main">
+  <p:cSld>
+    <p:spTree>
+      <p:nvGrpSpPr>
+        <p:cNvPr id="1" name="">
+          <a:extLst>
+            <a:ext uri="{FF2B5EF4-FFF2-40B4-BE49-F238E27FC236}">
+              <a16:creationId xmlns:a16="http://schemas.microsoft.com/office/drawing/2014/main" id="{8C9CDBF9-B222-7608-9292-3C46CA2B2333}"/>
+            </a:ext>
+          </a:extLst>
+        </p:cNvPr>
+        <p:cNvGrpSpPr/>
+        <p:nvPr/>
+      </p:nvGrpSpPr>
+      <p:grpSpPr>
+        <a:xfrm>
+          <a:off x="0" y="0"/>
+          <a:ext cx="0" cy="0"/>
+          <a:chOff x="0" y="0"/>
+          <a:chExt cx="0" cy="0"/>
+        </a:xfrm>
+      </p:grpSpPr>
+      <p:sp>
+        <p:nvSpPr>
+          <p:cNvPr id="2" name="Título 1">
+            <a:extLst>
+              <a:ext uri="{FF2B5EF4-FFF2-40B4-BE49-F238E27FC236}">
+                <a16:creationId xmlns:a16="http://schemas.microsoft.com/office/drawing/2014/main" id="{A6D23D9B-9364-7526-C35F-FDBDA934AF9E}"/>
+              </a:ext>
+            </a:extLst>
+          </p:cNvPr>
+          <p:cNvSpPr>
+            <a:spLocks noGrp="1"/>
+          </p:cNvSpPr>
+          <p:nvPr>
+            <p:ph type="title"/>
+          </p:nvPr>
+        </p:nvSpPr>
+        <p:spPr>
+          <a:xfrm>
+            <a:off x="207391" y="289089"/>
+            <a:ext cx="11726943" cy="785567"/>
+          </a:xfrm>
+        </p:spPr>
+        <p:txBody>
+          <a:bodyPr>
+            <a:normAutofit/>
+          </a:bodyPr>
+          <a:lstStyle/>
+          <a:p>
+            <a:pPr algn="ctr"/>
+            <a:r>
+              <a:rPr lang="es-ES" sz="4000" b="1" u="sng" dirty="0">
+                <a:solidFill>
+                  <a:srgbClr val="00B0F0"/>
+                </a:solidFill>
+              </a:rPr>
+              <a:t>Finalizar Compra</a:t>
+            </a:r>
+          </a:p>
+        </p:txBody>
+      </p:sp>
+      <p:sp>
+        <p:nvSpPr>
+          <p:cNvPr id="3" name="Marcador de texto 2">
+            <a:extLst>
+              <a:ext uri="{FF2B5EF4-FFF2-40B4-BE49-F238E27FC236}">
+                <a16:creationId xmlns:a16="http://schemas.microsoft.com/office/drawing/2014/main" id="{A2C217F6-80B3-1B06-3392-0B053A218055}"/>
+              </a:ext>
+            </a:extLst>
+          </p:cNvPr>
+          <p:cNvSpPr>
+            <a:spLocks noGrp="1"/>
+          </p:cNvSpPr>
+          <p:nvPr>
+            <p:ph type="body" sz="half" idx="2"/>
+          </p:nvPr>
+        </p:nvSpPr>
+        <p:spPr>
+          <a:xfrm>
+            <a:off x="257666" y="1074656"/>
+            <a:ext cx="11676669" cy="5494255"/>
+          </a:xfrm>
+        </p:spPr>
+        <p:txBody>
+          <a:bodyPr anchor="t">
+            <a:normAutofit/>
+          </a:bodyPr>
+          <a:lstStyle/>
+          <a:p>
+            <a:pPr algn="l"/>
+            <a:r>
+              <a:rPr lang="es-ES" sz="2800" b="1" dirty="0">
+                <a:solidFill>
+                  <a:srgbClr val="00B0F0"/>
+                </a:solidFill>
+              </a:rPr>
+              <a:t>Esta pagina tiene los productos de la Cesta (nombre, precio, imagen, cantidad, total, subtotal y numero tarjeta de pago). Al pulsar Finalizar con la sesión iniciada te crea la factura.</a:t>
+            </a:r>
+          </a:p>
+          <a:p>
+            <a:pPr algn="l"/>
+            <a:endParaRPr lang="es-ES" sz="2800" b="1" dirty="0">
+              <a:solidFill>
+                <a:srgbClr val="00B0F0"/>
+              </a:solidFill>
+            </a:endParaRPr>
+          </a:p>
+        </p:txBody>
+      </p:sp>
+    </p:spTree>
+    <p:extLst>
+      <p:ext uri="{BB962C8B-B14F-4D97-AF65-F5344CB8AC3E}">
+        <p14:creationId xmlns:p14="http://schemas.microsoft.com/office/powerpoint/2010/main" val="1816567654"/>
+      </p:ext>
+    </p:extLst>
+  </p:cSld>
+  <p:clrMapOvr>
+    <a:masterClrMapping/>
+  </p:clrMapOvr>
+</p:sld>
+</file>
+
+<file path=ppt/slides/slide17.xml><?xml version="1.0" encoding="utf-8"?>
+<p:sld xmlns:a="http://schemas.openxmlformats.org/drawingml/2006/main" xmlns:r="http://schemas.openxmlformats.org/officeDocument/2006/relationships" xmlns:p="http://schemas.openxmlformats.org/presentationml/2006/main">
+  <p:cSld>
+    <p:spTree>
+      <p:nvGrpSpPr>
+        <p:cNvPr id="1" name="">
+          <a:extLst>
+            <a:ext uri="{FF2B5EF4-FFF2-40B4-BE49-F238E27FC236}">
               <a16:creationId xmlns:a16="http://schemas.microsoft.com/office/drawing/2014/main" id="{29C46807-5785-4AD4-A4E4-E15E3FB2A51B}"/>
             </a:ext>
           </a:extLst>
@@ -3821,12 +4670,14 @@
           </a:bodyPr>
           <a:lstStyle/>
           <a:p>
-            <a:pPr algn="l"/>
-            <a:endParaRPr lang="es-ES" sz="2800" b="1" dirty="0">
-              <a:solidFill>
-                <a:srgbClr val="00B0F0"/>
-              </a:solidFill>
-            </a:endParaRPr>
+            <a:r>
+              <a:rPr lang="es-ES" sz="2800" b="1" dirty="0">
+                <a:solidFill>
+                  <a:srgbClr val="00B0F0"/>
+                </a:solidFill>
+              </a:rPr>
+              <a:t>Esta pagina tiene las Tarjetas de Aprender añadidas (nombre de usuario, tipo, pregunta, respuestas). Al pulsar Añadir/Editar con la sesión iniciada te lleva a Editar Tarjetas de Aprender. </a:t>
+            </a:r>
           </a:p>
         </p:txBody>
       </p:sp>
@@ -3834,6 +4685,121 @@
     <p:extLst>
       <p:ext uri="{BB962C8B-B14F-4D97-AF65-F5344CB8AC3E}">
         <p14:creationId xmlns:p14="http://schemas.microsoft.com/office/powerpoint/2010/main" val="564579791"/>
+      </p:ext>
+    </p:extLst>
+  </p:cSld>
+  <p:clrMapOvr>
+    <a:masterClrMapping/>
+  </p:clrMapOvr>
+</p:sld>
+</file>
+
+<file path=ppt/slides/slide18.xml><?xml version="1.0" encoding="utf-8"?>
+<p:sld xmlns:a="http://schemas.openxmlformats.org/drawingml/2006/main" xmlns:r="http://schemas.openxmlformats.org/officeDocument/2006/relationships" xmlns:p="http://schemas.openxmlformats.org/presentationml/2006/main">
+  <p:cSld>
+    <p:spTree>
+      <p:nvGrpSpPr>
+        <p:cNvPr id="1" name="">
+          <a:extLst>
+            <a:ext uri="{FF2B5EF4-FFF2-40B4-BE49-F238E27FC236}">
+              <a16:creationId xmlns:a16="http://schemas.microsoft.com/office/drawing/2014/main" id="{B097DD58-2BC6-259F-692C-E21B39177798}"/>
+            </a:ext>
+          </a:extLst>
+        </p:cNvPr>
+        <p:cNvGrpSpPr/>
+        <p:nvPr/>
+      </p:nvGrpSpPr>
+      <p:grpSpPr>
+        <a:xfrm>
+          <a:off x="0" y="0"/>
+          <a:ext cx="0" cy="0"/>
+          <a:chOff x="0" y="0"/>
+          <a:chExt cx="0" cy="0"/>
+        </a:xfrm>
+      </p:grpSpPr>
+      <p:sp>
+        <p:nvSpPr>
+          <p:cNvPr id="2" name="Título 1">
+            <a:extLst>
+              <a:ext uri="{FF2B5EF4-FFF2-40B4-BE49-F238E27FC236}">
+                <a16:creationId xmlns:a16="http://schemas.microsoft.com/office/drawing/2014/main" id="{F1CADAAE-1631-1F63-B0F6-7C6D874F20DF}"/>
+              </a:ext>
+            </a:extLst>
+          </p:cNvPr>
+          <p:cNvSpPr>
+            <a:spLocks noGrp="1"/>
+          </p:cNvSpPr>
+          <p:nvPr>
+            <p:ph type="title"/>
+          </p:nvPr>
+        </p:nvSpPr>
+        <p:spPr>
+          <a:xfrm>
+            <a:off x="207391" y="289089"/>
+            <a:ext cx="11726943" cy="785567"/>
+          </a:xfrm>
+        </p:spPr>
+        <p:txBody>
+          <a:bodyPr>
+            <a:normAutofit/>
+          </a:bodyPr>
+          <a:lstStyle/>
+          <a:p>
+            <a:pPr algn="ctr"/>
+            <a:r>
+              <a:rPr lang="es-ES" sz="4000" b="1" u="sng" dirty="0">
+                <a:solidFill>
+                  <a:srgbClr val="00B0F0"/>
+                </a:solidFill>
+              </a:rPr>
+              <a:t>Editar Tarjetas de Aprender</a:t>
+            </a:r>
+          </a:p>
+        </p:txBody>
+      </p:sp>
+      <p:sp>
+        <p:nvSpPr>
+          <p:cNvPr id="3" name="Marcador de texto 2">
+            <a:extLst>
+              <a:ext uri="{FF2B5EF4-FFF2-40B4-BE49-F238E27FC236}">
+                <a16:creationId xmlns:a16="http://schemas.microsoft.com/office/drawing/2014/main" id="{A13A5B65-C9BE-FAE6-24E2-C31F9465E9E6}"/>
+              </a:ext>
+            </a:extLst>
+          </p:cNvPr>
+          <p:cNvSpPr>
+            <a:spLocks noGrp="1"/>
+          </p:cNvSpPr>
+          <p:nvPr>
+            <p:ph type="body" sz="half" idx="2"/>
+          </p:nvPr>
+        </p:nvSpPr>
+        <p:spPr>
+          <a:xfrm>
+            <a:off x="257666" y="1074656"/>
+            <a:ext cx="11676669" cy="5494255"/>
+          </a:xfrm>
+        </p:spPr>
+        <p:txBody>
+          <a:bodyPr anchor="t">
+            <a:normAutofit/>
+          </a:bodyPr>
+          <a:lstStyle/>
+          <a:p>
+            <a:r>
+              <a:rPr lang="es-ES" sz="2800" b="1" dirty="0">
+                <a:solidFill>
+                  <a:srgbClr val="00B0F0"/>
+                </a:solidFill>
+              </a:rPr>
+              <a:t>Esta pagina permite añadir o editar las Tarjetas de Aprender (nombre de usuario, tipo, pregunta, respuestas). Al pulsar Añadir/Editar con la sesión iniciada te lleva a Tarjetas de Aprender. </a:t>
+            </a:r>
+          </a:p>
+        </p:txBody>
+      </p:sp>
+    </p:spTree>
+    <p:extLst>
+      <p:ext uri="{BB962C8B-B14F-4D97-AF65-F5344CB8AC3E}">
+        <p14:creationId xmlns:p14="http://schemas.microsoft.com/office/powerpoint/2010/main" val="1254558260"/>
       </p:ext>
     </p:extLst>
   </p:cSld>
@@ -3878,8 +4844,8 @@
         </p:nvSpPr>
         <p:spPr>
           <a:xfrm>
-            <a:off x="207391" y="289089"/>
-            <a:ext cx="11726943" cy="785567"/>
+            <a:off x="0" y="2643433"/>
+            <a:ext cx="4713400" cy="785567"/>
           </a:xfrm>
         </p:spPr>
         <p:txBody>
@@ -3918,13 +4884,13 @@
         </p:nvSpPr>
         <p:spPr>
           <a:xfrm>
-            <a:off x="257666" y="1074656"/>
-            <a:ext cx="11676669" cy="5494255"/>
+            <a:off x="257666" y="289089"/>
+            <a:ext cx="11676669" cy="6460503"/>
           </a:xfrm>
         </p:spPr>
         <p:txBody>
           <a:bodyPr anchor="t">
-            <a:normAutofit/>
+            <a:noAutofit/>
           </a:bodyPr>
           <a:lstStyle/>
           <a:p>
@@ -3933,12 +4899,12 @@
               <a:buAutoNum type="arabicPeriod"/>
             </a:pPr>
             <a:r>
-              <a:rPr lang="es-ES" sz="3200" b="1" dirty="0">
+              <a:rPr lang="es-ES" sz="2000" b="1" dirty="0">
                 <a:solidFill>
                   <a:srgbClr val="00B0F0"/>
                 </a:solidFill>
               </a:rPr>
-              <a:t>Login (Iniciar Sesión)</a:t>
+              <a:t>Descripción y Boceto</a:t>
             </a:r>
           </a:p>
           <a:p>
@@ -3947,12 +4913,12 @@
               <a:buAutoNum type="arabicPeriod"/>
             </a:pPr>
             <a:r>
-              <a:rPr lang="es-ES" sz="3200" b="1" dirty="0">
+              <a:rPr lang="es-ES" sz="2000" b="1" dirty="0">
                 <a:solidFill>
                   <a:srgbClr val="00B0F0"/>
                 </a:solidFill>
               </a:rPr>
-              <a:t>Crear Usuario</a:t>
+              <a:t>Estudio de tiendas online</a:t>
             </a:r>
           </a:p>
           <a:p>
@@ -3961,12 +4927,12 @@
               <a:buAutoNum type="arabicPeriod"/>
             </a:pPr>
             <a:r>
-              <a:rPr lang="es-ES" sz="3200" b="1" dirty="0">
+              <a:rPr lang="es-ES" sz="2000" b="1" dirty="0">
                 <a:solidFill>
                   <a:srgbClr val="00B0F0"/>
                 </a:solidFill>
               </a:rPr>
-              <a:t>Recordar Contraseña</a:t>
+              <a:t>Home (Inicio)</a:t>
             </a:r>
           </a:p>
           <a:p>
@@ -3975,12 +4941,12 @@
               <a:buAutoNum type="arabicPeriod"/>
             </a:pPr>
             <a:r>
-              <a:rPr lang="es-ES" sz="3200" b="1" dirty="0">
+              <a:rPr lang="es-ES" sz="2000" b="1" dirty="0">
                 <a:solidFill>
                   <a:srgbClr val="00B0F0"/>
                 </a:solidFill>
               </a:rPr>
-              <a:t>Home (Inicio)</a:t>
+              <a:t>Login (Iniciar Sesión)</a:t>
             </a:r>
           </a:p>
           <a:p>
@@ -3989,12 +4955,12 @@
               <a:buAutoNum type="arabicPeriod"/>
             </a:pPr>
             <a:r>
-              <a:rPr lang="es-ES" sz="3200" b="1" dirty="0">
+              <a:rPr lang="es-ES" sz="2000" b="1" dirty="0">
                 <a:solidFill>
                   <a:srgbClr val="00B0F0"/>
                 </a:solidFill>
               </a:rPr>
-              <a:t>Detalles Producto</a:t>
+              <a:t>Crear Usuario</a:t>
             </a:r>
           </a:p>
           <a:p>
@@ -4003,12 +4969,12 @@
               <a:buAutoNum type="arabicPeriod"/>
             </a:pPr>
             <a:r>
-              <a:rPr lang="es-ES" sz="3200" b="1" dirty="0">
+              <a:rPr lang="es-ES" sz="2000" b="1" dirty="0">
                 <a:solidFill>
                   <a:srgbClr val="00B0F0"/>
                 </a:solidFill>
               </a:rPr>
-              <a:t>Cesta</a:t>
+              <a:t>Recordar Contraseña</a:t>
             </a:r>
           </a:p>
           <a:p>
@@ -4017,12 +4983,12 @@
               <a:buAutoNum type="arabicPeriod"/>
             </a:pPr>
             <a:r>
-              <a:rPr lang="es-ES" sz="3200" b="1" dirty="0">
+              <a:rPr lang="es-ES" sz="2000" b="1" dirty="0">
                 <a:solidFill>
                   <a:srgbClr val="00B0F0"/>
                 </a:solidFill>
               </a:rPr>
-              <a:t>Tarjetas de Pago</a:t>
+              <a:t>Productos</a:t>
             </a:r>
           </a:p>
           <a:p>
@@ -4031,12 +4997,12 @@
               <a:buAutoNum type="arabicPeriod"/>
             </a:pPr>
             <a:r>
-              <a:rPr lang="es-ES" sz="3200" b="1" dirty="0">
+              <a:rPr lang="es-ES" sz="2000" b="1" dirty="0">
                 <a:solidFill>
                   <a:srgbClr val="00B0F0"/>
                 </a:solidFill>
               </a:rPr>
-              <a:t>Finalizar Compra</a:t>
+              <a:t>Detalles Producto</a:t>
             </a:r>
           </a:p>
           <a:p>
@@ -4045,12 +5011,82 @@
               <a:buAutoNum type="arabicPeriod"/>
             </a:pPr>
             <a:r>
-              <a:rPr lang="es-ES" sz="3200" b="1" dirty="0">
+              <a:rPr lang="es-ES" sz="2000" b="1" dirty="0">
                 <a:solidFill>
                   <a:srgbClr val="00B0F0"/>
                 </a:solidFill>
               </a:rPr>
+              <a:t>Cesta</a:t>
+            </a:r>
+          </a:p>
+          <a:p>
+            <a:pPr marL="342900" indent="-342900" algn="ctr">
+              <a:buFont typeface="+mj-lt"/>
+              <a:buAutoNum type="arabicPeriod"/>
+            </a:pPr>
+            <a:r>
+              <a:rPr lang="es-ES" sz="2000" b="1" dirty="0">
+                <a:solidFill>
+                  <a:srgbClr val="00B0F0"/>
+                </a:solidFill>
+              </a:rPr>
+              <a:t>Tarjetas de Pago</a:t>
+            </a:r>
+          </a:p>
+          <a:p>
+            <a:pPr marL="342900" indent="-342900" algn="ctr">
+              <a:buFont typeface="+mj-lt"/>
+              <a:buAutoNum type="arabicPeriod"/>
+            </a:pPr>
+            <a:r>
+              <a:rPr lang="es-ES" sz="2000" b="1" dirty="0">
+                <a:solidFill>
+                  <a:srgbClr val="00B0F0"/>
+                </a:solidFill>
+              </a:rPr>
+              <a:t>Editar Tarjetas de Pago</a:t>
+            </a:r>
+          </a:p>
+          <a:p>
+            <a:pPr marL="342900" indent="-342900" algn="ctr">
+              <a:buFont typeface="+mj-lt"/>
+              <a:buAutoNum type="arabicPeriod"/>
+            </a:pPr>
+            <a:r>
+              <a:rPr lang="es-ES" sz="2000" b="1" dirty="0">
+                <a:solidFill>
+                  <a:srgbClr val="00B0F0"/>
+                </a:solidFill>
+              </a:rPr>
+              <a:t>Finalizar Compra</a:t>
+            </a:r>
+          </a:p>
+          <a:p>
+            <a:pPr marL="342900" indent="-342900" algn="ctr">
+              <a:buFont typeface="+mj-lt"/>
+              <a:buAutoNum type="arabicPeriod"/>
+            </a:pPr>
+            <a:r>
+              <a:rPr lang="es-ES" sz="2000" b="1" dirty="0">
+                <a:solidFill>
+                  <a:srgbClr val="00B0F0"/>
+                </a:solidFill>
+              </a:rPr>
               <a:t>Tarjetas de Aprender</a:t>
+            </a:r>
+          </a:p>
+          <a:p>
+            <a:pPr marL="342900" indent="-342900" algn="ctr">
+              <a:buFont typeface="+mj-lt"/>
+              <a:buAutoNum type="arabicPeriod"/>
+            </a:pPr>
+            <a:r>
+              <a:rPr lang="es-ES" sz="2000" b="1" dirty="0">
+                <a:solidFill>
+                  <a:srgbClr val="00B0F0"/>
+                </a:solidFill>
+              </a:rPr>
+              <a:t>Editar Tarjetas de Aprender</a:t>
             </a:r>
           </a:p>
         </p:txBody>
@@ -4162,7 +5198,7 @@
                   <a:srgbClr val="00B0F0"/>
                 </a:solidFill>
               </a:rPr>
-              <a:t>Crear Usuario</a:t>
+              <a:t>Descripción</a:t>
             </a:r>
           </a:p>
         </p:txBody>
@@ -4186,7 +5222,7 @@
         <p:spPr>
           <a:xfrm>
             <a:off x="257666" y="1074656"/>
-            <a:ext cx="11676669" cy="5494255"/>
+            <a:ext cx="7915373" cy="5494255"/>
           </a:xfrm>
         </p:spPr>
         <p:txBody>
@@ -4195,15 +5231,53 @@
           </a:bodyPr>
           <a:lstStyle/>
           <a:p>
-            <a:pPr algn="l"/>
-            <a:endParaRPr lang="es-ES" sz="2800" b="1" dirty="0">
-              <a:solidFill>
-                <a:srgbClr val="00B0F0"/>
-              </a:solidFill>
-            </a:endParaRPr>
-          </a:p>
-        </p:txBody>
-      </p:sp>
+            <a:r>
+              <a:rPr lang="es-ES" sz="2800" b="1" dirty="0">
+                <a:solidFill>
+                  <a:srgbClr val="00B0F0"/>
+                </a:solidFill>
+              </a:rPr>
+              <a:t>Nuestra app de React es una tienda que reúne todo tipo de tecnologías, desde electrodomésticos, informática, sonido, hogar. Además, permite aprender sobre tecnologías con tarjetas de aprendizaje que puede crear el usuario. Tanto para comprar como para crear tarjetas de aprendizaje debe estar registrado. Puede buscar productos y filtrar por categoría.</a:t>
+            </a:r>
+          </a:p>
+        </p:txBody>
+      </p:sp>
+      <p:pic>
+        <p:nvPicPr>
+          <p:cNvPr id="6" name="Imagen 5">
+            <a:extLst>
+              <a:ext uri="{FF2B5EF4-FFF2-40B4-BE49-F238E27FC236}">
+                <a16:creationId xmlns:a16="http://schemas.microsoft.com/office/drawing/2014/main" id="{F873A213-2B33-6B7C-D026-DAC99A211DF5}"/>
+              </a:ext>
+            </a:extLst>
+          </p:cNvPr>
+          <p:cNvPicPr>
+            <a:picLocks noChangeAspect="1"/>
+          </p:cNvPicPr>
+          <p:nvPr/>
+        </p:nvPicPr>
+        <p:blipFill>
+          <a:blip r:embed="rId2">
+            <a:extLst>
+              <a:ext uri="{28A0092B-C50C-407E-A947-70E740481C1C}">
+                <a14:useLocalDpi xmlns:a14="http://schemas.microsoft.com/office/drawing/2010/main" val="0"/>
+              </a:ext>
+            </a:extLst>
+          </a:blip>
+          <a:stretch>
+            <a:fillRect/>
+          </a:stretch>
+        </p:blipFill>
+        <p:spPr>
+          <a:xfrm>
+            <a:off x="7266495" y="1643406"/>
+            <a:ext cx="4925505" cy="4925505"/>
+          </a:xfrm>
+          <a:prstGeom prst="rect">
+            <a:avLst/>
+          </a:prstGeom>
+        </p:spPr>
+      </p:pic>
     </p:spTree>
     <p:extLst>
       <p:ext uri="{BB962C8B-B14F-4D97-AF65-F5344CB8AC3E}">
@@ -4225,7 +5299,7 @@
         <p:cNvPr id="1" name="">
           <a:extLst>
             <a:ext uri="{FF2B5EF4-FFF2-40B4-BE49-F238E27FC236}">
-              <a16:creationId xmlns:a16="http://schemas.microsoft.com/office/drawing/2014/main" id="{E119C401-D4B8-6335-4299-51358D01BB03}"/>
+              <a16:creationId xmlns:a16="http://schemas.microsoft.com/office/drawing/2014/main" id="{D21DC76E-545E-0E6D-21BC-23C8D988506E}"/>
             </a:ext>
           </a:extLst>
         </p:cNvPr>
@@ -4245,7 +5319,7 @@
           <p:cNvPr id="2" name="Título 1">
             <a:extLst>
               <a:ext uri="{FF2B5EF4-FFF2-40B4-BE49-F238E27FC236}">
-                <a16:creationId xmlns:a16="http://schemas.microsoft.com/office/drawing/2014/main" id="{9CCF1B91-4590-DAD9-6234-08742835CBB2}"/>
+                <a16:creationId xmlns:a16="http://schemas.microsoft.com/office/drawing/2014/main" id="{AF25508B-9D86-0211-2B62-2DF698A1A243}"/>
               </a:ext>
             </a:extLst>
           </p:cNvPr>
@@ -4258,8 +5332,8 @@
         </p:nvSpPr>
         <p:spPr>
           <a:xfrm>
-            <a:off x="207391" y="289089"/>
-            <a:ext cx="11726943" cy="785567"/>
+            <a:off x="0" y="2787191"/>
+            <a:ext cx="2960015" cy="785567"/>
           </a:xfrm>
         </p:spPr>
         <p:txBody>
@@ -4275,7 +5349,7 @@
                   <a:srgbClr val="00B0F0"/>
                 </a:solidFill>
               </a:rPr>
-              <a:t>Recordar Contraseña</a:t>
+              <a:t>Boceto</a:t>
             </a:r>
           </a:p>
         </p:txBody>
@@ -4285,7 +5359,7 @@
           <p:cNvPr id="3" name="Marcador de texto 2">
             <a:extLst>
               <a:ext uri="{FF2B5EF4-FFF2-40B4-BE49-F238E27FC236}">
-                <a16:creationId xmlns:a16="http://schemas.microsoft.com/office/drawing/2014/main" id="{728CD9F5-1223-187B-640D-584DF592E104}"/>
+                <a16:creationId xmlns:a16="http://schemas.microsoft.com/office/drawing/2014/main" id="{3BAF2323-5F74-A3E2-5A35-6E27F1D10221}"/>
               </a:ext>
             </a:extLst>
           </p:cNvPr>
@@ -4308,7 +5382,6 @@
           </a:bodyPr>
           <a:lstStyle/>
           <a:p>
-            <a:pPr algn="l"/>
             <a:endParaRPr lang="es-ES" sz="2800" b="1" dirty="0">
               <a:solidFill>
                 <a:srgbClr val="00B0F0"/>
@@ -4317,10 +5390,46 @@
           </a:p>
         </p:txBody>
       </p:sp>
+      <p:pic>
+        <p:nvPicPr>
+          <p:cNvPr id="5" name="Imagen 4">
+            <a:extLst>
+              <a:ext uri="{FF2B5EF4-FFF2-40B4-BE49-F238E27FC236}">
+                <a16:creationId xmlns:a16="http://schemas.microsoft.com/office/drawing/2014/main" id="{43DC060B-5E29-4192-7510-B72DF9347A00}"/>
+              </a:ext>
+            </a:extLst>
+          </p:cNvPr>
+          <p:cNvPicPr>
+            <a:picLocks noChangeAspect="1"/>
+          </p:cNvPicPr>
+          <p:nvPr/>
+        </p:nvPicPr>
+        <p:blipFill>
+          <a:blip r:embed="rId2">
+            <a:extLst>
+              <a:ext uri="{28A0092B-C50C-407E-A947-70E740481C1C}">
+                <a14:useLocalDpi xmlns:a14="http://schemas.microsoft.com/office/drawing/2010/main" val="0"/>
+              </a:ext>
+            </a:extLst>
+          </a:blip>
+          <a:stretch>
+            <a:fillRect/>
+          </a:stretch>
+        </p:blipFill>
+        <p:spPr>
+          <a:xfrm>
+            <a:off x="2777284" y="289089"/>
+            <a:ext cx="9207325" cy="6279821"/>
+          </a:xfrm>
+          <a:prstGeom prst="rect">
+            <a:avLst/>
+          </a:prstGeom>
+        </p:spPr>
+      </p:pic>
     </p:spTree>
     <p:extLst>
       <p:ext uri="{BB962C8B-B14F-4D97-AF65-F5344CB8AC3E}">
-        <p14:creationId xmlns:p14="http://schemas.microsoft.com/office/powerpoint/2010/main" val="3496824983"/>
+        <p14:creationId xmlns:p14="http://schemas.microsoft.com/office/powerpoint/2010/main" val="925046023"/>
       </p:ext>
     </p:extLst>
   </p:cSld>
@@ -4331,6 +5440,355 @@
 </file>
 
 <file path=ppt/slides/slide5.xml><?xml version="1.0" encoding="utf-8"?>
+<p:sld xmlns:a="http://schemas.openxmlformats.org/drawingml/2006/main" xmlns:r="http://schemas.openxmlformats.org/officeDocument/2006/relationships" xmlns:p="http://schemas.openxmlformats.org/presentationml/2006/main">
+  <p:cSld>
+    <p:spTree>
+      <p:nvGrpSpPr>
+        <p:cNvPr id="1" name="">
+          <a:extLst>
+            <a:ext uri="{FF2B5EF4-FFF2-40B4-BE49-F238E27FC236}">
+              <a16:creationId xmlns:a16="http://schemas.microsoft.com/office/drawing/2014/main" id="{B4F17915-103B-F114-C7DA-4886939664CF}"/>
+            </a:ext>
+          </a:extLst>
+        </p:cNvPr>
+        <p:cNvGrpSpPr/>
+        <p:nvPr/>
+      </p:nvGrpSpPr>
+      <p:grpSpPr>
+        <a:xfrm>
+          <a:off x="0" y="0"/>
+          <a:ext cx="0" cy="0"/>
+          <a:chOff x="0" y="0"/>
+          <a:chExt cx="0" cy="0"/>
+        </a:xfrm>
+      </p:grpSpPr>
+      <p:sp>
+        <p:nvSpPr>
+          <p:cNvPr id="2" name="Título 1">
+            <a:extLst>
+              <a:ext uri="{FF2B5EF4-FFF2-40B4-BE49-F238E27FC236}">
+                <a16:creationId xmlns:a16="http://schemas.microsoft.com/office/drawing/2014/main" id="{3BFFF4B5-6210-0F6B-D788-32B41A52C626}"/>
+              </a:ext>
+            </a:extLst>
+          </p:cNvPr>
+          <p:cNvSpPr>
+            <a:spLocks noGrp="1"/>
+          </p:cNvSpPr>
+          <p:nvPr>
+            <p:ph type="title"/>
+          </p:nvPr>
+        </p:nvSpPr>
+        <p:spPr>
+          <a:xfrm>
+            <a:off x="207391" y="289089"/>
+            <a:ext cx="11726943" cy="785567"/>
+          </a:xfrm>
+        </p:spPr>
+        <p:txBody>
+          <a:bodyPr>
+            <a:normAutofit/>
+          </a:bodyPr>
+          <a:lstStyle/>
+          <a:p>
+            <a:pPr algn="ctr"/>
+            <a:r>
+              <a:rPr lang="es-ES" sz="4000" b="1" u="sng" dirty="0">
+                <a:solidFill>
+                  <a:srgbClr val="00B0F0"/>
+                </a:solidFill>
+              </a:rPr>
+              <a:t>Estudio de Tiendas Online</a:t>
+            </a:r>
+          </a:p>
+        </p:txBody>
+      </p:sp>
+      <p:sp>
+        <p:nvSpPr>
+          <p:cNvPr id="3" name="Marcador de texto 2">
+            <a:extLst>
+              <a:ext uri="{FF2B5EF4-FFF2-40B4-BE49-F238E27FC236}">
+                <a16:creationId xmlns:a16="http://schemas.microsoft.com/office/drawing/2014/main" id="{94D740A6-473B-7BD3-BF92-8AB56433029B}"/>
+              </a:ext>
+            </a:extLst>
+          </p:cNvPr>
+          <p:cNvSpPr>
+            <a:spLocks noGrp="1"/>
+          </p:cNvSpPr>
+          <p:nvPr>
+            <p:ph type="body" sz="half" idx="2"/>
+          </p:nvPr>
+        </p:nvSpPr>
+        <p:spPr>
+          <a:xfrm>
+            <a:off x="257666" y="1074656"/>
+            <a:ext cx="11676669" cy="5494255"/>
+          </a:xfrm>
+        </p:spPr>
+        <p:txBody>
+          <a:bodyPr anchor="t">
+            <a:normAutofit/>
+          </a:bodyPr>
+          <a:lstStyle/>
+          <a:p>
+            <a:pPr algn="ctr"/>
+            <a:r>
+              <a:rPr lang="es-ES" sz="2800" b="1" u="sng" dirty="0" err="1">
+                <a:solidFill>
+                  <a:srgbClr val="00B0F0"/>
+                </a:solidFill>
+              </a:rPr>
+              <a:t>Mediamarkt</a:t>
+            </a:r>
+            <a:endParaRPr lang="es-ES" sz="2800" b="1" u="sng" dirty="0">
+              <a:solidFill>
+                <a:srgbClr val="00B0F0"/>
+              </a:solidFill>
+            </a:endParaRPr>
+          </a:p>
+          <a:p>
+            <a:pPr algn="l"/>
+            <a:r>
+              <a:rPr lang="es-ES" sz="2800" b="1" dirty="0">
+                <a:solidFill>
+                  <a:srgbClr val="00B0F0"/>
+                </a:solidFill>
+              </a:rPr>
+              <a:t>Hemos analizado las interfaces principales de la tienda online </a:t>
+            </a:r>
+            <a:r>
+              <a:rPr lang="es-ES" sz="2800" b="1" dirty="0" err="1">
+                <a:solidFill>
+                  <a:srgbClr val="00B0F0"/>
+                </a:solidFill>
+              </a:rPr>
+              <a:t>MediaMarkt</a:t>
+            </a:r>
+            <a:r>
+              <a:rPr lang="es-ES" sz="2800" b="1" dirty="0">
+                <a:solidFill>
+                  <a:srgbClr val="00B0F0"/>
+                </a:solidFill>
+              </a:rPr>
+              <a:t> como referencia para el diseño de una tienda de electrodomésticos propia. Es uno de los e-</a:t>
+            </a:r>
+            <a:r>
+              <a:rPr lang="es-ES" sz="2800" b="1" dirty="0" err="1">
+                <a:solidFill>
+                  <a:srgbClr val="00B0F0"/>
+                </a:solidFill>
+              </a:rPr>
+              <a:t>commerce</a:t>
+            </a:r>
+            <a:r>
+              <a:rPr lang="es-ES" sz="2800" b="1" dirty="0">
+                <a:solidFill>
+                  <a:srgbClr val="00B0F0"/>
+                </a:solidFill>
+              </a:rPr>
+              <a:t> lideres en venta de tecnología y electrodomésticos en España, por lo que su estructura, experiencia de usuario y elementos visuales resultan una guía útil para identificar buenas practicas y oportunidades de mejora.</a:t>
+            </a:r>
+          </a:p>
+          <a:p>
+            <a:pPr algn="l"/>
+            <a:r>
+              <a:rPr lang="es-ES" sz="2800" b="1" dirty="0">
+                <a:solidFill>
+                  <a:srgbClr val="00B0F0"/>
+                </a:solidFill>
+              </a:rPr>
+              <a:t>El análisis se centra en las siguientes pantallas clave del recorrido de compra: - Home o pagina principal - Pagina de categoría - Resultados de búsqueda - Ficha de producto - Carrito y proceso de compra - Area de usuario y postventa</a:t>
+            </a:r>
+          </a:p>
+          <a:p>
+            <a:r>
+              <a:rPr lang="es-ES" sz="2800" b="1" dirty="0">
+                <a:solidFill>
+                  <a:srgbClr val="00B0F0"/>
+                </a:solidFill>
+              </a:rPr>
+              <a:t>Mas info en: Estudio Mediamarkt.docx</a:t>
+            </a:r>
+          </a:p>
+        </p:txBody>
+      </p:sp>
+    </p:spTree>
+    <p:extLst>
+      <p:ext uri="{BB962C8B-B14F-4D97-AF65-F5344CB8AC3E}">
+        <p14:creationId xmlns:p14="http://schemas.microsoft.com/office/powerpoint/2010/main" val="1933394405"/>
+      </p:ext>
+    </p:extLst>
+  </p:cSld>
+  <p:clrMapOvr>
+    <a:masterClrMapping/>
+  </p:clrMapOvr>
+</p:sld>
+</file>
+
+<file path=ppt/slides/slide6.xml><?xml version="1.0" encoding="utf-8"?>
+<p:sld xmlns:a="http://schemas.openxmlformats.org/drawingml/2006/main" xmlns:r="http://schemas.openxmlformats.org/officeDocument/2006/relationships" xmlns:p="http://schemas.openxmlformats.org/presentationml/2006/main">
+  <p:cSld>
+    <p:spTree>
+      <p:nvGrpSpPr>
+        <p:cNvPr id="1" name="">
+          <a:extLst>
+            <a:ext uri="{FF2B5EF4-FFF2-40B4-BE49-F238E27FC236}">
+              <a16:creationId xmlns:a16="http://schemas.microsoft.com/office/drawing/2014/main" id="{57EA5ACD-B567-F69B-F39E-6C862B4754A7}"/>
+            </a:ext>
+          </a:extLst>
+        </p:cNvPr>
+        <p:cNvGrpSpPr/>
+        <p:nvPr/>
+      </p:nvGrpSpPr>
+      <p:grpSpPr>
+        <a:xfrm>
+          <a:off x="0" y="0"/>
+          <a:ext cx="0" cy="0"/>
+          <a:chOff x="0" y="0"/>
+          <a:chExt cx="0" cy="0"/>
+        </a:xfrm>
+      </p:grpSpPr>
+      <p:sp>
+        <p:nvSpPr>
+          <p:cNvPr id="2" name="Título 1">
+            <a:extLst>
+              <a:ext uri="{FF2B5EF4-FFF2-40B4-BE49-F238E27FC236}">
+                <a16:creationId xmlns:a16="http://schemas.microsoft.com/office/drawing/2014/main" id="{1BA2A386-798D-A4AA-7084-E6968799C741}"/>
+              </a:ext>
+            </a:extLst>
+          </p:cNvPr>
+          <p:cNvSpPr>
+            <a:spLocks noGrp="1"/>
+          </p:cNvSpPr>
+          <p:nvPr>
+            <p:ph type="title"/>
+          </p:nvPr>
+        </p:nvSpPr>
+        <p:spPr>
+          <a:xfrm>
+            <a:off x="207391" y="289089"/>
+            <a:ext cx="11726943" cy="785567"/>
+          </a:xfrm>
+        </p:spPr>
+        <p:txBody>
+          <a:bodyPr>
+            <a:normAutofit/>
+          </a:bodyPr>
+          <a:lstStyle/>
+          <a:p>
+            <a:pPr algn="ctr"/>
+            <a:r>
+              <a:rPr lang="es-ES" sz="4000" b="1" u="sng" dirty="0">
+                <a:solidFill>
+                  <a:srgbClr val="00B0F0"/>
+                </a:solidFill>
+              </a:rPr>
+              <a:t>Estudio de Tiendas Online</a:t>
+            </a:r>
+          </a:p>
+        </p:txBody>
+      </p:sp>
+      <p:sp>
+        <p:nvSpPr>
+          <p:cNvPr id="3" name="Marcador de texto 2">
+            <a:extLst>
+              <a:ext uri="{FF2B5EF4-FFF2-40B4-BE49-F238E27FC236}">
+                <a16:creationId xmlns:a16="http://schemas.microsoft.com/office/drawing/2014/main" id="{C5E68FD5-0D93-B3E3-7E8A-5D54643315CA}"/>
+              </a:ext>
+            </a:extLst>
+          </p:cNvPr>
+          <p:cNvSpPr>
+            <a:spLocks noGrp="1"/>
+          </p:cNvSpPr>
+          <p:nvPr>
+            <p:ph type="body" sz="half" idx="2"/>
+          </p:nvPr>
+        </p:nvSpPr>
+        <p:spPr>
+          <a:xfrm>
+            <a:off x="257666" y="1074656"/>
+            <a:ext cx="11676669" cy="5494255"/>
+          </a:xfrm>
+        </p:spPr>
+        <p:txBody>
+          <a:bodyPr anchor="t">
+            <a:normAutofit/>
+          </a:bodyPr>
+          <a:lstStyle/>
+          <a:p>
+            <a:pPr algn="ctr"/>
+            <a:r>
+              <a:rPr lang="es-ES" sz="2800" b="1" u="sng" dirty="0">
+                <a:solidFill>
+                  <a:srgbClr val="00B0F0"/>
+                </a:solidFill>
+              </a:rPr>
+              <a:t>Amazon</a:t>
+            </a:r>
+          </a:p>
+          <a:p>
+            <a:pPr algn="l"/>
+            <a:r>
+              <a:rPr lang="es-ES" sz="2800" b="1" dirty="0">
+                <a:solidFill>
+                  <a:srgbClr val="00B0F0"/>
+                </a:solidFill>
+              </a:rPr>
+              <a:t>Hemos analizado las interfaces principales de la tienda online Amazon como referencia para el diseño de una tienda de electrodomésticos propia. Es uno de los e-</a:t>
+            </a:r>
+            <a:r>
+              <a:rPr lang="es-ES" sz="2800" b="1" dirty="0" err="1">
+                <a:solidFill>
+                  <a:srgbClr val="00B0F0"/>
+                </a:solidFill>
+              </a:rPr>
+              <a:t>commerce</a:t>
+            </a:r>
+            <a:r>
+              <a:rPr lang="es-ES" sz="2800" b="1" dirty="0">
+                <a:solidFill>
+                  <a:srgbClr val="00B0F0"/>
+                </a:solidFill>
+              </a:rPr>
+              <a:t> lideres en venta online, por lo que su estructura, experiencia de usuario y elementos visuales resultan una guía útil para identificar buenas practicas y oportunidades de mejora.</a:t>
+            </a:r>
+          </a:p>
+          <a:p>
+            <a:pPr algn="l"/>
+            <a:r>
+              <a:rPr lang="es-ES" sz="2800" b="1" dirty="0">
+                <a:solidFill>
+                  <a:srgbClr val="00B0F0"/>
+                </a:solidFill>
+              </a:rPr>
+              <a:t>El análisis se centra en las siguientes pantallas clave del recorrido de compra: - Home o pagina principal - Pagina de categoría - Resultados de búsqueda - Ficha de producto - Carrito y proceso de compra - Area de usuario y postventa</a:t>
+            </a:r>
+          </a:p>
+          <a:p>
+            <a:r>
+              <a:rPr lang="es-ES" sz="2800" b="1" dirty="0">
+                <a:solidFill>
+                  <a:srgbClr val="00B0F0"/>
+                </a:solidFill>
+              </a:rPr>
+              <a:t>Mas info en: Estudio Amazon.docx</a:t>
+            </a:r>
+          </a:p>
+        </p:txBody>
+      </p:sp>
+    </p:spTree>
+    <p:extLst>
+      <p:ext uri="{BB962C8B-B14F-4D97-AF65-F5344CB8AC3E}">
+        <p14:creationId xmlns:p14="http://schemas.microsoft.com/office/powerpoint/2010/main" val="3447660507"/>
+      </p:ext>
+    </p:extLst>
+  </p:cSld>
+  <p:clrMapOvr>
+    <a:masterClrMapping/>
+  </p:clrMapOvr>
+</p:sld>
+</file>
+
+<file path=ppt/slides/slide7.xml><?xml version="1.0" encoding="utf-8"?>
 <p:sld xmlns:a="http://schemas.openxmlformats.org/drawingml/2006/main" xmlns:r="http://schemas.openxmlformats.org/officeDocument/2006/relationships" xmlns:p="http://schemas.openxmlformats.org/presentationml/2006/main">
   <p:cSld>
     <p:spTree>
@@ -4421,12 +5879,24 @@
           </a:bodyPr>
           <a:lstStyle/>
           <a:p>
-            <a:pPr algn="l"/>
-            <a:endParaRPr lang="es-ES" sz="2800" b="1" dirty="0">
-              <a:solidFill>
-                <a:srgbClr val="00B0F0"/>
-              </a:solidFill>
-            </a:endParaRPr>
+            <a:r>
+              <a:rPr lang="es-ES" sz="2800" b="1" dirty="0">
+                <a:solidFill>
+                  <a:srgbClr val="00B0F0"/>
+                </a:solidFill>
+              </a:rPr>
+              <a:t>Esta pagina es la de Inicio aparece si ha iniciado sesión el Nombre de Usuario. Al pulsar Cerrar Sesión cierra la sesión y vuelve a aparecer el botón Login. Al pulsar Login te lleva a la pagina de Login (Iniciar Sesión).</a:t>
+            </a:r>
+          </a:p>
+          <a:p>
+            <a:r>
+              <a:rPr lang="es-ES" sz="2800" b="1" dirty="0">
+                <a:solidFill>
+                  <a:srgbClr val="00B0F0"/>
+                </a:solidFill>
+              </a:rPr>
+              <a:t>Además, aparece en el menu superior el logo (te lleva a esta misma página), una barra de búsqueda para buscar en producto en la tienda y las diferentes páginas. En el centro una lista con los productos destacados. Y en el menu inferior el logo (te lleva a esta misma página), las diferentes páginas y el copyright.</a:t>
+            </a:r>
           </a:p>
         </p:txBody>
       </p:sp>
@@ -4434,232 +5904,6 @@
     <p:extLst>
       <p:ext uri="{BB962C8B-B14F-4D97-AF65-F5344CB8AC3E}">
         <p14:creationId xmlns:p14="http://schemas.microsoft.com/office/powerpoint/2010/main" val="1676473529"/>
-      </p:ext>
-    </p:extLst>
-  </p:cSld>
-  <p:clrMapOvr>
-    <a:masterClrMapping/>
-  </p:clrMapOvr>
-</p:sld>
-</file>
-
-<file path=ppt/slides/slide6.xml><?xml version="1.0" encoding="utf-8"?>
-<p:sld xmlns:a="http://schemas.openxmlformats.org/drawingml/2006/main" xmlns:r="http://schemas.openxmlformats.org/officeDocument/2006/relationships" xmlns:p="http://schemas.openxmlformats.org/presentationml/2006/main">
-  <p:cSld>
-    <p:spTree>
-      <p:nvGrpSpPr>
-        <p:cNvPr id="1" name="">
-          <a:extLst>
-            <a:ext uri="{FF2B5EF4-FFF2-40B4-BE49-F238E27FC236}">
-              <a16:creationId xmlns:a16="http://schemas.microsoft.com/office/drawing/2014/main" id="{8734807C-99FC-F8E9-35A7-FF96B280E77C}"/>
-            </a:ext>
-          </a:extLst>
-        </p:cNvPr>
-        <p:cNvGrpSpPr/>
-        <p:nvPr/>
-      </p:nvGrpSpPr>
-      <p:grpSpPr>
-        <a:xfrm>
-          <a:off x="0" y="0"/>
-          <a:ext cx="0" cy="0"/>
-          <a:chOff x="0" y="0"/>
-          <a:chExt cx="0" cy="0"/>
-        </a:xfrm>
-      </p:grpSpPr>
-      <p:sp>
-        <p:nvSpPr>
-          <p:cNvPr id="2" name="Título 1">
-            <a:extLst>
-              <a:ext uri="{FF2B5EF4-FFF2-40B4-BE49-F238E27FC236}">
-                <a16:creationId xmlns:a16="http://schemas.microsoft.com/office/drawing/2014/main" id="{FEEC6AD6-694C-BEFB-E8DE-FF33A6EFB253}"/>
-              </a:ext>
-            </a:extLst>
-          </p:cNvPr>
-          <p:cNvSpPr>
-            <a:spLocks noGrp="1"/>
-          </p:cNvSpPr>
-          <p:nvPr>
-            <p:ph type="title"/>
-          </p:nvPr>
-        </p:nvSpPr>
-        <p:spPr>
-          <a:xfrm>
-            <a:off x="207391" y="289089"/>
-            <a:ext cx="11726943" cy="785567"/>
-          </a:xfrm>
-        </p:spPr>
-        <p:txBody>
-          <a:bodyPr>
-            <a:normAutofit/>
-          </a:bodyPr>
-          <a:lstStyle/>
-          <a:p>
-            <a:pPr algn="ctr"/>
-            <a:r>
-              <a:rPr lang="es-ES" sz="4000" b="1" u="sng" dirty="0">
-                <a:solidFill>
-                  <a:srgbClr val="00B0F0"/>
-                </a:solidFill>
-              </a:rPr>
-              <a:t>Detalles Producto</a:t>
-            </a:r>
-          </a:p>
-        </p:txBody>
-      </p:sp>
-      <p:sp>
-        <p:nvSpPr>
-          <p:cNvPr id="3" name="Marcador de texto 2">
-            <a:extLst>
-              <a:ext uri="{FF2B5EF4-FFF2-40B4-BE49-F238E27FC236}">
-                <a16:creationId xmlns:a16="http://schemas.microsoft.com/office/drawing/2014/main" id="{5FEE8E04-F9F5-0CD4-3CBB-E1F050D9D12D}"/>
-              </a:ext>
-            </a:extLst>
-          </p:cNvPr>
-          <p:cNvSpPr>
-            <a:spLocks noGrp="1"/>
-          </p:cNvSpPr>
-          <p:nvPr>
-            <p:ph type="body" sz="half" idx="2"/>
-          </p:nvPr>
-        </p:nvSpPr>
-        <p:spPr>
-          <a:xfrm>
-            <a:off x="257666" y="1074656"/>
-            <a:ext cx="11676669" cy="5494255"/>
-          </a:xfrm>
-        </p:spPr>
-        <p:txBody>
-          <a:bodyPr anchor="t">
-            <a:normAutofit/>
-          </a:bodyPr>
-          <a:lstStyle/>
-          <a:p>
-            <a:pPr algn="l"/>
-            <a:endParaRPr lang="es-ES" sz="2800" b="1" dirty="0">
-              <a:solidFill>
-                <a:srgbClr val="00B0F0"/>
-              </a:solidFill>
-            </a:endParaRPr>
-          </a:p>
-        </p:txBody>
-      </p:sp>
-    </p:spTree>
-    <p:extLst>
-      <p:ext uri="{BB962C8B-B14F-4D97-AF65-F5344CB8AC3E}">
-        <p14:creationId xmlns:p14="http://schemas.microsoft.com/office/powerpoint/2010/main" val="1380892801"/>
-      </p:ext>
-    </p:extLst>
-  </p:cSld>
-  <p:clrMapOvr>
-    <a:masterClrMapping/>
-  </p:clrMapOvr>
-</p:sld>
-</file>
-
-<file path=ppt/slides/slide7.xml><?xml version="1.0" encoding="utf-8"?>
-<p:sld xmlns:a="http://schemas.openxmlformats.org/drawingml/2006/main" xmlns:r="http://schemas.openxmlformats.org/officeDocument/2006/relationships" xmlns:p="http://schemas.openxmlformats.org/presentationml/2006/main">
-  <p:cSld>
-    <p:spTree>
-      <p:nvGrpSpPr>
-        <p:cNvPr id="1" name="">
-          <a:extLst>
-            <a:ext uri="{FF2B5EF4-FFF2-40B4-BE49-F238E27FC236}">
-              <a16:creationId xmlns:a16="http://schemas.microsoft.com/office/drawing/2014/main" id="{4BF9874A-19C9-8D09-CF26-05F8169BF4FD}"/>
-            </a:ext>
-          </a:extLst>
-        </p:cNvPr>
-        <p:cNvGrpSpPr/>
-        <p:nvPr/>
-      </p:nvGrpSpPr>
-      <p:grpSpPr>
-        <a:xfrm>
-          <a:off x="0" y="0"/>
-          <a:ext cx="0" cy="0"/>
-          <a:chOff x="0" y="0"/>
-          <a:chExt cx="0" cy="0"/>
-        </a:xfrm>
-      </p:grpSpPr>
-      <p:sp>
-        <p:nvSpPr>
-          <p:cNvPr id="2" name="Título 1">
-            <a:extLst>
-              <a:ext uri="{FF2B5EF4-FFF2-40B4-BE49-F238E27FC236}">
-                <a16:creationId xmlns:a16="http://schemas.microsoft.com/office/drawing/2014/main" id="{E579921F-0C04-1CD1-6B65-4471E3655DCD}"/>
-              </a:ext>
-            </a:extLst>
-          </p:cNvPr>
-          <p:cNvSpPr>
-            <a:spLocks noGrp="1"/>
-          </p:cNvSpPr>
-          <p:nvPr>
-            <p:ph type="title"/>
-          </p:nvPr>
-        </p:nvSpPr>
-        <p:spPr>
-          <a:xfrm>
-            <a:off x="207391" y="289089"/>
-            <a:ext cx="11726943" cy="785567"/>
-          </a:xfrm>
-        </p:spPr>
-        <p:txBody>
-          <a:bodyPr>
-            <a:normAutofit/>
-          </a:bodyPr>
-          <a:lstStyle/>
-          <a:p>
-            <a:pPr algn="ctr"/>
-            <a:r>
-              <a:rPr lang="es-ES" sz="4000" b="1" u="sng" dirty="0">
-                <a:solidFill>
-                  <a:srgbClr val="00B0F0"/>
-                </a:solidFill>
-              </a:rPr>
-              <a:t>Cesta</a:t>
-            </a:r>
-          </a:p>
-        </p:txBody>
-      </p:sp>
-      <p:sp>
-        <p:nvSpPr>
-          <p:cNvPr id="3" name="Marcador de texto 2">
-            <a:extLst>
-              <a:ext uri="{FF2B5EF4-FFF2-40B4-BE49-F238E27FC236}">
-                <a16:creationId xmlns:a16="http://schemas.microsoft.com/office/drawing/2014/main" id="{BD717E3C-37B7-FB89-2E47-509730C09DD1}"/>
-              </a:ext>
-            </a:extLst>
-          </p:cNvPr>
-          <p:cNvSpPr>
-            <a:spLocks noGrp="1"/>
-          </p:cNvSpPr>
-          <p:nvPr>
-            <p:ph type="body" sz="half" idx="2"/>
-          </p:nvPr>
-        </p:nvSpPr>
-        <p:spPr>
-          <a:xfrm>
-            <a:off x="257666" y="1074656"/>
-            <a:ext cx="11676669" cy="5494255"/>
-          </a:xfrm>
-        </p:spPr>
-        <p:txBody>
-          <a:bodyPr anchor="t">
-            <a:normAutofit/>
-          </a:bodyPr>
-          <a:lstStyle/>
-          <a:p>
-            <a:pPr algn="l"/>
-            <a:endParaRPr lang="es-ES" sz="2800" b="1" dirty="0">
-              <a:solidFill>
-                <a:srgbClr val="00B0F0"/>
-              </a:solidFill>
-            </a:endParaRPr>
-          </a:p>
-        </p:txBody>
-      </p:sp>
-    </p:spTree>
-    <p:extLst>
-      <p:ext uri="{BB962C8B-B14F-4D97-AF65-F5344CB8AC3E}">
-        <p14:creationId xmlns:p14="http://schemas.microsoft.com/office/powerpoint/2010/main" val="1152180217"/>
       </p:ext>
     </p:extLst>
   </p:cSld>
@@ -4677,7 +5921,7 @@
         <p:cNvPr id="1" name="">
           <a:extLst>
             <a:ext uri="{FF2B5EF4-FFF2-40B4-BE49-F238E27FC236}">
-              <a16:creationId xmlns:a16="http://schemas.microsoft.com/office/drawing/2014/main" id="{77B6B23D-9BD4-51FA-B348-AF0D834EB444}"/>
+              <a16:creationId xmlns:a16="http://schemas.microsoft.com/office/drawing/2014/main" id="{05F97A8B-CC85-2590-71C9-89423ADB4576}"/>
             </a:ext>
           </a:extLst>
         </p:cNvPr>
@@ -4697,7 +5941,7 @@
           <p:cNvPr id="2" name="Título 1">
             <a:extLst>
               <a:ext uri="{FF2B5EF4-FFF2-40B4-BE49-F238E27FC236}">
-                <a16:creationId xmlns:a16="http://schemas.microsoft.com/office/drawing/2014/main" id="{DFA6F264-69B9-887A-C8F2-649D802261E8}"/>
+                <a16:creationId xmlns:a16="http://schemas.microsoft.com/office/drawing/2014/main" id="{8FEEE2F4-9471-3268-F6DF-C77D4E2682EF}"/>
               </a:ext>
             </a:extLst>
           </p:cNvPr>
@@ -4727,7 +5971,7 @@
                   <a:srgbClr val="00B0F0"/>
                 </a:solidFill>
               </a:rPr>
-              <a:t>Tarjetas de Pago</a:t>
+              <a:t>Login (Iniciar Sesión)</a:t>
             </a:r>
           </a:p>
         </p:txBody>
@@ -4737,7 +5981,7 @@
           <p:cNvPr id="3" name="Marcador de texto 2">
             <a:extLst>
               <a:ext uri="{FF2B5EF4-FFF2-40B4-BE49-F238E27FC236}">
-                <a16:creationId xmlns:a16="http://schemas.microsoft.com/office/drawing/2014/main" id="{458DDE8E-AC4E-D474-8D13-9197032F3E68}"/>
+                <a16:creationId xmlns:a16="http://schemas.microsoft.com/office/drawing/2014/main" id="{78411CAF-AA8E-D2FF-D8EF-9406DEEF37B9}"/>
               </a:ext>
             </a:extLst>
           </p:cNvPr>
@@ -4760,19 +6004,21 @@
           </a:bodyPr>
           <a:lstStyle/>
           <a:p>
-            <a:pPr algn="l"/>
-            <a:endParaRPr lang="es-ES" sz="2800" b="1" dirty="0">
-              <a:solidFill>
-                <a:srgbClr val="00B0F0"/>
-              </a:solidFill>
-            </a:endParaRPr>
+            <a:r>
+              <a:rPr lang="es-ES" sz="2800" b="1" dirty="0">
+                <a:solidFill>
+                  <a:srgbClr val="00B0F0"/>
+                </a:solidFill>
+              </a:rPr>
+              <a:t>Esta pagina es para Iniciar Sesión poniendo el Email y Contraseña. Al pulsar Iniciar Sesión te lleva a Home (Inicio) con la sesión iniciada.</a:t>
+            </a:r>
           </a:p>
         </p:txBody>
       </p:sp>
     </p:spTree>
     <p:extLst>
       <p:ext uri="{BB962C8B-B14F-4D97-AF65-F5344CB8AC3E}">
-        <p14:creationId xmlns:p14="http://schemas.microsoft.com/office/powerpoint/2010/main" val="477548462"/>
+        <p14:creationId xmlns:p14="http://schemas.microsoft.com/office/powerpoint/2010/main" val="1353400800"/>
       </p:ext>
     </p:extLst>
   </p:cSld>
@@ -4790,7 +6036,7 @@
         <p:cNvPr id="1" name="">
           <a:extLst>
             <a:ext uri="{FF2B5EF4-FFF2-40B4-BE49-F238E27FC236}">
-              <a16:creationId xmlns:a16="http://schemas.microsoft.com/office/drawing/2014/main" id="{8C9CDBF9-B222-7608-9292-3C46CA2B2333}"/>
+              <a16:creationId xmlns:a16="http://schemas.microsoft.com/office/drawing/2014/main" id="{0060C5B9-F702-32E6-E203-5789E7D7116D}"/>
             </a:ext>
           </a:extLst>
         </p:cNvPr>
@@ -4810,7 +6056,7 @@
           <p:cNvPr id="2" name="Título 1">
             <a:extLst>
               <a:ext uri="{FF2B5EF4-FFF2-40B4-BE49-F238E27FC236}">
-                <a16:creationId xmlns:a16="http://schemas.microsoft.com/office/drawing/2014/main" id="{A6D23D9B-9364-7526-C35F-FDBDA934AF9E}"/>
+                <a16:creationId xmlns:a16="http://schemas.microsoft.com/office/drawing/2014/main" id="{C962E0ED-3679-091B-AA9D-931D764686FA}"/>
               </a:ext>
             </a:extLst>
           </p:cNvPr>
@@ -4840,7 +6086,7 @@
                   <a:srgbClr val="00B0F0"/>
                 </a:solidFill>
               </a:rPr>
-              <a:t>Finalizar Compra</a:t>
+              <a:t>Crear Usuario</a:t>
             </a:r>
           </a:p>
         </p:txBody>
@@ -4850,7 +6096,7 @@
           <p:cNvPr id="3" name="Marcador de texto 2">
             <a:extLst>
               <a:ext uri="{FF2B5EF4-FFF2-40B4-BE49-F238E27FC236}">
-                <a16:creationId xmlns:a16="http://schemas.microsoft.com/office/drawing/2014/main" id="{A2C217F6-80B3-1B06-3392-0B053A218055}"/>
+                <a16:creationId xmlns:a16="http://schemas.microsoft.com/office/drawing/2014/main" id="{AD998F6C-F44B-1D08-73C6-08C7A731E3F2}"/>
               </a:ext>
             </a:extLst>
           </p:cNvPr>
@@ -4873,19 +6119,21 @@
           </a:bodyPr>
           <a:lstStyle/>
           <a:p>
-            <a:pPr algn="l"/>
-            <a:endParaRPr lang="es-ES" sz="2800" b="1" dirty="0">
-              <a:solidFill>
-                <a:srgbClr val="00B0F0"/>
-              </a:solidFill>
-            </a:endParaRPr>
+            <a:r>
+              <a:rPr lang="es-ES" sz="2800" b="1" dirty="0">
+                <a:solidFill>
+                  <a:srgbClr val="00B0F0"/>
+                </a:solidFill>
+              </a:rPr>
+              <a:t>Esta pagina es para Crear Usuario poniendo el Nombre de Usuario, Email y Contraseña. Al pulsar Registrarse crea el usuario.</a:t>
+            </a:r>
           </a:p>
         </p:txBody>
       </p:sp>
     </p:spTree>
     <p:extLst>
       <p:ext uri="{BB962C8B-B14F-4D97-AF65-F5344CB8AC3E}">
-        <p14:creationId xmlns:p14="http://schemas.microsoft.com/office/powerpoint/2010/main" val="1816567654"/>
+        <p14:creationId xmlns:p14="http://schemas.microsoft.com/office/powerpoint/2010/main" val="961258173"/>
       </p:ext>
     </p:extLst>
   </p:cSld>

--- a/Presentacion Tech Learn.pptx
+++ b/Presentacion Tech Learn.pptx
@@ -5222,7 +5222,7 @@
         <p:spPr>
           <a:xfrm>
             <a:off x="257666" y="1074656"/>
-            <a:ext cx="7915373" cy="5494255"/>
+            <a:ext cx="8188750" cy="5494255"/>
           </a:xfrm>
         </p:spPr>
         <p:txBody>
@@ -5237,7 +5237,37 @@
                   <a:srgbClr val="00B0F0"/>
                 </a:solidFill>
               </a:rPr>
-              <a:t>Nuestra app de React es una tienda que reúne todo tipo de tecnologías, desde electrodomésticos, informática, sonido, hogar. Además, permite aprender sobre tecnologías con tarjetas de aprendizaje que puede crear el usuario. Tanto para comprar como para crear tarjetas de aprendizaje debe estar registrado. Puede buscar productos y filtrar por categoría.</a:t>
+              <a:t>Nuestra app de React es una tienda que reúne todo tipo de tecnologías, desde electrodomésticos, informática, sonido, hogar, etc.</a:t>
+            </a:r>
+          </a:p>
+          <a:p>
+            <a:r>
+              <a:rPr lang="es-ES" sz="2800" b="1" dirty="0">
+                <a:solidFill>
+                  <a:srgbClr val="00B0F0"/>
+                </a:solidFill>
+              </a:rPr>
+              <a:t>Además, te permite aprender sobre tecnologías con tarjetas de aprendizaje que puede crear el usuario. </a:t>
+            </a:r>
+          </a:p>
+          <a:p>
+            <a:r>
+              <a:rPr lang="es-ES" sz="2800" b="1" dirty="0">
+                <a:solidFill>
+                  <a:srgbClr val="00B0F0"/>
+                </a:solidFill>
+              </a:rPr>
+              <a:t>Puede buscar productos y filtrar por categoría. Añadir comentarios y valoraciones de productos.</a:t>
+            </a:r>
+          </a:p>
+          <a:p>
+            <a:r>
+              <a:rPr lang="es-ES" sz="2800" b="1" dirty="0">
+                <a:solidFill>
+                  <a:srgbClr val="00B0F0"/>
+                </a:solidFill>
+              </a:rPr>
+              <a:t>Tanto para comprar, comentar, valorar y crear tarjetas de aprendizaje el usuario debe estar registrado. </a:t>
             </a:r>
           </a:p>
         </p:txBody>

--- a/Presentacion Tech Learn.pptx
+++ b/Presentacion Tech Learn.pptx
@@ -7,22 +7,27 @@
   <p:sldIdLst>
     <p:sldId id="256" r:id="rId2"/>
     <p:sldId id="257" r:id="rId3"/>
-    <p:sldId id="258" r:id="rId4"/>
-    <p:sldId id="268" r:id="rId5"/>
-    <p:sldId id="267" r:id="rId6"/>
-    <p:sldId id="269" r:id="rId7"/>
-    <p:sldId id="260" r:id="rId8"/>
-    <p:sldId id="266" r:id="rId9"/>
-    <p:sldId id="270" r:id="rId10"/>
-    <p:sldId id="259" r:id="rId11"/>
-    <p:sldId id="261" r:id="rId12"/>
-    <p:sldId id="271" r:id="rId13"/>
-    <p:sldId id="262" r:id="rId14"/>
-    <p:sldId id="263" r:id="rId15"/>
-    <p:sldId id="272" r:id="rId16"/>
-    <p:sldId id="264" r:id="rId17"/>
-    <p:sldId id="265" r:id="rId18"/>
-    <p:sldId id="273" r:id="rId19"/>
+    <p:sldId id="278" r:id="rId4"/>
+    <p:sldId id="258" r:id="rId5"/>
+    <p:sldId id="277" r:id="rId6"/>
+    <p:sldId id="276" r:id="rId7"/>
+    <p:sldId id="275" r:id="rId8"/>
+    <p:sldId id="268" r:id="rId9"/>
+    <p:sldId id="267" r:id="rId10"/>
+    <p:sldId id="269" r:id="rId11"/>
+    <p:sldId id="260" r:id="rId12"/>
+    <p:sldId id="274" r:id="rId13"/>
+    <p:sldId id="266" r:id="rId14"/>
+    <p:sldId id="270" r:id="rId15"/>
+    <p:sldId id="259" r:id="rId16"/>
+    <p:sldId id="261" r:id="rId17"/>
+    <p:sldId id="271" r:id="rId18"/>
+    <p:sldId id="262" r:id="rId19"/>
+    <p:sldId id="263" r:id="rId20"/>
+    <p:sldId id="272" r:id="rId21"/>
+    <p:sldId id="264" r:id="rId22"/>
+    <p:sldId id="265" r:id="rId23"/>
+    <p:sldId id="273" r:id="rId24"/>
   </p:sldIdLst>
   <p:sldSz cx="12192000" cy="6858000"/>
   <p:notesSz cx="6858000" cy="9144000"/>
@@ -325,7 +330,7 @@
           <a:p>
             <a:fld id="{32213886-AFFD-445E-9427-6DB448F87EF8}" type="datetimeFigureOut">
               <a:rPr lang="es-ES" smtClean="0"/>
-              <a:t>19/12/2025</a:t>
+              <a:t>09/01/2026</a:t>
             </a:fld>
             <a:endParaRPr lang="es-ES"/>
           </a:p>
@@ -546,7 +551,7 @@
           <a:p>
             <a:fld id="{32213886-AFFD-445E-9427-6DB448F87EF8}" type="datetimeFigureOut">
               <a:rPr lang="es-ES" smtClean="0"/>
-              <a:t>19/12/2025</a:t>
+              <a:t>09/01/2026</a:t>
             </a:fld>
             <a:endParaRPr lang="es-ES"/>
           </a:p>
@@ -726,7 +731,7 @@
           <a:p>
             <a:fld id="{32213886-AFFD-445E-9427-6DB448F87EF8}" type="datetimeFigureOut">
               <a:rPr lang="es-ES" smtClean="0"/>
-              <a:t>19/12/2025</a:t>
+              <a:t>09/01/2026</a:t>
             </a:fld>
             <a:endParaRPr lang="es-ES"/>
           </a:p>
@@ -918,7 +923,7 @@
           <a:p>
             <a:fld id="{32213886-AFFD-445E-9427-6DB448F87EF8}" type="datetimeFigureOut">
               <a:rPr lang="es-ES" smtClean="0"/>
-              <a:t>19/12/2025</a:t>
+              <a:t>09/01/2026</a:t>
             </a:fld>
             <a:endParaRPr lang="es-ES"/>
           </a:p>
@@ -1093,7 +1098,7 @@
           <a:p>
             <a:fld id="{32213886-AFFD-445E-9427-6DB448F87EF8}" type="datetimeFigureOut">
               <a:rPr lang="es-ES" smtClean="0"/>
-              <a:t>19/12/2025</a:t>
+              <a:t>09/01/2026</a:t>
             </a:fld>
             <a:endParaRPr lang="es-ES"/>
           </a:p>
@@ -1344,7 +1349,7 @@
           <a:p>
             <a:fld id="{32213886-AFFD-445E-9427-6DB448F87EF8}" type="datetimeFigureOut">
               <a:rPr lang="es-ES" smtClean="0"/>
-              <a:t>19/12/2025</a:t>
+              <a:t>09/01/2026</a:t>
             </a:fld>
             <a:endParaRPr lang="es-ES"/>
           </a:p>
@@ -1667,7 +1672,7 @@
           <a:p>
             <a:fld id="{32213886-AFFD-445E-9427-6DB448F87EF8}" type="datetimeFigureOut">
               <a:rPr lang="es-ES" smtClean="0"/>
-              <a:t>19/12/2025</a:t>
+              <a:t>09/01/2026</a:t>
             </a:fld>
             <a:endParaRPr lang="es-ES"/>
           </a:p>
@@ -2091,7 +2096,7 @@
           <a:p>
             <a:fld id="{32213886-AFFD-445E-9427-6DB448F87EF8}" type="datetimeFigureOut">
               <a:rPr lang="es-ES" smtClean="0"/>
-              <a:t>19/12/2025</a:t>
+              <a:t>09/01/2026</a:t>
             </a:fld>
             <a:endParaRPr lang="es-ES"/>
           </a:p>
@@ -2209,7 +2214,7 @@
           <a:p>
             <a:fld id="{32213886-AFFD-445E-9427-6DB448F87EF8}" type="datetimeFigureOut">
               <a:rPr lang="es-ES" smtClean="0"/>
-              <a:t>19/12/2025</a:t>
+              <a:t>09/01/2026</a:t>
             </a:fld>
             <a:endParaRPr lang="es-ES"/>
           </a:p>
@@ -2304,7 +2309,7 @@
           <a:p>
             <a:fld id="{32213886-AFFD-445E-9427-6DB448F87EF8}" type="datetimeFigureOut">
               <a:rPr lang="es-ES" smtClean="0"/>
-              <a:t>19/12/2025</a:t>
+              <a:t>09/01/2026</a:t>
             </a:fld>
             <a:endParaRPr lang="es-ES"/>
           </a:p>
@@ -2594,7 +2599,7 @@
           <a:p>
             <a:fld id="{32213886-AFFD-445E-9427-6DB448F87EF8}" type="datetimeFigureOut">
               <a:rPr lang="es-ES" smtClean="0"/>
-              <a:t>19/12/2025</a:t>
+              <a:t>09/01/2026</a:t>
             </a:fld>
             <a:endParaRPr lang="es-ES"/>
           </a:p>
@@ -2866,7 +2871,7 @@
           <a:p>
             <a:fld id="{32213886-AFFD-445E-9427-6DB448F87EF8}" type="datetimeFigureOut">
               <a:rPr lang="es-ES" smtClean="0"/>
-              <a:t>19/12/2025</a:t>
+              <a:t>09/01/2026</a:t>
             </a:fld>
             <a:endParaRPr lang="es-ES"/>
           </a:p>
@@ -3120,7 +3125,7 @@
           <a:p>
             <a:fld id="{32213886-AFFD-445E-9427-6DB448F87EF8}" type="datetimeFigureOut">
               <a:rPr lang="es-ES" smtClean="0"/>
-              <a:t>19/12/2025</a:t>
+              <a:t>09/01/2026</a:t>
             </a:fld>
             <a:endParaRPr lang="es-ES"/>
           </a:p>
@@ -3725,6 +3730,42 @@
           </a:p>
         </p:txBody>
       </p:sp>
+      <p:pic>
+        <p:nvPicPr>
+          <p:cNvPr id="4" name="Imagen 3">
+            <a:extLst>
+              <a:ext uri="{FF2B5EF4-FFF2-40B4-BE49-F238E27FC236}">
+                <a16:creationId xmlns:a16="http://schemas.microsoft.com/office/drawing/2014/main" id="{FE8695C1-F8AB-2A5A-E27F-A2FBC6BBD2A4}"/>
+              </a:ext>
+            </a:extLst>
+          </p:cNvPr>
+          <p:cNvPicPr>
+            <a:picLocks noChangeAspect="1"/>
+          </p:cNvPicPr>
+          <p:nvPr/>
+        </p:nvPicPr>
+        <p:blipFill>
+          <a:blip r:embed="rId2">
+            <a:extLst>
+              <a:ext uri="{28A0092B-C50C-407E-A947-70E740481C1C}">
+                <a14:useLocalDpi xmlns:a14="http://schemas.microsoft.com/office/drawing/2010/main" val="0"/>
+              </a:ext>
+            </a:extLst>
+          </a:blip>
+          <a:stretch>
+            <a:fillRect/>
+          </a:stretch>
+        </p:blipFill>
+        <p:spPr>
+          <a:xfrm>
+            <a:off x="7266495" y="1643406"/>
+            <a:ext cx="4925505" cy="4925505"/>
+          </a:xfrm>
+          <a:prstGeom prst="rect">
+            <a:avLst/>
+          </a:prstGeom>
+        </p:spPr>
+      </p:pic>
     </p:spTree>
     <p:extLst>
       <p:ext uri="{BB962C8B-B14F-4D97-AF65-F5344CB8AC3E}">
@@ -3739,6 +3780,637 @@
 </file>
 
 <file path=ppt/slides/slide10.xml><?xml version="1.0" encoding="utf-8"?>
+<p:sld xmlns:a="http://schemas.openxmlformats.org/drawingml/2006/main" xmlns:r="http://schemas.openxmlformats.org/officeDocument/2006/relationships" xmlns:p="http://schemas.openxmlformats.org/presentationml/2006/main">
+  <p:cSld>
+    <p:spTree>
+      <p:nvGrpSpPr>
+        <p:cNvPr id="1" name="">
+          <a:extLst>
+            <a:ext uri="{FF2B5EF4-FFF2-40B4-BE49-F238E27FC236}">
+              <a16:creationId xmlns:a16="http://schemas.microsoft.com/office/drawing/2014/main" id="{57EA5ACD-B567-F69B-F39E-6C862B4754A7}"/>
+            </a:ext>
+          </a:extLst>
+        </p:cNvPr>
+        <p:cNvGrpSpPr/>
+        <p:nvPr/>
+      </p:nvGrpSpPr>
+      <p:grpSpPr>
+        <a:xfrm>
+          <a:off x="0" y="0"/>
+          <a:ext cx="0" cy="0"/>
+          <a:chOff x="0" y="0"/>
+          <a:chExt cx="0" cy="0"/>
+        </a:xfrm>
+      </p:grpSpPr>
+      <p:sp>
+        <p:nvSpPr>
+          <p:cNvPr id="2" name="Título 1">
+            <a:extLst>
+              <a:ext uri="{FF2B5EF4-FFF2-40B4-BE49-F238E27FC236}">
+                <a16:creationId xmlns:a16="http://schemas.microsoft.com/office/drawing/2014/main" id="{1BA2A386-798D-A4AA-7084-E6968799C741}"/>
+              </a:ext>
+            </a:extLst>
+          </p:cNvPr>
+          <p:cNvSpPr>
+            <a:spLocks noGrp="1"/>
+          </p:cNvSpPr>
+          <p:nvPr>
+            <p:ph type="title"/>
+          </p:nvPr>
+        </p:nvSpPr>
+        <p:spPr>
+          <a:xfrm>
+            <a:off x="207391" y="289089"/>
+            <a:ext cx="11726943" cy="785567"/>
+          </a:xfrm>
+        </p:spPr>
+        <p:txBody>
+          <a:bodyPr>
+            <a:normAutofit/>
+          </a:bodyPr>
+          <a:lstStyle/>
+          <a:p>
+            <a:pPr algn="ctr"/>
+            <a:r>
+              <a:rPr lang="es-ES" sz="4000" b="1" u="sng" dirty="0">
+                <a:solidFill>
+                  <a:srgbClr val="00B0F0"/>
+                </a:solidFill>
+              </a:rPr>
+              <a:t>Estudio de Tiendas Online</a:t>
+            </a:r>
+          </a:p>
+        </p:txBody>
+      </p:sp>
+      <p:sp>
+        <p:nvSpPr>
+          <p:cNvPr id="3" name="Marcador de texto 2">
+            <a:extLst>
+              <a:ext uri="{FF2B5EF4-FFF2-40B4-BE49-F238E27FC236}">
+                <a16:creationId xmlns:a16="http://schemas.microsoft.com/office/drawing/2014/main" id="{C5E68FD5-0D93-B3E3-7E8A-5D54643315CA}"/>
+              </a:ext>
+            </a:extLst>
+          </p:cNvPr>
+          <p:cNvSpPr>
+            <a:spLocks noGrp="1"/>
+          </p:cNvSpPr>
+          <p:nvPr>
+            <p:ph type="body" sz="half" idx="2"/>
+          </p:nvPr>
+        </p:nvSpPr>
+        <p:spPr>
+          <a:xfrm>
+            <a:off x="257666" y="1074656"/>
+            <a:ext cx="11676669" cy="5494255"/>
+          </a:xfrm>
+        </p:spPr>
+        <p:txBody>
+          <a:bodyPr anchor="t">
+            <a:normAutofit/>
+          </a:bodyPr>
+          <a:lstStyle/>
+          <a:p>
+            <a:pPr algn="ctr"/>
+            <a:r>
+              <a:rPr lang="es-ES" sz="2800" b="1" u="sng" dirty="0">
+                <a:solidFill>
+                  <a:srgbClr val="00B0F0"/>
+                </a:solidFill>
+              </a:rPr>
+              <a:t>Amazon</a:t>
+            </a:r>
+          </a:p>
+          <a:p>
+            <a:pPr algn="l"/>
+            <a:r>
+              <a:rPr lang="es-ES" sz="2800" b="1" dirty="0">
+                <a:solidFill>
+                  <a:srgbClr val="00B0F0"/>
+                </a:solidFill>
+              </a:rPr>
+              <a:t>Hemos analizado las interfaces principales de la tienda online Amazon como referencia para el diseño de una tienda de electrodomésticos propia. Es uno de los e-</a:t>
+            </a:r>
+            <a:r>
+              <a:rPr lang="es-ES" sz="2800" b="1" dirty="0" err="1">
+                <a:solidFill>
+                  <a:srgbClr val="00B0F0"/>
+                </a:solidFill>
+              </a:rPr>
+              <a:t>commerce</a:t>
+            </a:r>
+            <a:r>
+              <a:rPr lang="es-ES" sz="2800" b="1" dirty="0">
+                <a:solidFill>
+                  <a:srgbClr val="00B0F0"/>
+                </a:solidFill>
+              </a:rPr>
+              <a:t> lideres en venta online, por lo que su estructura, experiencia de usuario y elementos visuales resultan una guía útil para identificar buenas practicas y oportunidades de mejora.</a:t>
+            </a:r>
+          </a:p>
+          <a:p>
+            <a:pPr algn="l"/>
+            <a:r>
+              <a:rPr lang="es-ES" sz="2800" b="1" dirty="0">
+                <a:solidFill>
+                  <a:srgbClr val="00B0F0"/>
+                </a:solidFill>
+              </a:rPr>
+              <a:t>El análisis se centra en las siguientes pantallas clave del recorrido de compra: - Home o pagina principal - Pagina de categoría - Resultados de búsqueda - Ficha de producto - Carrito y proceso de compra - Area de usuario y postventa</a:t>
+            </a:r>
+          </a:p>
+          <a:p>
+            <a:r>
+              <a:rPr lang="es-ES" sz="2800" b="1" dirty="0">
+                <a:solidFill>
+                  <a:srgbClr val="00B0F0"/>
+                </a:solidFill>
+              </a:rPr>
+              <a:t>Mas info en: Estudio Amazon.docx</a:t>
+            </a:r>
+          </a:p>
+        </p:txBody>
+      </p:sp>
+    </p:spTree>
+    <p:extLst>
+      <p:ext uri="{BB962C8B-B14F-4D97-AF65-F5344CB8AC3E}">
+        <p14:creationId xmlns:p14="http://schemas.microsoft.com/office/powerpoint/2010/main" val="3447660507"/>
+      </p:ext>
+    </p:extLst>
+  </p:cSld>
+  <p:clrMapOvr>
+    <a:masterClrMapping/>
+  </p:clrMapOvr>
+</p:sld>
+</file>
+
+<file path=ppt/slides/slide11.xml><?xml version="1.0" encoding="utf-8"?>
+<p:sld xmlns:a="http://schemas.openxmlformats.org/drawingml/2006/main" xmlns:r="http://schemas.openxmlformats.org/officeDocument/2006/relationships" xmlns:p="http://schemas.openxmlformats.org/presentationml/2006/main">
+  <p:cSld>
+    <p:spTree>
+      <p:nvGrpSpPr>
+        <p:cNvPr id="1" name="">
+          <a:extLst>
+            <a:ext uri="{FF2B5EF4-FFF2-40B4-BE49-F238E27FC236}">
+              <a16:creationId xmlns:a16="http://schemas.microsoft.com/office/drawing/2014/main" id="{D5343680-B653-E750-2748-A981D9626033}"/>
+            </a:ext>
+          </a:extLst>
+        </p:cNvPr>
+        <p:cNvGrpSpPr/>
+        <p:nvPr/>
+      </p:nvGrpSpPr>
+      <p:grpSpPr>
+        <a:xfrm>
+          <a:off x="0" y="0"/>
+          <a:ext cx="0" cy="0"/>
+          <a:chOff x="0" y="0"/>
+          <a:chExt cx="0" cy="0"/>
+        </a:xfrm>
+      </p:grpSpPr>
+      <p:sp>
+        <p:nvSpPr>
+          <p:cNvPr id="2" name="Título 1">
+            <a:extLst>
+              <a:ext uri="{FF2B5EF4-FFF2-40B4-BE49-F238E27FC236}">
+                <a16:creationId xmlns:a16="http://schemas.microsoft.com/office/drawing/2014/main" id="{F52EC691-9DBF-9614-3318-0742C8D66302}"/>
+              </a:ext>
+            </a:extLst>
+          </p:cNvPr>
+          <p:cNvSpPr>
+            <a:spLocks noGrp="1"/>
+          </p:cNvSpPr>
+          <p:nvPr>
+            <p:ph type="title"/>
+          </p:nvPr>
+        </p:nvSpPr>
+        <p:spPr>
+          <a:xfrm>
+            <a:off x="207391" y="289089"/>
+            <a:ext cx="11726943" cy="785567"/>
+          </a:xfrm>
+        </p:spPr>
+        <p:txBody>
+          <a:bodyPr>
+            <a:normAutofit/>
+          </a:bodyPr>
+          <a:lstStyle/>
+          <a:p>
+            <a:pPr algn="ctr"/>
+            <a:r>
+              <a:rPr lang="es-ES" sz="4000" b="1" u="sng" dirty="0">
+                <a:solidFill>
+                  <a:srgbClr val="00B0F0"/>
+                </a:solidFill>
+              </a:rPr>
+              <a:t>Home (Inicio)</a:t>
+            </a:r>
+          </a:p>
+        </p:txBody>
+      </p:sp>
+      <p:sp>
+        <p:nvSpPr>
+          <p:cNvPr id="3" name="Marcador de texto 2">
+            <a:extLst>
+              <a:ext uri="{FF2B5EF4-FFF2-40B4-BE49-F238E27FC236}">
+                <a16:creationId xmlns:a16="http://schemas.microsoft.com/office/drawing/2014/main" id="{B018C736-3C65-68D6-745E-06829A41510A}"/>
+              </a:ext>
+            </a:extLst>
+          </p:cNvPr>
+          <p:cNvSpPr>
+            <a:spLocks noGrp="1"/>
+          </p:cNvSpPr>
+          <p:nvPr>
+            <p:ph type="body" sz="half" idx="2"/>
+          </p:nvPr>
+        </p:nvSpPr>
+        <p:spPr>
+          <a:xfrm>
+            <a:off x="257666" y="1074656"/>
+            <a:ext cx="11676669" cy="5494255"/>
+          </a:xfrm>
+        </p:spPr>
+        <p:txBody>
+          <a:bodyPr anchor="t">
+            <a:normAutofit/>
+          </a:bodyPr>
+          <a:lstStyle/>
+          <a:p>
+            <a:r>
+              <a:rPr lang="es-ES" sz="2800" b="1" dirty="0">
+                <a:solidFill>
+                  <a:srgbClr val="00B0F0"/>
+                </a:solidFill>
+              </a:rPr>
+              <a:t>Esta pagina es la de Inicio aparece si ha iniciado sesión el Nombre de Usuario. Al pulsar Cerrar Sesión cierra la sesión y vuelve a aparecer el botón Login. Al pulsar Login te lleva a la pagina de Login (Iniciar Sesión).</a:t>
+            </a:r>
+          </a:p>
+          <a:p>
+            <a:r>
+              <a:rPr lang="es-ES" sz="2800" b="1" dirty="0">
+                <a:solidFill>
+                  <a:srgbClr val="00B0F0"/>
+                </a:solidFill>
+              </a:rPr>
+              <a:t>Además, aparece en el menu superior el logo (te lleva a esta misma página), una barra de búsqueda para buscar en producto en la tienda y las diferentes páginas. En el centro una lista con los productos destacados. Y en el menu inferior el logo (te lleva a esta misma página), las diferentes páginas y el copyright.</a:t>
+            </a:r>
+          </a:p>
+        </p:txBody>
+      </p:sp>
+    </p:spTree>
+    <p:extLst>
+      <p:ext uri="{BB962C8B-B14F-4D97-AF65-F5344CB8AC3E}">
+        <p14:creationId xmlns:p14="http://schemas.microsoft.com/office/powerpoint/2010/main" val="1676473529"/>
+      </p:ext>
+    </p:extLst>
+  </p:cSld>
+  <p:clrMapOvr>
+    <a:masterClrMapping/>
+  </p:clrMapOvr>
+</p:sld>
+</file>
+
+<file path=ppt/slides/slide12.xml><?xml version="1.0" encoding="utf-8"?>
+<p:sld xmlns:a="http://schemas.openxmlformats.org/drawingml/2006/main" xmlns:r="http://schemas.openxmlformats.org/officeDocument/2006/relationships" xmlns:p="http://schemas.openxmlformats.org/presentationml/2006/main">
+  <p:cSld>
+    <p:spTree>
+      <p:nvGrpSpPr>
+        <p:cNvPr id="1" name="">
+          <a:extLst>
+            <a:ext uri="{FF2B5EF4-FFF2-40B4-BE49-F238E27FC236}">
+              <a16:creationId xmlns:a16="http://schemas.microsoft.com/office/drawing/2014/main" id="{E4985275-C163-D36C-D84F-98A40F6EBBAA}"/>
+            </a:ext>
+          </a:extLst>
+        </p:cNvPr>
+        <p:cNvGrpSpPr/>
+        <p:nvPr/>
+      </p:nvGrpSpPr>
+      <p:grpSpPr>
+        <a:xfrm>
+          <a:off x="0" y="0"/>
+          <a:ext cx="0" cy="0"/>
+          <a:chOff x="0" y="0"/>
+          <a:chExt cx="0" cy="0"/>
+        </a:xfrm>
+      </p:grpSpPr>
+      <p:sp>
+        <p:nvSpPr>
+          <p:cNvPr id="2" name="Título 1">
+            <a:extLst>
+              <a:ext uri="{FF2B5EF4-FFF2-40B4-BE49-F238E27FC236}">
+                <a16:creationId xmlns:a16="http://schemas.microsoft.com/office/drawing/2014/main" id="{37860D20-60AB-92D1-8E0B-639F619E922B}"/>
+              </a:ext>
+            </a:extLst>
+          </p:cNvPr>
+          <p:cNvSpPr>
+            <a:spLocks noGrp="1"/>
+          </p:cNvSpPr>
+          <p:nvPr>
+            <p:ph type="title"/>
+          </p:nvPr>
+        </p:nvSpPr>
+        <p:spPr>
+          <a:xfrm>
+            <a:off x="207391" y="289089"/>
+            <a:ext cx="11726943" cy="785567"/>
+          </a:xfrm>
+        </p:spPr>
+        <p:txBody>
+          <a:bodyPr>
+            <a:normAutofit/>
+          </a:bodyPr>
+          <a:lstStyle/>
+          <a:p>
+            <a:pPr algn="ctr"/>
+            <a:r>
+              <a:rPr lang="es-ES" sz="4000" b="1" u="sng" dirty="0">
+                <a:solidFill>
+                  <a:srgbClr val="00B0F0"/>
+                </a:solidFill>
+              </a:rPr>
+              <a:t>Home (Inicio)</a:t>
+            </a:r>
+          </a:p>
+        </p:txBody>
+      </p:sp>
+      <p:sp>
+        <p:nvSpPr>
+          <p:cNvPr id="3" name="Marcador de texto 2">
+            <a:extLst>
+              <a:ext uri="{FF2B5EF4-FFF2-40B4-BE49-F238E27FC236}">
+                <a16:creationId xmlns:a16="http://schemas.microsoft.com/office/drawing/2014/main" id="{8E7F3A1E-0B5C-9ED6-FE1A-0870E6215663}"/>
+              </a:ext>
+            </a:extLst>
+          </p:cNvPr>
+          <p:cNvSpPr>
+            <a:spLocks noGrp="1"/>
+          </p:cNvSpPr>
+          <p:nvPr>
+            <p:ph type="body" sz="half" idx="2"/>
+          </p:nvPr>
+        </p:nvSpPr>
+        <p:spPr>
+          <a:xfrm>
+            <a:off x="257666" y="1074656"/>
+            <a:ext cx="11676669" cy="5494255"/>
+          </a:xfrm>
+        </p:spPr>
+        <p:txBody>
+          <a:bodyPr anchor="t">
+            <a:normAutofit/>
+          </a:bodyPr>
+          <a:lstStyle/>
+          <a:p>
+            <a:endParaRPr lang="es-ES" sz="2800" b="1" dirty="0">
+              <a:solidFill>
+                <a:srgbClr val="00B0F0"/>
+              </a:solidFill>
+            </a:endParaRPr>
+          </a:p>
+        </p:txBody>
+      </p:sp>
+    </p:spTree>
+    <p:extLst>
+      <p:ext uri="{BB962C8B-B14F-4D97-AF65-F5344CB8AC3E}">
+        <p14:creationId xmlns:p14="http://schemas.microsoft.com/office/powerpoint/2010/main" val="916746212"/>
+      </p:ext>
+    </p:extLst>
+  </p:cSld>
+  <p:clrMapOvr>
+    <a:masterClrMapping/>
+  </p:clrMapOvr>
+</p:sld>
+</file>
+
+<file path=ppt/slides/slide13.xml><?xml version="1.0" encoding="utf-8"?>
+<p:sld xmlns:a="http://schemas.openxmlformats.org/drawingml/2006/main" xmlns:r="http://schemas.openxmlformats.org/officeDocument/2006/relationships" xmlns:p="http://schemas.openxmlformats.org/presentationml/2006/main">
+  <p:cSld>
+    <p:spTree>
+      <p:nvGrpSpPr>
+        <p:cNvPr id="1" name="">
+          <a:extLst>
+            <a:ext uri="{FF2B5EF4-FFF2-40B4-BE49-F238E27FC236}">
+              <a16:creationId xmlns:a16="http://schemas.microsoft.com/office/drawing/2014/main" id="{05F97A8B-CC85-2590-71C9-89423ADB4576}"/>
+            </a:ext>
+          </a:extLst>
+        </p:cNvPr>
+        <p:cNvGrpSpPr/>
+        <p:nvPr/>
+      </p:nvGrpSpPr>
+      <p:grpSpPr>
+        <a:xfrm>
+          <a:off x="0" y="0"/>
+          <a:ext cx="0" cy="0"/>
+          <a:chOff x="0" y="0"/>
+          <a:chExt cx="0" cy="0"/>
+        </a:xfrm>
+      </p:grpSpPr>
+      <p:sp>
+        <p:nvSpPr>
+          <p:cNvPr id="2" name="Título 1">
+            <a:extLst>
+              <a:ext uri="{FF2B5EF4-FFF2-40B4-BE49-F238E27FC236}">
+                <a16:creationId xmlns:a16="http://schemas.microsoft.com/office/drawing/2014/main" id="{8FEEE2F4-9471-3268-F6DF-C77D4E2682EF}"/>
+              </a:ext>
+            </a:extLst>
+          </p:cNvPr>
+          <p:cNvSpPr>
+            <a:spLocks noGrp="1"/>
+          </p:cNvSpPr>
+          <p:nvPr>
+            <p:ph type="title"/>
+          </p:nvPr>
+        </p:nvSpPr>
+        <p:spPr>
+          <a:xfrm>
+            <a:off x="207391" y="289089"/>
+            <a:ext cx="11726943" cy="785567"/>
+          </a:xfrm>
+        </p:spPr>
+        <p:txBody>
+          <a:bodyPr>
+            <a:normAutofit/>
+          </a:bodyPr>
+          <a:lstStyle/>
+          <a:p>
+            <a:pPr algn="ctr"/>
+            <a:r>
+              <a:rPr lang="es-ES" sz="4000" b="1" u="sng" dirty="0">
+                <a:solidFill>
+                  <a:srgbClr val="00B0F0"/>
+                </a:solidFill>
+              </a:rPr>
+              <a:t>Login (Iniciar Sesión)</a:t>
+            </a:r>
+          </a:p>
+        </p:txBody>
+      </p:sp>
+      <p:sp>
+        <p:nvSpPr>
+          <p:cNvPr id="3" name="Marcador de texto 2">
+            <a:extLst>
+              <a:ext uri="{FF2B5EF4-FFF2-40B4-BE49-F238E27FC236}">
+                <a16:creationId xmlns:a16="http://schemas.microsoft.com/office/drawing/2014/main" id="{78411CAF-AA8E-D2FF-D8EF-9406DEEF37B9}"/>
+              </a:ext>
+            </a:extLst>
+          </p:cNvPr>
+          <p:cNvSpPr>
+            <a:spLocks noGrp="1"/>
+          </p:cNvSpPr>
+          <p:nvPr>
+            <p:ph type="body" sz="half" idx="2"/>
+          </p:nvPr>
+        </p:nvSpPr>
+        <p:spPr>
+          <a:xfrm>
+            <a:off x="257666" y="1074656"/>
+            <a:ext cx="11676669" cy="5494255"/>
+          </a:xfrm>
+        </p:spPr>
+        <p:txBody>
+          <a:bodyPr anchor="t">
+            <a:normAutofit/>
+          </a:bodyPr>
+          <a:lstStyle/>
+          <a:p>
+            <a:r>
+              <a:rPr lang="es-ES" sz="2800" b="1" dirty="0">
+                <a:solidFill>
+                  <a:srgbClr val="00B0F0"/>
+                </a:solidFill>
+              </a:rPr>
+              <a:t>Esta pagina es para Iniciar Sesión poniendo el Email y Contraseña. Al pulsar Iniciar Sesión te lleva a Home (Inicio) con la sesión iniciada.</a:t>
+            </a:r>
+          </a:p>
+        </p:txBody>
+      </p:sp>
+    </p:spTree>
+    <p:extLst>
+      <p:ext uri="{BB962C8B-B14F-4D97-AF65-F5344CB8AC3E}">
+        <p14:creationId xmlns:p14="http://schemas.microsoft.com/office/powerpoint/2010/main" val="1353400800"/>
+      </p:ext>
+    </p:extLst>
+  </p:cSld>
+  <p:clrMapOvr>
+    <a:masterClrMapping/>
+  </p:clrMapOvr>
+</p:sld>
+</file>
+
+<file path=ppt/slides/slide14.xml><?xml version="1.0" encoding="utf-8"?>
+<p:sld xmlns:a="http://schemas.openxmlformats.org/drawingml/2006/main" xmlns:r="http://schemas.openxmlformats.org/officeDocument/2006/relationships" xmlns:p="http://schemas.openxmlformats.org/presentationml/2006/main">
+  <p:cSld>
+    <p:spTree>
+      <p:nvGrpSpPr>
+        <p:cNvPr id="1" name="">
+          <a:extLst>
+            <a:ext uri="{FF2B5EF4-FFF2-40B4-BE49-F238E27FC236}">
+              <a16:creationId xmlns:a16="http://schemas.microsoft.com/office/drawing/2014/main" id="{0060C5B9-F702-32E6-E203-5789E7D7116D}"/>
+            </a:ext>
+          </a:extLst>
+        </p:cNvPr>
+        <p:cNvGrpSpPr/>
+        <p:nvPr/>
+      </p:nvGrpSpPr>
+      <p:grpSpPr>
+        <a:xfrm>
+          <a:off x="0" y="0"/>
+          <a:ext cx="0" cy="0"/>
+          <a:chOff x="0" y="0"/>
+          <a:chExt cx="0" cy="0"/>
+        </a:xfrm>
+      </p:grpSpPr>
+      <p:sp>
+        <p:nvSpPr>
+          <p:cNvPr id="2" name="Título 1">
+            <a:extLst>
+              <a:ext uri="{FF2B5EF4-FFF2-40B4-BE49-F238E27FC236}">
+                <a16:creationId xmlns:a16="http://schemas.microsoft.com/office/drawing/2014/main" id="{C962E0ED-3679-091B-AA9D-931D764686FA}"/>
+              </a:ext>
+            </a:extLst>
+          </p:cNvPr>
+          <p:cNvSpPr>
+            <a:spLocks noGrp="1"/>
+          </p:cNvSpPr>
+          <p:nvPr>
+            <p:ph type="title"/>
+          </p:nvPr>
+        </p:nvSpPr>
+        <p:spPr>
+          <a:xfrm>
+            <a:off x="207391" y="289089"/>
+            <a:ext cx="11726943" cy="785567"/>
+          </a:xfrm>
+        </p:spPr>
+        <p:txBody>
+          <a:bodyPr>
+            <a:normAutofit/>
+          </a:bodyPr>
+          <a:lstStyle/>
+          <a:p>
+            <a:pPr algn="ctr"/>
+            <a:r>
+              <a:rPr lang="es-ES" sz="4000" b="1" u="sng" dirty="0">
+                <a:solidFill>
+                  <a:srgbClr val="00B0F0"/>
+                </a:solidFill>
+              </a:rPr>
+              <a:t>Crear Usuario</a:t>
+            </a:r>
+          </a:p>
+        </p:txBody>
+      </p:sp>
+      <p:sp>
+        <p:nvSpPr>
+          <p:cNvPr id="3" name="Marcador de texto 2">
+            <a:extLst>
+              <a:ext uri="{FF2B5EF4-FFF2-40B4-BE49-F238E27FC236}">
+                <a16:creationId xmlns:a16="http://schemas.microsoft.com/office/drawing/2014/main" id="{AD998F6C-F44B-1D08-73C6-08C7A731E3F2}"/>
+              </a:ext>
+            </a:extLst>
+          </p:cNvPr>
+          <p:cNvSpPr>
+            <a:spLocks noGrp="1"/>
+          </p:cNvSpPr>
+          <p:nvPr>
+            <p:ph type="body" sz="half" idx="2"/>
+          </p:nvPr>
+        </p:nvSpPr>
+        <p:spPr>
+          <a:xfrm>
+            <a:off x="257666" y="1074656"/>
+            <a:ext cx="11676669" cy="5494255"/>
+          </a:xfrm>
+        </p:spPr>
+        <p:txBody>
+          <a:bodyPr anchor="t">
+            <a:normAutofit/>
+          </a:bodyPr>
+          <a:lstStyle/>
+          <a:p>
+            <a:r>
+              <a:rPr lang="es-ES" sz="2800" b="1" dirty="0">
+                <a:solidFill>
+                  <a:srgbClr val="00B0F0"/>
+                </a:solidFill>
+              </a:rPr>
+              <a:t>Esta pagina es para Crear Usuario poniendo el Nombre de Usuario, Email y Contraseña. Al pulsar Registrarse crea el usuario.</a:t>
+            </a:r>
+          </a:p>
+        </p:txBody>
+      </p:sp>
+    </p:spTree>
+    <p:extLst>
+      <p:ext uri="{BB962C8B-B14F-4D97-AF65-F5344CB8AC3E}">
+        <p14:creationId xmlns:p14="http://schemas.microsoft.com/office/powerpoint/2010/main" val="961258173"/>
+      </p:ext>
+    </p:extLst>
+  </p:cSld>
+  <p:clrMapOvr>
+    <a:masterClrMapping/>
+  </p:clrMapOvr>
+</p:sld>
+</file>
+
+<file path=ppt/slides/slide15.xml><?xml version="1.0" encoding="utf-8"?>
 <p:sld xmlns:a="http://schemas.openxmlformats.org/drawingml/2006/main" xmlns:r="http://schemas.openxmlformats.org/officeDocument/2006/relationships" xmlns:p="http://schemas.openxmlformats.org/presentationml/2006/main">
   <p:cSld>
     <p:spTree>
@@ -3861,7 +4533,7 @@
 </p:sld>
 </file>
 
-<file path=ppt/slides/slide11.xml><?xml version="1.0" encoding="utf-8"?>
+<file path=ppt/slides/slide16.xml><?xml version="1.0" encoding="utf-8"?>
 <p:sld xmlns:a="http://schemas.openxmlformats.org/drawingml/2006/main" xmlns:r="http://schemas.openxmlformats.org/officeDocument/2006/relationships" xmlns:p="http://schemas.openxmlformats.org/presentationml/2006/main">
   <p:cSld>
     <p:spTree>
@@ -3977,7 +4649,7 @@
 </p:sld>
 </file>
 
-<file path=ppt/slides/slide12.xml><?xml version="1.0" encoding="utf-8"?>
+<file path=ppt/slides/slide17.xml><?xml version="1.0" encoding="utf-8"?>
 <p:sld xmlns:a="http://schemas.openxmlformats.org/drawingml/2006/main" xmlns:r="http://schemas.openxmlformats.org/officeDocument/2006/relationships" xmlns:p="http://schemas.openxmlformats.org/presentationml/2006/main">
   <p:cSld>
     <p:spTree>
@@ -4093,7 +4765,7 @@
 </p:sld>
 </file>
 
-<file path=ppt/slides/slide13.xml><?xml version="1.0" encoding="utf-8"?>
+<file path=ppt/slides/slide18.xml><?xml version="1.0" encoding="utf-8"?>
 <p:sld xmlns:a="http://schemas.openxmlformats.org/drawingml/2006/main" xmlns:r="http://schemas.openxmlformats.org/officeDocument/2006/relationships" xmlns:p="http://schemas.openxmlformats.org/presentationml/2006/main">
   <p:cSld>
     <p:spTree>
@@ -4217,7 +4889,7 @@
 </p:sld>
 </file>
 
-<file path=ppt/slides/slide14.xml><?xml version="1.0" encoding="utf-8"?>
+<file path=ppt/slides/slide19.xml><?xml version="1.0" encoding="utf-8"?>
 <p:sld xmlns:a="http://schemas.openxmlformats.org/drawingml/2006/main" xmlns:r="http://schemas.openxmlformats.org/officeDocument/2006/relationships" xmlns:p="http://schemas.openxmlformats.org/presentationml/2006/main">
   <p:cSld>
     <p:spTree>
@@ -4331,475 +5003,6 @@
     <p:extLst>
       <p:ext uri="{BB962C8B-B14F-4D97-AF65-F5344CB8AC3E}">
         <p14:creationId xmlns:p14="http://schemas.microsoft.com/office/powerpoint/2010/main" val="477548462"/>
-      </p:ext>
-    </p:extLst>
-  </p:cSld>
-  <p:clrMapOvr>
-    <a:masterClrMapping/>
-  </p:clrMapOvr>
-</p:sld>
-</file>
-
-<file path=ppt/slides/slide15.xml><?xml version="1.0" encoding="utf-8"?>
-<p:sld xmlns:a="http://schemas.openxmlformats.org/drawingml/2006/main" xmlns:r="http://schemas.openxmlformats.org/officeDocument/2006/relationships" xmlns:p="http://schemas.openxmlformats.org/presentationml/2006/main">
-  <p:cSld>
-    <p:spTree>
-      <p:nvGrpSpPr>
-        <p:cNvPr id="1" name="">
-          <a:extLst>
-            <a:ext uri="{FF2B5EF4-FFF2-40B4-BE49-F238E27FC236}">
-              <a16:creationId xmlns:a16="http://schemas.microsoft.com/office/drawing/2014/main" id="{08869C1E-9FC5-4CEE-C330-9DF66D59D9D2}"/>
-            </a:ext>
-          </a:extLst>
-        </p:cNvPr>
-        <p:cNvGrpSpPr/>
-        <p:nvPr/>
-      </p:nvGrpSpPr>
-      <p:grpSpPr>
-        <a:xfrm>
-          <a:off x="0" y="0"/>
-          <a:ext cx="0" cy="0"/>
-          <a:chOff x="0" y="0"/>
-          <a:chExt cx="0" cy="0"/>
-        </a:xfrm>
-      </p:grpSpPr>
-      <p:sp>
-        <p:nvSpPr>
-          <p:cNvPr id="2" name="Título 1">
-            <a:extLst>
-              <a:ext uri="{FF2B5EF4-FFF2-40B4-BE49-F238E27FC236}">
-                <a16:creationId xmlns:a16="http://schemas.microsoft.com/office/drawing/2014/main" id="{D1A4FC4E-F5FF-21CD-51CD-024F532D99B2}"/>
-              </a:ext>
-            </a:extLst>
-          </p:cNvPr>
-          <p:cNvSpPr>
-            <a:spLocks noGrp="1"/>
-          </p:cNvSpPr>
-          <p:nvPr>
-            <p:ph type="title"/>
-          </p:nvPr>
-        </p:nvSpPr>
-        <p:spPr>
-          <a:xfrm>
-            <a:off x="207391" y="289089"/>
-            <a:ext cx="11726943" cy="785567"/>
-          </a:xfrm>
-        </p:spPr>
-        <p:txBody>
-          <a:bodyPr>
-            <a:normAutofit/>
-          </a:bodyPr>
-          <a:lstStyle/>
-          <a:p>
-            <a:pPr algn="ctr"/>
-            <a:r>
-              <a:rPr lang="es-ES" sz="4000" b="1" u="sng" dirty="0">
-                <a:solidFill>
-                  <a:srgbClr val="00B0F0"/>
-                </a:solidFill>
-              </a:rPr>
-              <a:t>Editar Tarjetas de Pago</a:t>
-            </a:r>
-          </a:p>
-        </p:txBody>
-      </p:sp>
-      <p:sp>
-        <p:nvSpPr>
-          <p:cNvPr id="3" name="Marcador de texto 2">
-            <a:extLst>
-              <a:ext uri="{FF2B5EF4-FFF2-40B4-BE49-F238E27FC236}">
-                <a16:creationId xmlns:a16="http://schemas.microsoft.com/office/drawing/2014/main" id="{083C93DD-BA38-EB02-FD5E-C854D7ABCBB8}"/>
-              </a:ext>
-            </a:extLst>
-          </p:cNvPr>
-          <p:cNvSpPr>
-            <a:spLocks noGrp="1"/>
-          </p:cNvSpPr>
-          <p:nvPr>
-            <p:ph type="body" sz="half" idx="2"/>
-          </p:nvPr>
-        </p:nvSpPr>
-        <p:spPr>
-          <a:xfrm>
-            <a:off x="257666" y="1074656"/>
-            <a:ext cx="11676669" cy="5494255"/>
-          </a:xfrm>
-        </p:spPr>
-        <p:txBody>
-          <a:bodyPr anchor="t">
-            <a:normAutofit/>
-          </a:bodyPr>
-          <a:lstStyle/>
-          <a:p>
-            <a:r>
-              <a:rPr lang="es-ES" sz="2800" b="1" dirty="0">
-                <a:solidFill>
-                  <a:srgbClr val="00B0F0"/>
-                </a:solidFill>
-              </a:rPr>
-              <a:t>Esta pagina permite añadir o editar las Tarjetas de Pago (nombre de usuario, fecha de caducidad, CCV). Al pulsar Añadir/Editar con la sesión iniciada te lleva a Tarjetas de Pago. </a:t>
-            </a:r>
-          </a:p>
-        </p:txBody>
-      </p:sp>
-    </p:spTree>
-    <p:extLst>
-      <p:ext uri="{BB962C8B-B14F-4D97-AF65-F5344CB8AC3E}">
-        <p14:creationId xmlns:p14="http://schemas.microsoft.com/office/powerpoint/2010/main" val="3147110869"/>
-      </p:ext>
-    </p:extLst>
-  </p:cSld>
-  <p:clrMapOvr>
-    <a:masterClrMapping/>
-  </p:clrMapOvr>
-</p:sld>
-</file>
-
-<file path=ppt/slides/slide16.xml><?xml version="1.0" encoding="utf-8"?>
-<p:sld xmlns:a="http://schemas.openxmlformats.org/drawingml/2006/main" xmlns:r="http://schemas.openxmlformats.org/officeDocument/2006/relationships" xmlns:p="http://schemas.openxmlformats.org/presentationml/2006/main">
-  <p:cSld>
-    <p:spTree>
-      <p:nvGrpSpPr>
-        <p:cNvPr id="1" name="">
-          <a:extLst>
-            <a:ext uri="{FF2B5EF4-FFF2-40B4-BE49-F238E27FC236}">
-              <a16:creationId xmlns:a16="http://schemas.microsoft.com/office/drawing/2014/main" id="{8C9CDBF9-B222-7608-9292-3C46CA2B2333}"/>
-            </a:ext>
-          </a:extLst>
-        </p:cNvPr>
-        <p:cNvGrpSpPr/>
-        <p:nvPr/>
-      </p:nvGrpSpPr>
-      <p:grpSpPr>
-        <a:xfrm>
-          <a:off x="0" y="0"/>
-          <a:ext cx="0" cy="0"/>
-          <a:chOff x="0" y="0"/>
-          <a:chExt cx="0" cy="0"/>
-        </a:xfrm>
-      </p:grpSpPr>
-      <p:sp>
-        <p:nvSpPr>
-          <p:cNvPr id="2" name="Título 1">
-            <a:extLst>
-              <a:ext uri="{FF2B5EF4-FFF2-40B4-BE49-F238E27FC236}">
-                <a16:creationId xmlns:a16="http://schemas.microsoft.com/office/drawing/2014/main" id="{A6D23D9B-9364-7526-C35F-FDBDA934AF9E}"/>
-              </a:ext>
-            </a:extLst>
-          </p:cNvPr>
-          <p:cNvSpPr>
-            <a:spLocks noGrp="1"/>
-          </p:cNvSpPr>
-          <p:nvPr>
-            <p:ph type="title"/>
-          </p:nvPr>
-        </p:nvSpPr>
-        <p:spPr>
-          <a:xfrm>
-            <a:off x="207391" y="289089"/>
-            <a:ext cx="11726943" cy="785567"/>
-          </a:xfrm>
-        </p:spPr>
-        <p:txBody>
-          <a:bodyPr>
-            <a:normAutofit/>
-          </a:bodyPr>
-          <a:lstStyle/>
-          <a:p>
-            <a:pPr algn="ctr"/>
-            <a:r>
-              <a:rPr lang="es-ES" sz="4000" b="1" u="sng" dirty="0">
-                <a:solidFill>
-                  <a:srgbClr val="00B0F0"/>
-                </a:solidFill>
-              </a:rPr>
-              <a:t>Finalizar Compra</a:t>
-            </a:r>
-          </a:p>
-        </p:txBody>
-      </p:sp>
-      <p:sp>
-        <p:nvSpPr>
-          <p:cNvPr id="3" name="Marcador de texto 2">
-            <a:extLst>
-              <a:ext uri="{FF2B5EF4-FFF2-40B4-BE49-F238E27FC236}">
-                <a16:creationId xmlns:a16="http://schemas.microsoft.com/office/drawing/2014/main" id="{A2C217F6-80B3-1B06-3392-0B053A218055}"/>
-              </a:ext>
-            </a:extLst>
-          </p:cNvPr>
-          <p:cNvSpPr>
-            <a:spLocks noGrp="1"/>
-          </p:cNvSpPr>
-          <p:nvPr>
-            <p:ph type="body" sz="half" idx="2"/>
-          </p:nvPr>
-        </p:nvSpPr>
-        <p:spPr>
-          <a:xfrm>
-            <a:off x="257666" y="1074656"/>
-            <a:ext cx="11676669" cy="5494255"/>
-          </a:xfrm>
-        </p:spPr>
-        <p:txBody>
-          <a:bodyPr anchor="t">
-            <a:normAutofit/>
-          </a:bodyPr>
-          <a:lstStyle/>
-          <a:p>
-            <a:pPr algn="l"/>
-            <a:r>
-              <a:rPr lang="es-ES" sz="2800" b="1" dirty="0">
-                <a:solidFill>
-                  <a:srgbClr val="00B0F0"/>
-                </a:solidFill>
-              </a:rPr>
-              <a:t>Esta pagina tiene los productos de la Cesta (nombre, precio, imagen, cantidad, total, subtotal y numero tarjeta de pago). Al pulsar Finalizar con la sesión iniciada te crea la factura.</a:t>
-            </a:r>
-          </a:p>
-          <a:p>
-            <a:pPr algn="l"/>
-            <a:endParaRPr lang="es-ES" sz="2800" b="1" dirty="0">
-              <a:solidFill>
-                <a:srgbClr val="00B0F0"/>
-              </a:solidFill>
-            </a:endParaRPr>
-          </a:p>
-        </p:txBody>
-      </p:sp>
-    </p:spTree>
-    <p:extLst>
-      <p:ext uri="{BB962C8B-B14F-4D97-AF65-F5344CB8AC3E}">
-        <p14:creationId xmlns:p14="http://schemas.microsoft.com/office/powerpoint/2010/main" val="1816567654"/>
-      </p:ext>
-    </p:extLst>
-  </p:cSld>
-  <p:clrMapOvr>
-    <a:masterClrMapping/>
-  </p:clrMapOvr>
-</p:sld>
-</file>
-
-<file path=ppt/slides/slide17.xml><?xml version="1.0" encoding="utf-8"?>
-<p:sld xmlns:a="http://schemas.openxmlformats.org/drawingml/2006/main" xmlns:r="http://schemas.openxmlformats.org/officeDocument/2006/relationships" xmlns:p="http://schemas.openxmlformats.org/presentationml/2006/main">
-  <p:cSld>
-    <p:spTree>
-      <p:nvGrpSpPr>
-        <p:cNvPr id="1" name="">
-          <a:extLst>
-            <a:ext uri="{FF2B5EF4-FFF2-40B4-BE49-F238E27FC236}">
-              <a16:creationId xmlns:a16="http://schemas.microsoft.com/office/drawing/2014/main" id="{29C46807-5785-4AD4-A4E4-E15E3FB2A51B}"/>
-            </a:ext>
-          </a:extLst>
-        </p:cNvPr>
-        <p:cNvGrpSpPr/>
-        <p:nvPr/>
-      </p:nvGrpSpPr>
-      <p:grpSpPr>
-        <a:xfrm>
-          <a:off x="0" y="0"/>
-          <a:ext cx="0" cy="0"/>
-          <a:chOff x="0" y="0"/>
-          <a:chExt cx="0" cy="0"/>
-        </a:xfrm>
-      </p:grpSpPr>
-      <p:sp>
-        <p:nvSpPr>
-          <p:cNvPr id="2" name="Título 1">
-            <a:extLst>
-              <a:ext uri="{FF2B5EF4-FFF2-40B4-BE49-F238E27FC236}">
-                <a16:creationId xmlns:a16="http://schemas.microsoft.com/office/drawing/2014/main" id="{D3B60949-BBC2-8A3F-0958-0E04512AEDB4}"/>
-              </a:ext>
-            </a:extLst>
-          </p:cNvPr>
-          <p:cNvSpPr>
-            <a:spLocks noGrp="1"/>
-          </p:cNvSpPr>
-          <p:nvPr>
-            <p:ph type="title"/>
-          </p:nvPr>
-        </p:nvSpPr>
-        <p:spPr>
-          <a:xfrm>
-            <a:off x="207391" y="289089"/>
-            <a:ext cx="11726943" cy="785567"/>
-          </a:xfrm>
-        </p:spPr>
-        <p:txBody>
-          <a:bodyPr>
-            <a:normAutofit/>
-          </a:bodyPr>
-          <a:lstStyle/>
-          <a:p>
-            <a:pPr algn="ctr"/>
-            <a:r>
-              <a:rPr lang="es-ES" sz="4000" b="1" u="sng" dirty="0">
-                <a:solidFill>
-                  <a:srgbClr val="00B0F0"/>
-                </a:solidFill>
-              </a:rPr>
-              <a:t>Tarjetas de Aprender</a:t>
-            </a:r>
-          </a:p>
-        </p:txBody>
-      </p:sp>
-      <p:sp>
-        <p:nvSpPr>
-          <p:cNvPr id="3" name="Marcador de texto 2">
-            <a:extLst>
-              <a:ext uri="{FF2B5EF4-FFF2-40B4-BE49-F238E27FC236}">
-                <a16:creationId xmlns:a16="http://schemas.microsoft.com/office/drawing/2014/main" id="{8933D799-3FAE-17BD-F3A3-833ED594869A}"/>
-              </a:ext>
-            </a:extLst>
-          </p:cNvPr>
-          <p:cNvSpPr>
-            <a:spLocks noGrp="1"/>
-          </p:cNvSpPr>
-          <p:nvPr>
-            <p:ph type="body" sz="half" idx="2"/>
-          </p:nvPr>
-        </p:nvSpPr>
-        <p:spPr>
-          <a:xfrm>
-            <a:off x="257666" y="1074656"/>
-            <a:ext cx="11676669" cy="5494255"/>
-          </a:xfrm>
-        </p:spPr>
-        <p:txBody>
-          <a:bodyPr anchor="t">
-            <a:normAutofit/>
-          </a:bodyPr>
-          <a:lstStyle/>
-          <a:p>
-            <a:r>
-              <a:rPr lang="es-ES" sz="2800" b="1" dirty="0">
-                <a:solidFill>
-                  <a:srgbClr val="00B0F0"/>
-                </a:solidFill>
-              </a:rPr>
-              <a:t>Esta pagina tiene las Tarjetas de Aprender añadidas (nombre de usuario, tipo, pregunta, respuestas). Al pulsar Añadir/Editar con la sesión iniciada te lleva a Editar Tarjetas de Aprender. </a:t>
-            </a:r>
-          </a:p>
-        </p:txBody>
-      </p:sp>
-    </p:spTree>
-    <p:extLst>
-      <p:ext uri="{BB962C8B-B14F-4D97-AF65-F5344CB8AC3E}">
-        <p14:creationId xmlns:p14="http://schemas.microsoft.com/office/powerpoint/2010/main" val="564579791"/>
-      </p:ext>
-    </p:extLst>
-  </p:cSld>
-  <p:clrMapOvr>
-    <a:masterClrMapping/>
-  </p:clrMapOvr>
-</p:sld>
-</file>
-
-<file path=ppt/slides/slide18.xml><?xml version="1.0" encoding="utf-8"?>
-<p:sld xmlns:a="http://schemas.openxmlformats.org/drawingml/2006/main" xmlns:r="http://schemas.openxmlformats.org/officeDocument/2006/relationships" xmlns:p="http://schemas.openxmlformats.org/presentationml/2006/main">
-  <p:cSld>
-    <p:spTree>
-      <p:nvGrpSpPr>
-        <p:cNvPr id="1" name="">
-          <a:extLst>
-            <a:ext uri="{FF2B5EF4-FFF2-40B4-BE49-F238E27FC236}">
-              <a16:creationId xmlns:a16="http://schemas.microsoft.com/office/drawing/2014/main" id="{B097DD58-2BC6-259F-692C-E21B39177798}"/>
-            </a:ext>
-          </a:extLst>
-        </p:cNvPr>
-        <p:cNvGrpSpPr/>
-        <p:nvPr/>
-      </p:nvGrpSpPr>
-      <p:grpSpPr>
-        <a:xfrm>
-          <a:off x="0" y="0"/>
-          <a:ext cx="0" cy="0"/>
-          <a:chOff x="0" y="0"/>
-          <a:chExt cx="0" cy="0"/>
-        </a:xfrm>
-      </p:grpSpPr>
-      <p:sp>
-        <p:nvSpPr>
-          <p:cNvPr id="2" name="Título 1">
-            <a:extLst>
-              <a:ext uri="{FF2B5EF4-FFF2-40B4-BE49-F238E27FC236}">
-                <a16:creationId xmlns:a16="http://schemas.microsoft.com/office/drawing/2014/main" id="{F1CADAAE-1631-1F63-B0F6-7C6D874F20DF}"/>
-              </a:ext>
-            </a:extLst>
-          </p:cNvPr>
-          <p:cNvSpPr>
-            <a:spLocks noGrp="1"/>
-          </p:cNvSpPr>
-          <p:nvPr>
-            <p:ph type="title"/>
-          </p:nvPr>
-        </p:nvSpPr>
-        <p:spPr>
-          <a:xfrm>
-            <a:off x="207391" y="289089"/>
-            <a:ext cx="11726943" cy="785567"/>
-          </a:xfrm>
-        </p:spPr>
-        <p:txBody>
-          <a:bodyPr>
-            <a:normAutofit/>
-          </a:bodyPr>
-          <a:lstStyle/>
-          <a:p>
-            <a:pPr algn="ctr"/>
-            <a:r>
-              <a:rPr lang="es-ES" sz="4000" b="1" u="sng" dirty="0">
-                <a:solidFill>
-                  <a:srgbClr val="00B0F0"/>
-                </a:solidFill>
-              </a:rPr>
-              <a:t>Editar Tarjetas de Aprender</a:t>
-            </a:r>
-          </a:p>
-        </p:txBody>
-      </p:sp>
-      <p:sp>
-        <p:nvSpPr>
-          <p:cNvPr id="3" name="Marcador de texto 2">
-            <a:extLst>
-              <a:ext uri="{FF2B5EF4-FFF2-40B4-BE49-F238E27FC236}">
-                <a16:creationId xmlns:a16="http://schemas.microsoft.com/office/drawing/2014/main" id="{A13A5B65-C9BE-FAE6-24E2-C31F9465E9E6}"/>
-              </a:ext>
-            </a:extLst>
-          </p:cNvPr>
-          <p:cNvSpPr>
-            <a:spLocks noGrp="1"/>
-          </p:cNvSpPr>
-          <p:nvPr>
-            <p:ph type="body" sz="half" idx="2"/>
-          </p:nvPr>
-        </p:nvSpPr>
-        <p:spPr>
-          <a:xfrm>
-            <a:off x="257666" y="1074656"/>
-            <a:ext cx="11676669" cy="5494255"/>
-          </a:xfrm>
-        </p:spPr>
-        <p:txBody>
-          <a:bodyPr anchor="t">
-            <a:normAutofit/>
-          </a:bodyPr>
-          <a:lstStyle/>
-          <a:p>
-            <a:r>
-              <a:rPr lang="es-ES" sz="2800" b="1" dirty="0">
-                <a:solidFill>
-                  <a:srgbClr val="00B0F0"/>
-                </a:solidFill>
-              </a:rPr>
-              <a:t>Esta pagina permite añadir o editar las Tarjetas de Aprender (nombre de usuario, tipo, pregunta, respuestas). Al pulsar Añadir/Editar con la sesión iniciada te lleva a Tarjetas de Aprender. </a:t>
-            </a:r>
-          </a:p>
-        </p:txBody>
-      </p:sp>
-    </p:spTree>
-    <p:extLst>
-      <p:ext uri="{BB962C8B-B14F-4D97-AF65-F5344CB8AC3E}">
-        <p14:creationId xmlns:p14="http://schemas.microsoft.com/office/powerpoint/2010/main" val="1254558260"/>
       </p:ext>
     </p:extLst>
   </p:cSld>
@@ -4899,12 +5102,12 @@
               <a:buAutoNum type="arabicPeriod"/>
             </a:pPr>
             <a:r>
-              <a:rPr lang="es-ES" sz="2000" b="1" dirty="0">
+              <a:rPr lang="es-ES" sz="1800" b="1" u="sng" dirty="0">
                 <a:solidFill>
                   <a:srgbClr val="00B0F0"/>
                 </a:solidFill>
               </a:rPr>
-              <a:t>Descripción y Boceto</a:t>
+              <a:t>Redes, Git y Tecnologías Dominadas</a:t>
             </a:r>
           </a:p>
           <a:p>
@@ -4913,12 +5116,12 @@
               <a:buAutoNum type="arabicPeriod"/>
             </a:pPr>
             <a:r>
-              <a:rPr lang="es-ES" sz="2000" b="1" dirty="0">
+              <a:rPr lang="es-ES" sz="1800" b="1" u="sng" dirty="0">
                 <a:solidFill>
                   <a:srgbClr val="00B0F0"/>
                 </a:solidFill>
               </a:rPr>
-              <a:t>Estudio de tiendas online</a:t>
+              <a:t>Descripción y Boceto</a:t>
             </a:r>
           </a:p>
           <a:p>
@@ -4927,12 +5130,12 @@
               <a:buAutoNum type="arabicPeriod"/>
             </a:pPr>
             <a:r>
-              <a:rPr lang="es-ES" sz="2000" b="1" dirty="0">
+              <a:rPr lang="es-ES" sz="1800" b="1" u="sng" dirty="0">
                 <a:solidFill>
                   <a:srgbClr val="00B0F0"/>
                 </a:solidFill>
               </a:rPr>
-              <a:t>Home (Inicio)</a:t>
+              <a:t>Estudio de tiendas online</a:t>
             </a:r>
           </a:p>
           <a:p>
@@ -4941,12 +5144,12 @@
               <a:buAutoNum type="arabicPeriod"/>
             </a:pPr>
             <a:r>
-              <a:rPr lang="es-ES" sz="2000" b="1" dirty="0">
+              <a:rPr lang="es-ES" sz="1800" b="1" u="sng" dirty="0">
                 <a:solidFill>
                   <a:srgbClr val="00B0F0"/>
                 </a:solidFill>
               </a:rPr>
-              <a:t>Login (Iniciar Sesión)</a:t>
+              <a:t>Home (Inicio)</a:t>
             </a:r>
           </a:p>
           <a:p>
@@ -4955,12 +5158,12 @@
               <a:buAutoNum type="arabicPeriod"/>
             </a:pPr>
             <a:r>
-              <a:rPr lang="es-ES" sz="2000" b="1" dirty="0">
+              <a:rPr lang="es-ES" sz="1800" b="1" u="sng" dirty="0">
                 <a:solidFill>
                   <a:srgbClr val="00B0F0"/>
                 </a:solidFill>
               </a:rPr>
-              <a:t>Crear Usuario</a:t>
+              <a:t>Login (Iniciar Sesión)</a:t>
             </a:r>
           </a:p>
           <a:p>
@@ -4969,12 +5172,12 @@
               <a:buAutoNum type="arabicPeriod"/>
             </a:pPr>
             <a:r>
-              <a:rPr lang="es-ES" sz="2000" b="1" dirty="0">
+              <a:rPr lang="es-ES" sz="1800" b="1" u="sng" dirty="0">
                 <a:solidFill>
                   <a:srgbClr val="00B0F0"/>
                 </a:solidFill>
               </a:rPr>
-              <a:t>Recordar Contraseña</a:t>
+              <a:t>Crear Usuario</a:t>
             </a:r>
           </a:p>
           <a:p>
@@ -4983,12 +5186,12 @@
               <a:buAutoNum type="arabicPeriod"/>
             </a:pPr>
             <a:r>
-              <a:rPr lang="es-ES" sz="2000" b="1" dirty="0">
+              <a:rPr lang="es-ES" sz="1800" b="1" u="sng" dirty="0">
                 <a:solidFill>
                   <a:srgbClr val="00B0F0"/>
                 </a:solidFill>
               </a:rPr>
-              <a:t>Productos</a:t>
+              <a:t>Recordar Contraseña</a:t>
             </a:r>
           </a:p>
           <a:p>
@@ -4997,12 +5200,12 @@
               <a:buAutoNum type="arabicPeriod"/>
             </a:pPr>
             <a:r>
-              <a:rPr lang="es-ES" sz="2000" b="1" dirty="0">
+              <a:rPr lang="es-ES" sz="1800" b="1" u="sng" dirty="0">
                 <a:solidFill>
                   <a:srgbClr val="00B0F0"/>
                 </a:solidFill>
               </a:rPr>
-              <a:t>Detalles Producto</a:t>
+              <a:t>Productos</a:t>
             </a:r>
           </a:p>
           <a:p>
@@ -5011,12 +5214,12 @@
               <a:buAutoNum type="arabicPeriod"/>
             </a:pPr>
             <a:r>
-              <a:rPr lang="es-ES" sz="2000" b="1" dirty="0">
+              <a:rPr lang="es-ES" sz="1800" b="1" u="sng" dirty="0">
                 <a:solidFill>
                   <a:srgbClr val="00B0F0"/>
                 </a:solidFill>
               </a:rPr>
-              <a:t>Cesta</a:t>
+              <a:t>Detalles Producto</a:t>
             </a:r>
           </a:p>
           <a:p>
@@ -5025,12 +5228,12 @@
               <a:buAutoNum type="arabicPeriod"/>
             </a:pPr>
             <a:r>
-              <a:rPr lang="es-ES" sz="2000" b="1" dirty="0">
+              <a:rPr lang="es-ES" sz="1800" b="1" u="sng" dirty="0">
                 <a:solidFill>
                   <a:srgbClr val="00B0F0"/>
                 </a:solidFill>
               </a:rPr>
-              <a:t>Tarjetas de Pago</a:t>
+              <a:t>Cesta</a:t>
             </a:r>
           </a:p>
           <a:p>
@@ -5039,12 +5242,12 @@
               <a:buAutoNum type="arabicPeriod"/>
             </a:pPr>
             <a:r>
-              <a:rPr lang="es-ES" sz="2000" b="1" dirty="0">
+              <a:rPr lang="es-ES" sz="1800" b="1" u="sng" dirty="0">
                 <a:solidFill>
                   <a:srgbClr val="00B0F0"/>
                 </a:solidFill>
               </a:rPr>
-              <a:t>Editar Tarjetas de Pago</a:t>
+              <a:t>Tarjetas de Pago</a:t>
             </a:r>
           </a:p>
           <a:p>
@@ -5053,12 +5256,12 @@
               <a:buAutoNum type="arabicPeriod"/>
             </a:pPr>
             <a:r>
-              <a:rPr lang="es-ES" sz="2000" b="1" dirty="0">
+              <a:rPr lang="es-ES" sz="1800" b="1" u="sng" dirty="0">
                 <a:solidFill>
                   <a:srgbClr val="00B0F0"/>
                 </a:solidFill>
               </a:rPr>
-              <a:t>Finalizar Compra</a:t>
+              <a:t>Editar Tarjetas de Pago</a:t>
             </a:r>
           </a:p>
           <a:p>
@@ -5067,12 +5270,12 @@
               <a:buAutoNum type="arabicPeriod"/>
             </a:pPr>
             <a:r>
-              <a:rPr lang="es-ES" sz="2000" b="1" dirty="0">
+              <a:rPr lang="es-ES" sz="1800" b="1" u="sng" dirty="0">
                 <a:solidFill>
                   <a:srgbClr val="00B0F0"/>
                 </a:solidFill>
               </a:rPr>
-              <a:t>Tarjetas de Aprender</a:t>
+              <a:t>Finalizar Compra</a:t>
             </a:r>
           </a:p>
           <a:p>
@@ -5081,7 +5284,21 @@
               <a:buAutoNum type="arabicPeriod"/>
             </a:pPr>
             <a:r>
-              <a:rPr lang="es-ES" sz="2000" b="1" dirty="0">
+              <a:rPr lang="es-ES" sz="1800" b="1" u="sng" dirty="0">
+                <a:solidFill>
+                  <a:srgbClr val="00B0F0"/>
+                </a:solidFill>
+              </a:rPr>
+              <a:t>Tarjetas de Aprender</a:t>
+            </a:r>
+          </a:p>
+          <a:p>
+            <a:pPr marL="342900" indent="-342900" algn="ctr">
+              <a:buFont typeface="+mj-lt"/>
+              <a:buAutoNum type="arabicPeriod"/>
+            </a:pPr>
+            <a:r>
+              <a:rPr lang="es-ES" sz="1800" b="1" u="sng" dirty="0">
                 <a:solidFill>
                   <a:srgbClr val="00B0F0"/>
                 </a:solidFill>
@@ -5140,7 +5357,1181 @@
 </p:sld>
 </file>
 
+<file path=ppt/slides/slide20.xml><?xml version="1.0" encoding="utf-8"?>
+<p:sld xmlns:a="http://schemas.openxmlformats.org/drawingml/2006/main" xmlns:r="http://schemas.openxmlformats.org/officeDocument/2006/relationships" xmlns:p="http://schemas.openxmlformats.org/presentationml/2006/main">
+  <p:cSld>
+    <p:spTree>
+      <p:nvGrpSpPr>
+        <p:cNvPr id="1" name="">
+          <a:extLst>
+            <a:ext uri="{FF2B5EF4-FFF2-40B4-BE49-F238E27FC236}">
+              <a16:creationId xmlns:a16="http://schemas.microsoft.com/office/drawing/2014/main" id="{08869C1E-9FC5-4CEE-C330-9DF66D59D9D2}"/>
+            </a:ext>
+          </a:extLst>
+        </p:cNvPr>
+        <p:cNvGrpSpPr/>
+        <p:nvPr/>
+      </p:nvGrpSpPr>
+      <p:grpSpPr>
+        <a:xfrm>
+          <a:off x="0" y="0"/>
+          <a:ext cx="0" cy="0"/>
+          <a:chOff x="0" y="0"/>
+          <a:chExt cx="0" cy="0"/>
+        </a:xfrm>
+      </p:grpSpPr>
+      <p:sp>
+        <p:nvSpPr>
+          <p:cNvPr id="2" name="Título 1">
+            <a:extLst>
+              <a:ext uri="{FF2B5EF4-FFF2-40B4-BE49-F238E27FC236}">
+                <a16:creationId xmlns:a16="http://schemas.microsoft.com/office/drawing/2014/main" id="{D1A4FC4E-F5FF-21CD-51CD-024F532D99B2}"/>
+              </a:ext>
+            </a:extLst>
+          </p:cNvPr>
+          <p:cNvSpPr>
+            <a:spLocks noGrp="1"/>
+          </p:cNvSpPr>
+          <p:nvPr>
+            <p:ph type="title"/>
+          </p:nvPr>
+        </p:nvSpPr>
+        <p:spPr>
+          <a:xfrm>
+            <a:off x="207391" y="289089"/>
+            <a:ext cx="11726943" cy="785567"/>
+          </a:xfrm>
+        </p:spPr>
+        <p:txBody>
+          <a:bodyPr>
+            <a:normAutofit/>
+          </a:bodyPr>
+          <a:lstStyle/>
+          <a:p>
+            <a:pPr algn="ctr"/>
+            <a:r>
+              <a:rPr lang="es-ES" sz="4000" b="1" u="sng" dirty="0">
+                <a:solidFill>
+                  <a:srgbClr val="00B0F0"/>
+                </a:solidFill>
+              </a:rPr>
+              <a:t>Editar Tarjetas de Pago</a:t>
+            </a:r>
+          </a:p>
+        </p:txBody>
+      </p:sp>
+      <p:sp>
+        <p:nvSpPr>
+          <p:cNvPr id="3" name="Marcador de texto 2">
+            <a:extLst>
+              <a:ext uri="{FF2B5EF4-FFF2-40B4-BE49-F238E27FC236}">
+                <a16:creationId xmlns:a16="http://schemas.microsoft.com/office/drawing/2014/main" id="{083C93DD-BA38-EB02-FD5E-C854D7ABCBB8}"/>
+              </a:ext>
+            </a:extLst>
+          </p:cNvPr>
+          <p:cNvSpPr>
+            <a:spLocks noGrp="1"/>
+          </p:cNvSpPr>
+          <p:nvPr>
+            <p:ph type="body" sz="half" idx="2"/>
+          </p:nvPr>
+        </p:nvSpPr>
+        <p:spPr>
+          <a:xfrm>
+            <a:off x="257666" y="1074656"/>
+            <a:ext cx="11676669" cy="5494255"/>
+          </a:xfrm>
+        </p:spPr>
+        <p:txBody>
+          <a:bodyPr anchor="t">
+            <a:normAutofit/>
+          </a:bodyPr>
+          <a:lstStyle/>
+          <a:p>
+            <a:r>
+              <a:rPr lang="es-ES" sz="2800" b="1" dirty="0">
+                <a:solidFill>
+                  <a:srgbClr val="00B0F0"/>
+                </a:solidFill>
+              </a:rPr>
+              <a:t>Esta pagina permite añadir o editar las Tarjetas de Pago (nombre de usuario, fecha de caducidad, CCV). Al pulsar Añadir/Editar con la sesión iniciada te lleva a Tarjetas de Pago. </a:t>
+            </a:r>
+          </a:p>
+        </p:txBody>
+      </p:sp>
+    </p:spTree>
+    <p:extLst>
+      <p:ext uri="{BB962C8B-B14F-4D97-AF65-F5344CB8AC3E}">
+        <p14:creationId xmlns:p14="http://schemas.microsoft.com/office/powerpoint/2010/main" val="3147110869"/>
+      </p:ext>
+    </p:extLst>
+  </p:cSld>
+  <p:clrMapOvr>
+    <a:masterClrMapping/>
+  </p:clrMapOvr>
+</p:sld>
+</file>
+
+<file path=ppt/slides/slide21.xml><?xml version="1.0" encoding="utf-8"?>
+<p:sld xmlns:a="http://schemas.openxmlformats.org/drawingml/2006/main" xmlns:r="http://schemas.openxmlformats.org/officeDocument/2006/relationships" xmlns:p="http://schemas.openxmlformats.org/presentationml/2006/main">
+  <p:cSld>
+    <p:spTree>
+      <p:nvGrpSpPr>
+        <p:cNvPr id="1" name="">
+          <a:extLst>
+            <a:ext uri="{FF2B5EF4-FFF2-40B4-BE49-F238E27FC236}">
+              <a16:creationId xmlns:a16="http://schemas.microsoft.com/office/drawing/2014/main" id="{8C9CDBF9-B222-7608-9292-3C46CA2B2333}"/>
+            </a:ext>
+          </a:extLst>
+        </p:cNvPr>
+        <p:cNvGrpSpPr/>
+        <p:nvPr/>
+      </p:nvGrpSpPr>
+      <p:grpSpPr>
+        <a:xfrm>
+          <a:off x="0" y="0"/>
+          <a:ext cx="0" cy="0"/>
+          <a:chOff x="0" y="0"/>
+          <a:chExt cx="0" cy="0"/>
+        </a:xfrm>
+      </p:grpSpPr>
+      <p:sp>
+        <p:nvSpPr>
+          <p:cNvPr id="2" name="Título 1">
+            <a:extLst>
+              <a:ext uri="{FF2B5EF4-FFF2-40B4-BE49-F238E27FC236}">
+                <a16:creationId xmlns:a16="http://schemas.microsoft.com/office/drawing/2014/main" id="{A6D23D9B-9364-7526-C35F-FDBDA934AF9E}"/>
+              </a:ext>
+            </a:extLst>
+          </p:cNvPr>
+          <p:cNvSpPr>
+            <a:spLocks noGrp="1"/>
+          </p:cNvSpPr>
+          <p:nvPr>
+            <p:ph type="title"/>
+          </p:nvPr>
+        </p:nvSpPr>
+        <p:spPr>
+          <a:xfrm>
+            <a:off x="207391" y="289089"/>
+            <a:ext cx="11726943" cy="785567"/>
+          </a:xfrm>
+        </p:spPr>
+        <p:txBody>
+          <a:bodyPr>
+            <a:normAutofit/>
+          </a:bodyPr>
+          <a:lstStyle/>
+          <a:p>
+            <a:pPr algn="ctr"/>
+            <a:r>
+              <a:rPr lang="es-ES" sz="4000" b="1" u="sng" dirty="0">
+                <a:solidFill>
+                  <a:srgbClr val="00B0F0"/>
+                </a:solidFill>
+              </a:rPr>
+              <a:t>Finalizar Compra</a:t>
+            </a:r>
+          </a:p>
+        </p:txBody>
+      </p:sp>
+      <p:sp>
+        <p:nvSpPr>
+          <p:cNvPr id="3" name="Marcador de texto 2">
+            <a:extLst>
+              <a:ext uri="{FF2B5EF4-FFF2-40B4-BE49-F238E27FC236}">
+                <a16:creationId xmlns:a16="http://schemas.microsoft.com/office/drawing/2014/main" id="{A2C217F6-80B3-1B06-3392-0B053A218055}"/>
+              </a:ext>
+            </a:extLst>
+          </p:cNvPr>
+          <p:cNvSpPr>
+            <a:spLocks noGrp="1"/>
+          </p:cNvSpPr>
+          <p:nvPr>
+            <p:ph type="body" sz="half" idx="2"/>
+          </p:nvPr>
+        </p:nvSpPr>
+        <p:spPr>
+          <a:xfrm>
+            <a:off x="257666" y="1074656"/>
+            <a:ext cx="11676669" cy="5494255"/>
+          </a:xfrm>
+        </p:spPr>
+        <p:txBody>
+          <a:bodyPr anchor="t">
+            <a:normAutofit/>
+          </a:bodyPr>
+          <a:lstStyle/>
+          <a:p>
+            <a:pPr algn="l"/>
+            <a:r>
+              <a:rPr lang="es-ES" sz="2800" b="1" dirty="0">
+                <a:solidFill>
+                  <a:srgbClr val="00B0F0"/>
+                </a:solidFill>
+              </a:rPr>
+              <a:t>Esta pagina tiene los productos de la Cesta (nombre, precio, imagen, cantidad, total, subtotal y numero tarjeta de pago). Al pulsar Finalizar con la sesión iniciada te crea la factura.</a:t>
+            </a:r>
+          </a:p>
+          <a:p>
+            <a:pPr algn="l"/>
+            <a:endParaRPr lang="es-ES" sz="2800" b="1" dirty="0">
+              <a:solidFill>
+                <a:srgbClr val="00B0F0"/>
+              </a:solidFill>
+            </a:endParaRPr>
+          </a:p>
+        </p:txBody>
+      </p:sp>
+    </p:spTree>
+    <p:extLst>
+      <p:ext uri="{BB962C8B-B14F-4D97-AF65-F5344CB8AC3E}">
+        <p14:creationId xmlns:p14="http://schemas.microsoft.com/office/powerpoint/2010/main" val="1816567654"/>
+      </p:ext>
+    </p:extLst>
+  </p:cSld>
+  <p:clrMapOvr>
+    <a:masterClrMapping/>
+  </p:clrMapOvr>
+</p:sld>
+</file>
+
+<file path=ppt/slides/slide22.xml><?xml version="1.0" encoding="utf-8"?>
+<p:sld xmlns:a="http://schemas.openxmlformats.org/drawingml/2006/main" xmlns:r="http://schemas.openxmlformats.org/officeDocument/2006/relationships" xmlns:p="http://schemas.openxmlformats.org/presentationml/2006/main">
+  <p:cSld>
+    <p:spTree>
+      <p:nvGrpSpPr>
+        <p:cNvPr id="1" name="">
+          <a:extLst>
+            <a:ext uri="{FF2B5EF4-FFF2-40B4-BE49-F238E27FC236}">
+              <a16:creationId xmlns:a16="http://schemas.microsoft.com/office/drawing/2014/main" id="{29C46807-5785-4AD4-A4E4-E15E3FB2A51B}"/>
+            </a:ext>
+          </a:extLst>
+        </p:cNvPr>
+        <p:cNvGrpSpPr/>
+        <p:nvPr/>
+      </p:nvGrpSpPr>
+      <p:grpSpPr>
+        <a:xfrm>
+          <a:off x="0" y="0"/>
+          <a:ext cx="0" cy="0"/>
+          <a:chOff x="0" y="0"/>
+          <a:chExt cx="0" cy="0"/>
+        </a:xfrm>
+      </p:grpSpPr>
+      <p:sp>
+        <p:nvSpPr>
+          <p:cNvPr id="2" name="Título 1">
+            <a:extLst>
+              <a:ext uri="{FF2B5EF4-FFF2-40B4-BE49-F238E27FC236}">
+                <a16:creationId xmlns:a16="http://schemas.microsoft.com/office/drawing/2014/main" id="{D3B60949-BBC2-8A3F-0958-0E04512AEDB4}"/>
+              </a:ext>
+            </a:extLst>
+          </p:cNvPr>
+          <p:cNvSpPr>
+            <a:spLocks noGrp="1"/>
+          </p:cNvSpPr>
+          <p:nvPr>
+            <p:ph type="title"/>
+          </p:nvPr>
+        </p:nvSpPr>
+        <p:spPr>
+          <a:xfrm>
+            <a:off x="207391" y="289089"/>
+            <a:ext cx="11726943" cy="785567"/>
+          </a:xfrm>
+        </p:spPr>
+        <p:txBody>
+          <a:bodyPr>
+            <a:normAutofit/>
+          </a:bodyPr>
+          <a:lstStyle/>
+          <a:p>
+            <a:pPr algn="ctr"/>
+            <a:r>
+              <a:rPr lang="es-ES" sz="4000" b="1" u="sng" dirty="0">
+                <a:solidFill>
+                  <a:srgbClr val="00B0F0"/>
+                </a:solidFill>
+              </a:rPr>
+              <a:t>Tarjetas de Aprender</a:t>
+            </a:r>
+          </a:p>
+        </p:txBody>
+      </p:sp>
+      <p:sp>
+        <p:nvSpPr>
+          <p:cNvPr id="3" name="Marcador de texto 2">
+            <a:extLst>
+              <a:ext uri="{FF2B5EF4-FFF2-40B4-BE49-F238E27FC236}">
+                <a16:creationId xmlns:a16="http://schemas.microsoft.com/office/drawing/2014/main" id="{8933D799-3FAE-17BD-F3A3-833ED594869A}"/>
+              </a:ext>
+            </a:extLst>
+          </p:cNvPr>
+          <p:cNvSpPr>
+            <a:spLocks noGrp="1"/>
+          </p:cNvSpPr>
+          <p:nvPr>
+            <p:ph type="body" sz="half" idx="2"/>
+          </p:nvPr>
+        </p:nvSpPr>
+        <p:spPr>
+          <a:xfrm>
+            <a:off x="257666" y="1074656"/>
+            <a:ext cx="11676669" cy="5494255"/>
+          </a:xfrm>
+        </p:spPr>
+        <p:txBody>
+          <a:bodyPr anchor="t">
+            <a:normAutofit/>
+          </a:bodyPr>
+          <a:lstStyle/>
+          <a:p>
+            <a:r>
+              <a:rPr lang="es-ES" sz="2800" b="1" dirty="0">
+                <a:solidFill>
+                  <a:srgbClr val="00B0F0"/>
+                </a:solidFill>
+              </a:rPr>
+              <a:t>Esta pagina tiene las Tarjetas de Aprender añadidas (nombre de usuario, tipo, pregunta, respuestas). Al pulsar Añadir/Editar con la sesión iniciada te lleva a Editar Tarjetas de Aprender. </a:t>
+            </a:r>
+          </a:p>
+        </p:txBody>
+      </p:sp>
+    </p:spTree>
+    <p:extLst>
+      <p:ext uri="{BB962C8B-B14F-4D97-AF65-F5344CB8AC3E}">
+        <p14:creationId xmlns:p14="http://schemas.microsoft.com/office/powerpoint/2010/main" val="564579791"/>
+      </p:ext>
+    </p:extLst>
+  </p:cSld>
+  <p:clrMapOvr>
+    <a:masterClrMapping/>
+  </p:clrMapOvr>
+</p:sld>
+</file>
+
+<file path=ppt/slides/slide23.xml><?xml version="1.0" encoding="utf-8"?>
+<p:sld xmlns:a="http://schemas.openxmlformats.org/drawingml/2006/main" xmlns:r="http://schemas.openxmlformats.org/officeDocument/2006/relationships" xmlns:p="http://schemas.openxmlformats.org/presentationml/2006/main">
+  <p:cSld>
+    <p:spTree>
+      <p:nvGrpSpPr>
+        <p:cNvPr id="1" name="">
+          <a:extLst>
+            <a:ext uri="{FF2B5EF4-FFF2-40B4-BE49-F238E27FC236}">
+              <a16:creationId xmlns:a16="http://schemas.microsoft.com/office/drawing/2014/main" id="{B097DD58-2BC6-259F-692C-E21B39177798}"/>
+            </a:ext>
+          </a:extLst>
+        </p:cNvPr>
+        <p:cNvGrpSpPr/>
+        <p:nvPr/>
+      </p:nvGrpSpPr>
+      <p:grpSpPr>
+        <a:xfrm>
+          <a:off x="0" y="0"/>
+          <a:ext cx="0" cy="0"/>
+          <a:chOff x="0" y="0"/>
+          <a:chExt cx="0" cy="0"/>
+        </a:xfrm>
+      </p:grpSpPr>
+      <p:sp>
+        <p:nvSpPr>
+          <p:cNvPr id="2" name="Título 1">
+            <a:extLst>
+              <a:ext uri="{FF2B5EF4-FFF2-40B4-BE49-F238E27FC236}">
+                <a16:creationId xmlns:a16="http://schemas.microsoft.com/office/drawing/2014/main" id="{F1CADAAE-1631-1F63-B0F6-7C6D874F20DF}"/>
+              </a:ext>
+            </a:extLst>
+          </p:cNvPr>
+          <p:cNvSpPr>
+            <a:spLocks noGrp="1"/>
+          </p:cNvSpPr>
+          <p:nvPr>
+            <p:ph type="title"/>
+          </p:nvPr>
+        </p:nvSpPr>
+        <p:spPr>
+          <a:xfrm>
+            <a:off x="207391" y="289089"/>
+            <a:ext cx="11726943" cy="785567"/>
+          </a:xfrm>
+        </p:spPr>
+        <p:txBody>
+          <a:bodyPr>
+            <a:normAutofit/>
+          </a:bodyPr>
+          <a:lstStyle/>
+          <a:p>
+            <a:pPr algn="ctr"/>
+            <a:r>
+              <a:rPr lang="es-ES" sz="4000" b="1" u="sng" dirty="0">
+                <a:solidFill>
+                  <a:srgbClr val="00B0F0"/>
+                </a:solidFill>
+              </a:rPr>
+              <a:t>Editar Tarjetas de Aprender</a:t>
+            </a:r>
+          </a:p>
+        </p:txBody>
+      </p:sp>
+      <p:sp>
+        <p:nvSpPr>
+          <p:cNvPr id="3" name="Marcador de texto 2">
+            <a:extLst>
+              <a:ext uri="{FF2B5EF4-FFF2-40B4-BE49-F238E27FC236}">
+                <a16:creationId xmlns:a16="http://schemas.microsoft.com/office/drawing/2014/main" id="{A13A5B65-C9BE-FAE6-24E2-C31F9465E9E6}"/>
+              </a:ext>
+            </a:extLst>
+          </p:cNvPr>
+          <p:cNvSpPr>
+            <a:spLocks noGrp="1"/>
+          </p:cNvSpPr>
+          <p:nvPr>
+            <p:ph type="body" sz="half" idx="2"/>
+          </p:nvPr>
+        </p:nvSpPr>
+        <p:spPr>
+          <a:xfrm>
+            <a:off x="257666" y="1074656"/>
+            <a:ext cx="11676669" cy="5494255"/>
+          </a:xfrm>
+        </p:spPr>
+        <p:txBody>
+          <a:bodyPr anchor="t">
+            <a:normAutofit/>
+          </a:bodyPr>
+          <a:lstStyle/>
+          <a:p>
+            <a:r>
+              <a:rPr lang="es-ES" sz="2800" b="1" dirty="0">
+                <a:solidFill>
+                  <a:srgbClr val="00B0F0"/>
+                </a:solidFill>
+              </a:rPr>
+              <a:t>Esta pagina permite añadir o editar las Tarjetas de Aprender (nombre de usuario, tipo, pregunta, respuestas). Al pulsar Añadir/Editar con la sesión iniciada te lleva a Tarjetas de Aprender. </a:t>
+            </a:r>
+          </a:p>
+        </p:txBody>
+      </p:sp>
+    </p:spTree>
+    <p:extLst>
+      <p:ext uri="{BB962C8B-B14F-4D97-AF65-F5344CB8AC3E}">
+        <p14:creationId xmlns:p14="http://schemas.microsoft.com/office/powerpoint/2010/main" val="1254558260"/>
+      </p:ext>
+    </p:extLst>
+  </p:cSld>
+  <p:clrMapOvr>
+    <a:masterClrMapping/>
+  </p:clrMapOvr>
+</p:sld>
+</file>
+
 <file path=ppt/slides/slide3.xml><?xml version="1.0" encoding="utf-8"?>
+<p:sld xmlns:a="http://schemas.openxmlformats.org/drawingml/2006/main" xmlns:r="http://schemas.openxmlformats.org/officeDocument/2006/relationships" xmlns:p="http://schemas.openxmlformats.org/presentationml/2006/main">
+  <p:cSld>
+    <p:spTree>
+      <p:nvGrpSpPr>
+        <p:cNvPr id="1" name="">
+          <a:extLst>
+            <a:ext uri="{FF2B5EF4-FFF2-40B4-BE49-F238E27FC236}">
+              <a16:creationId xmlns:a16="http://schemas.microsoft.com/office/drawing/2014/main" id="{2F3CEC18-8177-6587-566C-CBA0319B8641}"/>
+            </a:ext>
+          </a:extLst>
+        </p:cNvPr>
+        <p:cNvGrpSpPr/>
+        <p:nvPr/>
+      </p:nvGrpSpPr>
+      <p:grpSpPr>
+        <a:xfrm>
+          <a:off x="0" y="0"/>
+          <a:ext cx="0" cy="0"/>
+          <a:chOff x="0" y="0"/>
+          <a:chExt cx="0" cy="0"/>
+        </a:xfrm>
+      </p:grpSpPr>
+      <p:sp>
+        <p:nvSpPr>
+          <p:cNvPr id="2" name="Título 1">
+            <a:extLst>
+              <a:ext uri="{FF2B5EF4-FFF2-40B4-BE49-F238E27FC236}">
+                <a16:creationId xmlns:a16="http://schemas.microsoft.com/office/drawing/2014/main" id="{0330C60F-D614-6C3E-88F8-2851E2931A22}"/>
+              </a:ext>
+            </a:extLst>
+          </p:cNvPr>
+          <p:cNvSpPr>
+            <a:spLocks noGrp="1"/>
+          </p:cNvSpPr>
+          <p:nvPr>
+            <p:ph type="title"/>
+          </p:nvPr>
+        </p:nvSpPr>
+        <p:spPr>
+          <a:xfrm>
+            <a:off x="207392" y="289089"/>
+            <a:ext cx="6532773" cy="785567"/>
+          </a:xfrm>
+        </p:spPr>
+        <p:txBody>
+          <a:bodyPr>
+            <a:normAutofit/>
+          </a:bodyPr>
+          <a:lstStyle/>
+          <a:p>
+            <a:pPr algn="ctr"/>
+            <a:r>
+              <a:rPr lang="es-ES" b="1" u="sng" dirty="0">
+                <a:solidFill>
+                  <a:srgbClr val="00B0F0"/>
+                </a:solidFill>
+              </a:rPr>
+              <a:t>Redes, Git y Tecnologías Dominadas</a:t>
+            </a:r>
+          </a:p>
+        </p:txBody>
+      </p:sp>
+      <p:pic>
+        <p:nvPicPr>
+          <p:cNvPr id="5" name="Imagen 4">
+            <a:extLst>
+              <a:ext uri="{FF2B5EF4-FFF2-40B4-BE49-F238E27FC236}">
+                <a16:creationId xmlns:a16="http://schemas.microsoft.com/office/drawing/2014/main" id="{69C82C21-DA68-AEA6-F716-67CC5B9E9EAD}"/>
+              </a:ext>
+            </a:extLst>
+          </p:cNvPr>
+          <p:cNvPicPr>
+            <a:picLocks noChangeAspect="1"/>
+          </p:cNvPicPr>
+          <p:nvPr/>
+        </p:nvPicPr>
+        <p:blipFill>
+          <a:blip r:embed="rId2">
+            <a:extLst>
+              <a:ext uri="{28A0092B-C50C-407E-A947-70E740481C1C}">
+                <a14:useLocalDpi xmlns:a14="http://schemas.microsoft.com/office/drawing/2010/main" val="0"/>
+              </a:ext>
+            </a:extLst>
+          </a:blip>
+          <a:stretch>
+            <a:fillRect/>
+          </a:stretch>
+        </p:blipFill>
+        <p:spPr>
+          <a:xfrm>
+            <a:off x="7956222" y="234963"/>
+            <a:ext cx="3978111" cy="1583763"/>
+          </a:xfrm>
+          <a:prstGeom prst="rect">
+            <a:avLst/>
+          </a:prstGeom>
+        </p:spPr>
+      </p:pic>
+      <p:pic>
+        <p:nvPicPr>
+          <p:cNvPr id="8" name="Imagen 7">
+            <a:extLst>
+              <a:ext uri="{FF2B5EF4-FFF2-40B4-BE49-F238E27FC236}">
+                <a16:creationId xmlns:a16="http://schemas.microsoft.com/office/drawing/2014/main" id="{429D4DE3-8C6D-74BB-EBAF-1F0060B3A1F4}"/>
+              </a:ext>
+            </a:extLst>
+          </p:cNvPr>
+          <p:cNvPicPr>
+            <a:picLocks noChangeAspect="1"/>
+          </p:cNvPicPr>
+          <p:nvPr/>
+        </p:nvPicPr>
+        <p:blipFill>
+          <a:blip r:embed="rId3">
+            <a:extLst>
+              <a:ext uri="{28A0092B-C50C-407E-A947-70E740481C1C}">
+                <a14:useLocalDpi xmlns:a14="http://schemas.microsoft.com/office/drawing/2010/main" val="0"/>
+              </a:ext>
+            </a:extLst>
+          </a:blip>
+          <a:stretch>
+            <a:fillRect/>
+          </a:stretch>
+        </p:blipFill>
+        <p:spPr>
+          <a:xfrm>
+            <a:off x="8830331" y="1919716"/>
+            <a:ext cx="1339099" cy="1339099"/>
+          </a:xfrm>
+          <a:prstGeom prst="rect">
+            <a:avLst/>
+          </a:prstGeom>
+        </p:spPr>
+      </p:pic>
+      <p:pic>
+        <p:nvPicPr>
+          <p:cNvPr id="10" name="Imagen 9">
+            <a:extLst>
+              <a:ext uri="{FF2B5EF4-FFF2-40B4-BE49-F238E27FC236}">
+                <a16:creationId xmlns:a16="http://schemas.microsoft.com/office/drawing/2014/main" id="{611C7FE4-5BA5-292F-86DB-1F98D0B53421}"/>
+              </a:ext>
+            </a:extLst>
+          </p:cNvPr>
+          <p:cNvPicPr>
+            <a:picLocks noChangeAspect="1"/>
+          </p:cNvPicPr>
+          <p:nvPr/>
+        </p:nvPicPr>
+        <p:blipFill>
+          <a:blip r:embed="rId4">
+            <a:extLst>
+              <a:ext uri="{28A0092B-C50C-407E-A947-70E740481C1C}">
+                <a14:useLocalDpi xmlns:a14="http://schemas.microsoft.com/office/drawing/2010/main" val="0"/>
+              </a:ext>
+            </a:extLst>
+          </a:blip>
+          <a:stretch>
+            <a:fillRect/>
+          </a:stretch>
+        </p:blipFill>
+        <p:spPr>
+          <a:xfrm>
+            <a:off x="10318963" y="3171468"/>
+            <a:ext cx="1583763" cy="1583763"/>
+          </a:xfrm>
+          <a:prstGeom prst="rect">
+            <a:avLst/>
+          </a:prstGeom>
+        </p:spPr>
+      </p:pic>
+      <p:pic>
+        <p:nvPicPr>
+          <p:cNvPr id="12" name="Imagen 11">
+            <a:extLst>
+              <a:ext uri="{FF2B5EF4-FFF2-40B4-BE49-F238E27FC236}">
+                <a16:creationId xmlns:a16="http://schemas.microsoft.com/office/drawing/2014/main" id="{9D29DC1A-4524-0626-64F7-48BF81E8BDC6}"/>
+              </a:ext>
+            </a:extLst>
+          </p:cNvPr>
+          <p:cNvPicPr>
+            <a:picLocks noChangeAspect="1"/>
+          </p:cNvPicPr>
+          <p:nvPr/>
+        </p:nvPicPr>
+        <p:blipFill>
+          <a:blip r:embed="rId5">
+            <a:extLst>
+              <a:ext uri="{28A0092B-C50C-407E-A947-70E740481C1C}">
+                <a14:useLocalDpi xmlns:a14="http://schemas.microsoft.com/office/drawing/2010/main" val="0"/>
+              </a:ext>
+            </a:extLst>
+          </a:blip>
+          <a:stretch>
+            <a:fillRect/>
+          </a:stretch>
+        </p:blipFill>
+        <p:spPr>
+          <a:xfrm>
+            <a:off x="10260596" y="1418040"/>
+            <a:ext cx="1670246" cy="1670246"/>
+          </a:xfrm>
+          <a:prstGeom prst="rect">
+            <a:avLst/>
+          </a:prstGeom>
+        </p:spPr>
+      </p:pic>
+      <p:pic>
+        <p:nvPicPr>
+          <p:cNvPr id="14" name="Imagen 13">
+            <a:extLst>
+              <a:ext uri="{FF2B5EF4-FFF2-40B4-BE49-F238E27FC236}">
+                <a16:creationId xmlns:a16="http://schemas.microsoft.com/office/drawing/2014/main" id="{03292112-7952-18F4-F375-A63539D9AAE3}"/>
+              </a:ext>
+            </a:extLst>
+          </p:cNvPr>
+          <p:cNvPicPr>
+            <a:picLocks noChangeAspect="1"/>
+          </p:cNvPicPr>
+          <p:nvPr/>
+        </p:nvPicPr>
+        <p:blipFill>
+          <a:blip r:embed="rId6">
+            <a:extLst>
+              <a:ext uri="{28A0092B-C50C-407E-A947-70E740481C1C}">
+                <a14:useLocalDpi xmlns:a14="http://schemas.microsoft.com/office/drawing/2010/main" val="0"/>
+              </a:ext>
+            </a:extLst>
+          </a:blip>
+          <a:stretch>
+            <a:fillRect/>
+          </a:stretch>
+        </p:blipFill>
+        <p:spPr>
+          <a:xfrm>
+            <a:off x="7336629" y="3622819"/>
+            <a:ext cx="2505076" cy="1352741"/>
+          </a:xfrm>
+          <a:prstGeom prst="rect">
+            <a:avLst/>
+          </a:prstGeom>
+        </p:spPr>
+      </p:pic>
+      <p:pic>
+        <p:nvPicPr>
+          <p:cNvPr id="16" name="Imagen 15">
+            <a:extLst>
+              <a:ext uri="{FF2B5EF4-FFF2-40B4-BE49-F238E27FC236}">
+                <a16:creationId xmlns:a16="http://schemas.microsoft.com/office/drawing/2014/main" id="{88A19DBD-38CA-F21C-1DC6-14162374BC56}"/>
+              </a:ext>
+            </a:extLst>
+          </p:cNvPr>
+          <p:cNvPicPr>
+            <a:picLocks noChangeAspect="1"/>
+          </p:cNvPicPr>
+          <p:nvPr/>
+        </p:nvPicPr>
+        <p:blipFill>
+          <a:blip r:embed="rId7">
+            <a:extLst>
+              <a:ext uri="{28A0092B-C50C-407E-A947-70E740481C1C}">
+                <a14:useLocalDpi xmlns:a14="http://schemas.microsoft.com/office/drawing/2010/main" val="0"/>
+              </a:ext>
+            </a:extLst>
+          </a:blip>
+          <a:stretch>
+            <a:fillRect/>
+          </a:stretch>
+        </p:blipFill>
+        <p:spPr>
+          <a:xfrm>
+            <a:off x="10184309" y="4975560"/>
+            <a:ext cx="1531856" cy="1531856"/>
+          </a:xfrm>
+          <a:prstGeom prst="rect">
+            <a:avLst/>
+          </a:prstGeom>
+        </p:spPr>
+      </p:pic>
+      <p:pic>
+        <p:nvPicPr>
+          <p:cNvPr id="18" name="Imagen 17">
+            <a:extLst>
+              <a:ext uri="{FF2B5EF4-FFF2-40B4-BE49-F238E27FC236}">
+                <a16:creationId xmlns:a16="http://schemas.microsoft.com/office/drawing/2014/main" id="{738B84DB-F009-2DF2-E790-031075868B58}"/>
+              </a:ext>
+            </a:extLst>
+          </p:cNvPr>
+          <p:cNvPicPr>
+            <a:picLocks noChangeAspect="1"/>
+          </p:cNvPicPr>
+          <p:nvPr/>
+        </p:nvPicPr>
+        <p:blipFill>
+          <a:blip r:embed="rId8">
+            <a:extLst>
+              <a:ext uri="{28A0092B-C50C-407E-A947-70E740481C1C}">
+                <a14:useLocalDpi xmlns:a14="http://schemas.microsoft.com/office/drawing/2010/main" val="0"/>
+              </a:ext>
+            </a:extLst>
+          </a:blip>
+          <a:stretch>
+            <a:fillRect/>
+          </a:stretch>
+        </p:blipFill>
+        <p:spPr>
+          <a:xfrm>
+            <a:off x="8351065" y="5086839"/>
+            <a:ext cx="1335100" cy="1335100"/>
+          </a:xfrm>
+          <a:prstGeom prst="rect">
+            <a:avLst/>
+          </a:prstGeom>
+        </p:spPr>
+      </p:pic>
+      <p:sp>
+        <p:nvSpPr>
+          <p:cNvPr id="34" name="Marcador de texto 2">
+            <a:extLst>
+              <a:ext uri="{FF2B5EF4-FFF2-40B4-BE49-F238E27FC236}">
+                <a16:creationId xmlns:a16="http://schemas.microsoft.com/office/drawing/2014/main" id="{A233A15A-A17A-1D6B-7793-5C6B81525A30}"/>
+              </a:ext>
+            </a:extLst>
+          </p:cNvPr>
+          <p:cNvSpPr txBox="1">
+            <a:spLocks/>
+          </p:cNvSpPr>
+          <p:nvPr/>
+        </p:nvSpPr>
+        <p:spPr>
+          <a:xfrm>
+            <a:off x="257667" y="1026844"/>
+            <a:ext cx="7227216" cy="1676533"/>
+          </a:xfrm>
+          <a:prstGeom prst="rect">
+            <a:avLst/>
+          </a:prstGeom>
+        </p:spPr>
+        <p:txBody>
+          <a:bodyPr vert="horz" lIns="91440" tIns="45720" rIns="91440" bIns="45720" rtlCol="0" anchor="t">
+            <a:normAutofit/>
+          </a:bodyPr>
+          <a:lstStyle>
+            <a:lvl1pPr marL="0" indent="0" algn="l" defTabSz="914400" rtl="0" eaLnBrk="1" latinLnBrk="0" hangingPunct="1">
+              <a:lnSpc>
+                <a:spcPct val="90000"/>
+              </a:lnSpc>
+              <a:spcBef>
+                <a:spcPts val="1400"/>
+              </a:spcBef>
+              <a:buClr>
+                <a:schemeClr val="accent1"/>
+              </a:buClr>
+              <a:buSzPct val="80000"/>
+              <a:buFont typeface="Corbel" pitchFamily="34" charset="0"/>
+              <a:buNone/>
+              <a:defRPr sz="1600" kern="1200">
+                <a:solidFill>
+                  <a:schemeClr val="accent1"/>
+                </a:solidFill>
+                <a:latin typeface="+mn-lt"/>
+                <a:ea typeface="+mn-ea"/>
+                <a:cs typeface="+mn-cs"/>
+              </a:defRPr>
+            </a:lvl1pPr>
+            <a:lvl2pPr marL="457200" indent="0" algn="l" defTabSz="914400" rtl="0" eaLnBrk="1" latinLnBrk="0" hangingPunct="1">
+              <a:lnSpc>
+                <a:spcPct val="90000"/>
+              </a:lnSpc>
+              <a:spcBef>
+                <a:spcPts val="200"/>
+              </a:spcBef>
+              <a:spcAft>
+                <a:spcPts val="400"/>
+              </a:spcAft>
+              <a:buClr>
+                <a:schemeClr val="accent1"/>
+              </a:buClr>
+              <a:buSzPct val="80000"/>
+              <a:buFont typeface="Corbel" pitchFamily="34" charset="0"/>
+              <a:buNone/>
+              <a:defRPr sz="1400" kern="1200">
+                <a:solidFill>
+                  <a:schemeClr val="accent1"/>
+                </a:solidFill>
+                <a:latin typeface="+mn-lt"/>
+                <a:ea typeface="+mn-ea"/>
+                <a:cs typeface="+mn-cs"/>
+              </a:defRPr>
+            </a:lvl2pPr>
+            <a:lvl3pPr marL="914400" indent="0" algn="l" defTabSz="914400" rtl="0" eaLnBrk="1" latinLnBrk="0" hangingPunct="1">
+              <a:lnSpc>
+                <a:spcPct val="90000"/>
+              </a:lnSpc>
+              <a:spcBef>
+                <a:spcPts val="200"/>
+              </a:spcBef>
+              <a:spcAft>
+                <a:spcPts val="400"/>
+              </a:spcAft>
+              <a:buClr>
+                <a:schemeClr val="accent1"/>
+              </a:buClr>
+              <a:buSzPct val="80000"/>
+              <a:buFont typeface="Corbel" pitchFamily="34" charset="0"/>
+              <a:buNone/>
+              <a:defRPr sz="1200" kern="1200">
+                <a:solidFill>
+                  <a:schemeClr val="accent1"/>
+                </a:solidFill>
+                <a:latin typeface="+mn-lt"/>
+                <a:ea typeface="+mn-ea"/>
+                <a:cs typeface="+mn-cs"/>
+              </a:defRPr>
+            </a:lvl3pPr>
+            <a:lvl4pPr marL="1371600" indent="0" algn="l" defTabSz="914400" rtl="0" eaLnBrk="1" latinLnBrk="0" hangingPunct="1">
+              <a:lnSpc>
+                <a:spcPct val="90000"/>
+              </a:lnSpc>
+              <a:spcBef>
+                <a:spcPts val="200"/>
+              </a:spcBef>
+              <a:spcAft>
+                <a:spcPts val="400"/>
+              </a:spcAft>
+              <a:buClr>
+                <a:schemeClr val="accent1"/>
+              </a:buClr>
+              <a:buSzPct val="80000"/>
+              <a:buFont typeface="Corbel" pitchFamily="34" charset="0"/>
+              <a:buNone/>
+              <a:defRPr sz="1000" kern="1200">
+                <a:solidFill>
+                  <a:schemeClr val="accent1"/>
+                </a:solidFill>
+                <a:latin typeface="+mn-lt"/>
+                <a:ea typeface="+mn-ea"/>
+                <a:cs typeface="+mn-cs"/>
+              </a:defRPr>
+            </a:lvl4pPr>
+            <a:lvl5pPr marL="1828800" indent="0" algn="l" defTabSz="914400" rtl="0" eaLnBrk="1" latinLnBrk="0" hangingPunct="1">
+              <a:lnSpc>
+                <a:spcPct val="90000"/>
+              </a:lnSpc>
+              <a:spcBef>
+                <a:spcPts val="200"/>
+              </a:spcBef>
+              <a:spcAft>
+                <a:spcPts val="400"/>
+              </a:spcAft>
+              <a:buClr>
+                <a:schemeClr val="accent1"/>
+              </a:buClr>
+              <a:buSzPct val="80000"/>
+              <a:buFont typeface="Corbel" pitchFamily="34" charset="0"/>
+              <a:buNone/>
+              <a:defRPr sz="1000" kern="1200">
+                <a:solidFill>
+                  <a:schemeClr val="accent1"/>
+                </a:solidFill>
+                <a:latin typeface="+mn-lt"/>
+                <a:ea typeface="+mn-ea"/>
+                <a:cs typeface="+mn-cs"/>
+              </a:defRPr>
+            </a:lvl5pPr>
+            <a:lvl6pPr marL="2286000" indent="0" algn="l" defTabSz="914400" rtl="0" eaLnBrk="1" latinLnBrk="0" hangingPunct="1">
+              <a:lnSpc>
+                <a:spcPct val="90000"/>
+              </a:lnSpc>
+              <a:spcBef>
+                <a:spcPts val="200"/>
+              </a:spcBef>
+              <a:spcAft>
+                <a:spcPts val="400"/>
+              </a:spcAft>
+              <a:buClr>
+                <a:schemeClr val="accent1"/>
+              </a:buClr>
+              <a:buSzPct val="80000"/>
+              <a:buFont typeface="Corbel" pitchFamily="34" charset="0"/>
+              <a:buNone/>
+              <a:defRPr sz="1000" kern="1200">
+                <a:solidFill>
+                  <a:schemeClr val="accent1"/>
+                </a:solidFill>
+                <a:latin typeface="+mn-lt"/>
+                <a:ea typeface="+mn-ea"/>
+                <a:cs typeface="+mn-cs"/>
+              </a:defRPr>
+            </a:lvl6pPr>
+            <a:lvl7pPr marL="2743200" indent="0" algn="l" defTabSz="914400" rtl="0" eaLnBrk="1" latinLnBrk="0" hangingPunct="1">
+              <a:lnSpc>
+                <a:spcPct val="90000"/>
+              </a:lnSpc>
+              <a:spcBef>
+                <a:spcPts val="200"/>
+              </a:spcBef>
+              <a:spcAft>
+                <a:spcPts val="400"/>
+              </a:spcAft>
+              <a:buClr>
+                <a:schemeClr val="accent1"/>
+              </a:buClr>
+              <a:buSzPct val="80000"/>
+              <a:buFont typeface="Corbel" pitchFamily="34" charset="0"/>
+              <a:buNone/>
+              <a:defRPr sz="1000" kern="1200">
+                <a:solidFill>
+                  <a:schemeClr val="accent1"/>
+                </a:solidFill>
+                <a:latin typeface="+mn-lt"/>
+                <a:ea typeface="+mn-ea"/>
+                <a:cs typeface="+mn-cs"/>
+              </a:defRPr>
+            </a:lvl7pPr>
+            <a:lvl8pPr marL="3200400" indent="0" algn="l" defTabSz="914400" rtl="0" eaLnBrk="1" latinLnBrk="0" hangingPunct="1">
+              <a:lnSpc>
+                <a:spcPct val="90000"/>
+              </a:lnSpc>
+              <a:spcBef>
+                <a:spcPts val="200"/>
+              </a:spcBef>
+              <a:spcAft>
+                <a:spcPts val="400"/>
+              </a:spcAft>
+              <a:buClr>
+                <a:schemeClr val="accent1"/>
+              </a:buClr>
+              <a:buSzPct val="80000"/>
+              <a:buFont typeface="Corbel" pitchFamily="34" charset="0"/>
+              <a:buNone/>
+              <a:defRPr sz="1000" kern="1200">
+                <a:solidFill>
+                  <a:schemeClr val="accent1"/>
+                </a:solidFill>
+                <a:latin typeface="+mn-lt"/>
+                <a:ea typeface="+mn-ea"/>
+                <a:cs typeface="+mn-cs"/>
+              </a:defRPr>
+            </a:lvl8pPr>
+            <a:lvl9pPr marL="3657600" indent="0" algn="l" defTabSz="914400" rtl="0" eaLnBrk="1" latinLnBrk="0" hangingPunct="1">
+              <a:lnSpc>
+                <a:spcPct val="90000"/>
+              </a:lnSpc>
+              <a:spcBef>
+                <a:spcPts val="200"/>
+              </a:spcBef>
+              <a:spcAft>
+                <a:spcPts val="400"/>
+              </a:spcAft>
+              <a:buClr>
+                <a:schemeClr val="accent1"/>
+              </a:buClr>
+              <a:buSzPct val="80000"/>
+              <a:buFont typeface="Corbel" pitchFamily="34" charset="0"/>
+              <a:buNone/>
+              <a:defRPr sz="1000" kern="1200">
+                <a:solidFill>
+                  <a:schemeClr val="accent1"/>
+                </a:solidFill>
+                <a:latin typeface="+mn-lt"/>
+                <a:ea typeface="+mn-ea"/>
+                <a:cs typeface="+mn-cs"/>
+              </a:defRPr>
+            </a:lvl9pPr>
+          </a:lstStyle>
+          <a:p>
+            <a:r>
+              <a:rPr lang="es-ES" sz="2400" b="1" dirty="0">
+                <a:solidFill>
+                  <a:srgbClr val="00B0F0"/>
+                </a:solidFill>
+              </a:rPr>
+              <a:t>David Corredor Miguel</a:t>
+            </a:r>
+          </a:p>
+          <a:p>
+            <a:r>
+              <a:rPr lang="es-ES" sz="2000" b="1" dirty="0">
+                <a:solidFill>
+                  <a:srgbClr val="00B0F0"/>
+                </a:solidFill>
+                <a:hlinkClick r:id="rId9"/>
+              </a:rPr>
+              <a:t>https://es.linkedin.com/in/david-corredor-miguel-7b057624a</a:t>
+            </a:r>
+            <a:endParaRPr lang="es-ES" sz="2000" b="1" dirty="0">
+              <a:solidFill>
+                <a:srgbClr val="00B0F0"/>
+              </a:solidFill>
+            </a:endParaRPr>
+          </a:p>
+          <a:p>
+            <a:r>
+              <a:rPr lang="es-ES" sz="2000" b="1" dirty="0">
+                <a:solidFill>
+                  <a:srgbClr val="00B0F0"/>
+                </a:solidFill>
+                <a:hlinkClick r:id="rId10"/>
+              </a:rPr>
+              <a:t>https://github.com/DavidCorredorMiguel?tab=repositories</a:t>
+            </a:r>
+            <a:r>
+              <a:rPr lang="es-ES" sz="2000" b="1" dirty="0">
+                <a:solidFill>
+                  <a:srgbClr val="00B0F0"/>
+                </a:solidFill>
+              </a:rPr>
+              <a:t> </a:t>
+            </a:r>
+          </a:p>
+          <a:p>
+            <a:endParaRPr lang="es-ES" sz="2000" b="1" dirty="0">
+              <a:solidFill>
+                <a:srgbClr val="00B0F0"/>
+              </a:solidFill>
+            </a:endParaRPr>
+          </a:p>
+        </p:txBody>
+      </p:sp>
+      <p:pic>
+        <p:nvPicPr>
+          <p:cNvPr id="9" name="Imagen 8">
+            <a:extLst>
+              <a:ext uri="{FF2B5EF4-FFF2-40B4-BE49-F238E27FC236}">
+                <a16:creationId xmlns:a16="http://schemas.microsoft.com/office/drawing/2014/main" id="{A914EAFE-A773-7221-673A-6BD2BFFAA52B}"/>
+              </a:ext>
+            </a:extLst>
+          </p:cNvPr>
+          <p:cNvPicPr>
+            <a:picLocks noChangeAspect="1"/>
+          </p:cNvPicPr>
+          <p:nvPr/>
+        </p:nvPicPr>
+        <p:blipFill>
+          <a:blip r:embed="rId11">
+            <a:extLst>
+              <a:ext uri="{28A0092B-C50C-407E-A947-70E740481C1C}">
+                <a14:useLocalDpi xmlns:a14="http://schemas.microsoft.com/office/drawing/2010/main" val="0"/>
+              </a:ext>
+            </a:extLst>
+          </a:blip>
+          <a:stretch>
+            <a:fillRect/>
+          </a:stretch>
+        </p:blipFill>
+        <p:spPr>
+          <a:xfrm>
+            <a:off x="3984125" y="4894233"/>
+            <a:ext cx="3009900" cy="1524000"/>
+          </a:xfrm>
+          <a:prstGeom prst="rect">
+            <a:avLst/>
+          </a:prstGeom>
+        </p:spPr>
+      </p:pic>
+      <p:pic>
+        <p:nvPicPr>
+          <p:cNvPr id="11" name="Imagen 10">
+            <a:extLst>
+              <a:ext uri="{FF2B5EF4-FFF2-40B4-BE49-F238E27FC236}">
+                <a16:creationId xmlns:a16="http://schemas.microsoft.com/office/drawing/2014/main" id="{B3D88CDE-9D1D-4C95-C5A1-1CD8838492A6}"/>
+              </a:ext>
+            </a:extLst>
+          </p:cNvPr>
+          <p:cNvPicPr>
+            <a:picLocks noChangeAspect="1"/>
+          </p:cNvPicPr>
+          <p:nvPr/>
+        </p:nvPicPr>
+        <p:blipFill>
+          <a:blip r:embed="rId12">
+            <a:extLst>
+              <a:ext uri="{28A0092B-C50C-407E-A947-70E740481C1C}">
+                <a14:useLocalDpi xmlns:a14="http://schemas.microsoft.com/office/drawing/2010/main" val="0"/>
+              </a:ext>
+            </a:extLst>
+          </a:blip>
+          <a:stretch>
+            <a:fillRect/>
+          </a:stretch>
+        </p:blipFill>
+        <p:spPr>
+          <a:xfrm>
+            <a:off x="1999932" y="5130338"/>
+            <a:ext cx="1473846" cy="1277333"/>
+          </a:xfrm>
+          <a:prstGeom prst="rect">
+            <a:avLst/>
+          </a:prstGeom>
+        </p:spPr>
+      </p:pic>
+    </p:spTree>
+    <p:extLst>
+      <p:ext uri="{BB962C8B-B14F-4D97-AF65-F5344CB8AC3E}">
+        <p14:creationId xmlns:p14="http://schemas.microsoft.com/office/powerpoint/2010/main" val="3781622908"/>
+      </p:ext>
+    </p:extLst>
+  </p:cSld>
+  <p:clrMapOvr>
+    <a:masterClrMapping/>
+  </p:clrMapOvr>
+</p:sld>
+</file>
+
+<file path=ppt/slides/slide4.xml><?xml version="1.0" encoding="utf-8"?>
 <p:sld xmlns:a="http://schemas.openxmlformats.org/drawingml/2006/main" xmlns:r="http://schemas.openxmlformats.org/officeDocument/2006/relationships" xmlns:p="http://schemas.openxmlformats.org/presentationml/2006/main">
   <p:cSld>
     <p:spTree>
@@ -5181,8 +6572,8 @@
         </p:nvSpPr>
         <p:spPr>
           <a:xfrm>
-            <a:off x="207391" y="289089"/>
-            <a:ext cx="11726943" cy="785567"/>
+            <a:off x="207392" y="289089"/>
+            <a:ext cx="6532773" cy="785567"/>
           </a:xfrm>
         </p:spPr>
         <p:txBody>
@@ -5193,91 +6584,22 @@
           <a:p>
             <a:pPr algn="ctr"/>
             <a:r>
-              <a:rPr lang="es-ES" sz="4000" b="1" u="sng" dirty="0">
+              <a:rPr lang="es-ES" b="1" u="sng" dirty="0">
                 <a:solidFill>
                   <a:srgbClr val="00B0F0"/>
                 </a:solidFill>
               </a:rPr>
-              <a:t>Descripción</a:t>
-            </a:r>
-          </a:p>
-        </p:txBody>
-      </p:sp>
-      <p:sp>
-        <p:nvSpPr>
-          <p:cNvPr id="3" name="Marcador de texto 2">
-            <a:extLst>
-              <a:ext uri="{FF2B5EF4-FFF2-40B4-BE49-F238E27FC236}">
-                <a16:creationId xmlns:a16="http://schemas.microsoft.com/office/drawing/2014/main" id="{A3DF992E-6B98-8920-CBA3-A5E003B04AC8}"/>
-              </a:ext>
-            </a:extLst>
-          </p:cNvPr>
-          <p:cNvSpPr>
-            <a:spLocks noGrp="1"/>
-          </p:cNvSpPr>
-          <p:nvPr>
-            <p:ph type="body" sz="half" idx="2"/>
-          </p:nvPr>
-        </p:nvSpPr>
-        <p:spPr>
-          <a:xfrm>
-            <a:off x="257666" y="1074656"/>
-            <a:ext cx="8188750" cy="5494255"/>
-          </a:xfrm>
-        </p:spPr>
-        <p:txBody>
-          <a:bodyPr anchor="t">
-            <a:normAutofit/>
-          </a:bodyPr>
-          <a:lstStyle/>
-          <a:p>
-            <a:r>
-              <a:rPr lang="es-ES" sz="2800" b="1" dirty="0">
-                <a:solidFill>
-                  <a:srgbClr val="00B0F0"/>
-                </a:solidFill>
-              </a:rPr>
-              <a:t>Nuestra app de React es una tienda que reúne todo tipo de tecnologías, desde electrodomésticos, informática, sonido, hogar, etc.</a:t>
-            </a:r>
-          </a:p>
-          <a:p>
-            <a:r>
-              <a:rPr lang="es-ES" sz="2800" b="1" dirty="0">
-                <a:solidFill>
-                  <a:srgbClr val="00B0F0"/>
-                </a:solidFill>
-              </a:rPr>
-              <a:t>Además, te permite aprender sobre tecnologías con tarjetas de aprendizaje que puede crear el usuario. </a:t>
-            </a:r>
-          </a:p>
-          <a:p>
-            <a:r>
-              <a:rPr lang="es-ES" sz="2800" b="1" dirty="0">
-                <a:solidFill>
-                  <a:srgbClr val="00B0F0"/>
-                </a:solidFill>
-              </a:rPr>
-              <a:t>Puede buscar productos y filtrar por categoría. Añadir comentarios y valoraciones de productos.</a:t>
-            </a:r>
-          </a:p>
-          <a:p>
-            <a:r>
-              <a:rPr lang="es-ES" sz="2800" b="1" dirty="0">
-                <a:solidFill>
-                  <a:srgbClr val="00B0F0"/>
-                </a:solidFill>
-              </a:rPr>
-              <a:t>Tanto para comprar, comentar, valorar y crear tarjetas de aprendizaje el usuario debe estar registrado. </a:t>
+              <a:t>Redes, Git y Tecnologías Dominadas</a:t>
             </a:r>
           </a:p>
         </p:txBody>
       </p:sp>
       <p:pic>
         <p:nvPicPr>
-          <p:cNvPr id="6" name="Imagen 5">
+          <p:cNvPr id="5" name="Imagen 4">
             <a:extLst>
               <a:ext uri="{FF2B5EF4-FFF2-40B4-BE49-F238E27FC236}">
-                <a16:creationId xmlns:a16="http://schemas.microsoft.com/office/drawing/2014/main" id="{F873A213-2B33-6B7C-D026-DAC99A211DF5}"/>
+                <a16:creationId xmlns:a16="http://schemas.microsoft.com/office/drawing/2014/main" id="{10467918-2D1C-1762-86EA-86881DE33A72}"/>
               </a:ext>
             </a:extLst>
           </p:cNvPr>
@@ -5300,8 +6622,585 @@
         </p:blipFill>
         <p:spPr>
           <a:xfrm>
-            <a:off x="7266495" y="1643406"/>
-            <a:ext cx="4925505" cy="4925505"/>
+            <a:off x="7956222" y="234963"/>
+            <a:ext cx="3978111" cy="1583763"/>
+          </a:xfrm>
+          <a:prstGeom prst="rect">
+            <a:avLst/>
+          </a:prstGeom>
+        </p:spPr>
+      </p:pic>
+      <p:pic>
+        <p:nvPicPr>
+          <p:cNvPr id="8" name="Imagen 7">
+            <a:extLst>
+              <a:ext uri="{FF2B5EF4-FFF2-40B4-BE49-F238E27FC236}">
+                <a16:creationId xmlns:a16="http://schemas.microsoft.com/office/drawing/2014/main" id="{BE4602E0-1168-F558-8928-19DD0DE0A752}"/>
+              </a:ext>
+            </a:extLst>
+          </p:cNvPr>
+          <p:cNvPicPr>
+            <a:picLocks noChangeAspect="1"/>
+          </p:cNvPicPr>
+          <p:nvPr/>
+        </p:nvPicPr>
+        <p:blipFill>
+          <a:blip r:embed="rId3">
+            <a:extLst>
+              <a:ext uri="{28A0092B-C50C-407E-A947-70E740481C1C}">
+                <a14:useLocalDpi xmlns:a14="http://schemas.microsoft.com/office/drawing/2010/main" val="0"/>
+              </a:ext>
+            </a:extLst>
+          </a:blip>
+          <a:stretch>
+            <a:fillRect/>
+          </a:stretch>
+        </p:blipFill>
+        <p:spPr>
+          <a:xfrm>
+            <a:off x="8830331" y="1919716"/>
+            <a:ext cx="1339099" cy="1339099"/>
+          </a:xfrm>
+          <a:prstGeom prst="rect">
+            <a:avLst/>
+          </a:prstGeom>
+        </p:spPr>
+      </p:pic>
+      <p:pic>
+        <p:nvPicPr>
+          <p:cNvPr id="10" name="Imagen 9">
+            <a:extLst>
+              <a:ext uri="{FF2B5EF4-FFF2-40B4-BE49-F238E27FC236}">
+                <a16:creationId xmlns:a16="http://schemas.microsoft.com/office/drawing/2014/main" id="{B533771D-5775-DC38-9DC4-1BBE2C27C44B}"/>
+              </a:ext>
+            </a:extLst>
+          </p:cNvPr>
+          <p:cNvPicPr>
+            <a:picLocks noChangeAspect="1"/>
+          </p:cNvPicPr>
+          <p:nvPr/>
+        </p:nvPicPr>
+        <p:blipFill>
+          <a:blip r:embed="rId4">
+            <a:extLst>
+              <a:ext uri="{28A0092B-C50C-407E-A947-70E740481C1C}">
+                <a14:useLocalDpi xmlns:a14="http://schemas.microsoft.com/office/drawing/2010/main" val="0"/>
+              </a:ext>
+            </a:extLst>
+          </a:blip>
+          <a:stretch>
+            <a:fillRect/>
+          </a:stretch>
+        </p:blipFill>
+        <p:spPr>
+          <a:xfrm>
+            <a:off x="10318963" y="3171468"/>
+            <a:ext cx="1583763" cy="1583763"/>
+          </a:xfrm>
+          <a:prstGeom prst="rect">
+            <a:avLst/>
+          </a:prstGeom>
+        </p:spPr>
+      </p:pic>
+      <p:pic>
+        <p:nvPicPr>
+          <p:cNvPr id="12" name="Imagen 11">
+            <a:extLst>
+              <a:ext uri="{FF2B5EF4-FFF2-40B4-BE49-F238E27FC236}">
+                <a16:creationId xmlns:a16="http://schemas.microsoft.com/office/drawing/2014/main" id="{8C419208-D702-C606-1F47-B6637BA07345}"/>
+              </a:ext>
+            </a:extLst>
+          </p:cNvPr>
+          <p:cNvPicPr>
+            <a:picLocks noChangeAspect="1"/>
+          </p:cNvPicPr>
+          <p:nvPr/>
+        </p:nvPicPr>
+        <p:blipFill>
+          <a:blip r:embed="rId5">
+            <a:extLst>
+              <a:ext uri="{28A0092B-C50C-407E-A947-70E740481C1C}">
+                <a14:useLocalDpi xmlns:a14="http://schemas.microsoft.com/office/drawing/2010/main" val="0"/>
+              </a:ext>
+            </a:extLst>
+          </a:blip>
+          <a:stretch>
+            <a:fillRect/>
+          </a:stretch>
+        </p:blipFill>
+        <p:spPr>
+          <a:xfrm>
+            <a:off x="10260596" y="1418040"/>
+            <a:ext cx="1670246" cy="1670246"/>
+          </a:xfrm>
+          <a:prstGeom prst="rect">
+            <a:avLst/>
+          </a:prstGeom>
+        </p:spPr>
+      </p:pic>
+      <p:pic>
+        <p:nvPicPr>
+          <p:cNvPr id="14" name="Imagen 13">
+            <a:extLst>
+              <a:ext uri="{FF2B5EF4-FFF2-40B4-BE49-F238E27FC236}">
+                <a16:creationId xmlns:a16="http://schemas.microsoft.com/office/drawing/2014/main" id="{E95D4270-E004-6487-EE5F-7EEAE6C38596}"/>
+              </a:ext>
+            </a:extLst>
+          </p:cNvPr>
+          <p:cNvPicPr>
+            <a:picLocks noChangeAspect="1"/>
+          </p:cNvPicPr>
+          <p:nvPr/>
+        </p:nvPicPr>
+        <p:blipFill>
+          <a:blip r:embed="rId6">
+            <a:extLst>
+              <a:ext uri="{28A0092B-C50C-407E-A947-70E740481C1C}">
+                <a14:useLocalDpi xmlns:a14="http://schemas.microsoft.com/office/drawing/2010/main" val="0"/>
+              </a:ext>
+            </a:extLst>
+          </a:blip>
+          <a:stretch>
+            <a:fillRect/>
+          </a:stretch>
+        </p:blipFill>
+        <p:spPr>
+          <a:xfrm>
+            <a:off x="7251788" y="3402490"/>
+            <a:ext cx="2505076" cy="1352741"/>
+          </a:xfrm>
+          <a:prstGeom prst="rect">
+            <a:avLst/>
+          </a:prstGeom>
+        </p:spPr>
+      </p:pic>
+      <p:pic>
+        <p:nvPicPr>
+          <p:cNvPr id="16" name="Imagen 15">
+            <a:extLst>
+              <a:ext uri="{FF2B5EF4-FFF2-40B4-BE49-F238E27FC236}">
+                <a16:creationId xmlns:a16="http://schemas.microsoft.com/office/drawing/2014/main" id="{95ED43D1-1746-875B-9DAE-1BE59F5D1E74}"/>
+              </a:ext>
+            </a:extLst>
+          </p:cNvPr>
+          <p:cNvPicPr>
+            <a:picLocks noChangeAspect="1"/>
+          </p:cNvPicPr>
+          <p:nvPr/>
+        </p:nvPicPr>
+        <p:blipFill>
+          <a:blip r:embed="rId7">
+            <a:extLst>
+              <a:ext uri="{28A0092B-C50C-407E-A947-70E740481C1C}">
+                <a14:useLocalDpi xmlns:a14="http://schemas.microsoft.com/office/drawing/2010/main" val="0"/>
+              </a:ext>
+            </a:extLst>
+          </a:blip>
+          <a:stretch>
+            <a:fillRect/>
+          </a:stretch>
+        </p:blipFill>
+        <p:spPr>
+          <a:xfrm>
+            <a:off x="10184309" y="4975560"/>
+            <a:ext cx="1531856" cy="1531856"/>
+          </a:xfrm>
+          <a:prstGeom prst="rect">
+            <a:avLst/>
+          </a:prstGeom>
+        </p:spPr>
+      </p:pic>
+      <p:sp>
+        <p:nvSpPr>
+          <p:cNvPr id="36" name="Marcador de texto 2">
+            <a:extLst>
+              <a:ext uri="{FF2B5EF4-FFF2-40B4-BE49-F238E27FC236}">
+                <a16:creationId xmlns:a16="http://schemas.microsoft.com/office/drawing/2014/main" id="{194CEFFB-CBDB-EF83-1365-EC553368E552}"/>
+              </a:ext>
+            </a:extLst>
+          </p:cNvPr>
+          <p:cNvSpPr txBox="1">
+            <a:spLocks/>
+          </p:cNvSpPr>
+          <p:nvPr/>
+        </p:nvSpPr>
+        <p:spPr>
+          <a:xfrm>
+            <a:off x="269232" y="1026843"/>
+            <a:ext cx="7078962" cy="1583763"/>
+          </a:xfrm>
+          <a:prstGeom prst="rect">
+            <a:avLst/>
+          </a:prstGeom>
+        </p:spPr>
+        <p:txBody>
+          <a:bodyPr vert="horz" lIns="91440" tIns="45720" rIns="91440" bIns="45720" rtlCol="0" anchor="t">
+            <a:normAutofit/>
+          </a:bodyPr>
+          <a:lstStyle>
+            <a:lvl1pPr marL="0" indent="0" algn="l" defTabSz="914400" rtl="0" eaLnBrk="1" latinLnBrk="0" hangingPunct="1">
+              <a:lnSpc>
+                <a:spcPct val="90000"/>
+              </a:lnSpc>
+              <a:spcBef>
+                <a:spcPts val="1400"/>
+              </a:spcBef>
+              <a:buClr>
+                <a:schemeClr val="accent1"/>
+              </a:buClr>
+              <a:buSzPct val="80000"/>
+              <a:buFont typeface="Corbel" pitchFamily="34" charset="0"/>
+              <a:buNone/>
+              <a:defRPr sz="1600" kern="1200">
+                <a:solidFill>
+                  <a:schemeClr val="accent1"/>
+                </a:solidFill>
+                <a:latin typeface="+mn-lt"/>
+                <a:ea typeface="+mn-ea"/>
+                <a:cs typeface="+mn-cs"/>
+              </a:defRPr>
+            </a:lvl1pPr>
+            <a:lvl2pPr marL="457200" indent="0" algn="l" defTabSz="914400" rtl="0" eaLnBrk="1" latinLnBrk="0" hangingPunct="1">
+              <a:lnSpc>
+                <a:spcPct val="90000"/>
+              </a:lnSpc>
+              <a:spcBef>
+                <a:spcPts val="200"/>
+              </a:spcBef>
+              <a:spcAft>
+                <a:spcPts val="400"/>
+              </a:spcAft>
+              <a:buClr>
+                <a:schemeClr val="accent1"/>
+              </a:buClr>
+              <a:buSzPct val="80000"/>
+              <a:buFont typeface="Corbel" pitchFamily="34" charset="0"/>
+              <a:buNone/>
+              <a:defRPr sz="1400" kern="1200">
+                <a:solidFill>
+                  <a:schemeClr val="accent1"/>
+                </a:solidFill>
+                <a:latin typeface="+mn-lt"/>
+                <a:ea typeface="+mn-ea"/>
+                <a:cs typeface="+mn-cs"/>
+              </a:defRPr>
+            </a:lvl2pPr>
+            <a:lvl3pPr marL="914400" indent="0" algn="l" defTabSz="914400" rtl="0" eaLnBrk="1" latinLnBrk="0" hangingPunct="1">
+              <a:lnSpc>
+                <a:spcPct val="90000"/>
+              </a:lnSpc>
+              <a:spcBef>
+                <a:spcPts val="200"/>
+              </a:spcBef>
+              <a:spcAft>
+                <a:spcPts val="400"/>
+              </a:spcAft>
+              <a:buClr>
+                <a:schemeClr val="accent1"/>
+              </a:buClr>
+              <a:buSzPct val="80000"/>
+              <a:buFont typeface="Corbel" pitchFamily="34" charset="0"/>
+              <a:buNone/>
+              <a:defRPr sz="1200" kern="1200">
+                <a:solidFill>
+                  <a:schemeClr val="accent1"/>
+                </a:solidFill>
+                <a:latin typeface="+mn-lt"/>
+                <a:ea typeface="+mn-ea"/>
+                <a:cs typeface="+mn-cs"/>
+              </a:defRPr>
+            </a:lvl3pPr>
+            <a:lvl4pPr marL="1371600" indent="0" algn="l" defTabSz="914400" rtl="0" eaLnBrk="1" latinLnBrk="0" hangingPunct="1">
+              <a:lnSpc>
+                <a:spcPct val="90000"/>
+              </a:lnSpc>
+              <a:spcBef>
+                <a:spcPts val="200"/>
+              </a:spcBef>
+              <a:spcAft>
+                <a:spcPts val="400"/>
+              </a:spcAft>
+              <a:buClr>
+                <a:schemeClr val="accent1"/>
+              </a:buClr>
+              <a:buSzPct val="80000"/>
+              <a:buFont typeface="Corbel" pitchFamily="34" charset="0"/>
+              <a:buNone/>
+              <a:defRPr sz="1000" kern="1200">
+                <a:solidFill>
+                  <a:schemeClr val="accent1"/>
+                </a:solidFill>
+                <a:latin typeface="+mn-lt"/>
+                <a:ea typeface="+mn-ea"/>
+                <a:cs typeface="+mn-cs"/>
+              </a:defRPr>
+            </a:lvl4pPr>
+            <a:lvl5pPr marL="1828800" indent="0" algn="l" defTabSz="914400" rtl="0" eaLnBrk="1" latinLnBrk="0" hangingPunct="1">
+              <a:lnSpc>
+                <a:spcPct val="90000"/>
+              </a:lnSpc>
+              <a:spcBef>
+                <a:spcPts val="200"/>
+              </a:spcBef>
+              <a:spcAft>
+                <a:spcPts val="400"/>
+              </a:spcAft>
+              <a:buClr>
+                <a:schemeClr val="accent1"/>
+              </a:buClr>
+              <a:buSzPct val="80000"/>
+              <a:buFont typeface="Corbel" pitchFamily="34" charset="0"/>
+              <a:buNone/>
+              <a:defRPr sz="1000" kern="1200">
+                <a:solidFill>
+                  <a:schemeClr val="accent1"/>
+                </a:solidFill>
+                <a:latin typeface="+mn-lt"/>
+                <a:ea typeface="+mn-ea"/>
+                <a:cs typeface="+mn-cs"/>
+              </a:defRPr>
+            </a:lvl5pPr>
+            <a:lvl6pPr marL="2286000" indent="0" algn="l" defTabSz="914400" rtl="0" eaLnBrk="1" latinLnBrk="0" hangingPunct="1">
+              <a:lnSpc>
+                <a:spcPct val="90000"/>
+              </a:lnSpc>
+              <a:spcBef>
+                <a:spcPts val="200"/>
+              </a:spcBef>
+              <a:spcAft>
+                <a:spcPts val="400"/>
+              </a:spcAft>
+              <a:buClr>
+                <a:schemeClr val="accent1"/>
+              </a:buClr>
+              <a:buSzPct val="80000"/>
+              <a:buFont typeface="Corbel" pitchFamily="34" charset="0"/>
+              <a:buNone/>
+              <a:defRPr sz="1000" kern="1200">
+                <a:solidFill>
+                  <a:schemeClr val="accent1"/>
+                </a:solidFill>
+                <a:latin typeface="+mn-lt"/>
+                <a:ea typeface="+mn-ea"/>
+                <a:cs typeface="+mn-cs"/>
+              </a:defRPr>
+            </a:lvl6pPr>
+            <a:lvl7pPr marL="2743200" indent="0" algn="l" defTabSz="914400" rtl="0" eaLnBrk="1" latinLnBrk="0" hangingPunct="1">
+              <a:lnSpc>
+                <a:spcPct val="90000"/>
+              </a:lnSpc>
+              <a:spcBef>
+                <a:spcPts val="200"/>
+              </a:spcBef>
+              <a:spcAft>
+                <a:spcPts val="400"/>
+              </a:spcAft>
+              <a:buClr>
+                <a:schemeClr val="accent1"/>
+              </a:buClr>
+              <a:buSzPct val="80000"/>
+              <a:buFont typeface="Corbel" pitchFamily="34" charset="0"/>
+              <a:buNone/>
+              <a:defRPr sz="1000" kern="1200">
+                <a:solidFill>
+                  <a:schemeClr val="accent1"/>
+                </a:solidFill>
+                <a:latin typeface="+mn-lt"/>
+                <a:ea typeface="+mn-ea"/>
+                <a:cs typeface="+mn-cs"/>
+              </a:defRPr>
+            </a:lvl7pPr>
+            <a:lvl8pPr marL="3200400" indent="0" algn="l" defTabSz="914400" rtl="0" eaLnBrk="1" latinLnBrk="0" hangingPunct="1">
+              <a:lnSpc>
+                <a:spcPct val="90000"/>
+              </a:lnSpc>
+              <a:spcBef>
+                <a:spcPts val="200"/>
+              </a:spcBef>
+              <a:spcAft>
+                <a:spcPts val="400"/>
+              </a:spcAft>
+              <a:buClr>
+                <a:schemeClr val="accent1"/>
+              </a:buClr>
+              <a:buSzPct val="80000"/>
+              <a:buFont typeface="Corbel" pitchFamily="34" charset="0"/>
+              <a:buNone/>
+              <a:defRPr sz="1000" kern="1200">
+                <a:solidFill>
+                  <a:schemeClr val="accent1"/>
+                </a:solidFill>
+                <a:latin typeface="+mn-lt"/>
+                <a:ea typeface="+mn-ea"/>
+                <a:cs typeface="+mn-cs"/>
+              </a:defRPr>
+            </a:lvl8pPr>
+            <a:lvl9pPr marL="3657600" indent="0" algn="l" defTabSz="914400" rtl="0" eaLnBrk="1" latinLnBrk="0" hangingPunct="1">
+              <a:lnSpc>
+                <a:spcPct val="90000"/>
+              </a:lnSpc>
+              <a:spcBef>
+                <a:spcPts val="200"/>
+              </a:spcBef>
+              <a:spcAft>
+                <a:spcPts val="400"/>
+              </a:spcAft>
+              <a:buClr>
+                <a:schemeClr val="accent1"/>
+              </a:buClr>
+              <a:buSzPct val="80000"/>
+              <a:buFont typeface="Corbel" pitchFamily="34" charset="0"/>
+              <a:buNone/>
+              <a:defRPr sz="1000" kern="1200">
+                <a:solidFill>
+                  <a:schemeClr val="accent1"/>
+                </a:solidFill>
+                <a:latin typeface="+mn-lt"/>
+                <a:ea typeface="+mn-ea"/>
+                <a:cs typeface="+mn-cs"/>
+              </a:defRPr>
+            </a:lvl9pPr>
+          </a:lstStyle>
+          <a:p>
+            <a:r>
+              <a:rPr lang="es-ES" sz="2400" b="1" dirty="0">
+                <a:solidFill>
+                  <a:srgbClr val="00B0F0"/>
+                </a:solidFill>
+              </a:rPr>
+              <a:t>Noelia </a:t>
+            </a:r>
+            <a:r>
+              <a:rPr lang="es-ES" sz="2400" b="1" dirty="0" err="1">
+                <a:solidFill>
+                  <a:srgbClr val="00B0F0"/>
+                </a:solidFill>
+              </a:rPr>
+              <a:t>Alafarga</a:t>
+            </a:r>
+            <a:r>
+              <a:rPr lang="es-ES" sz="2400" b="1" dirty="0">
+                <a:solidFill>
+                  <a:srgbClr val="00B0F0"/>
+                </a:solidFill>
+              </a:rPr>
+              <a:t> </a:t>
+            </a:r>
+            <a:r>
+              <a:rPr lang="es-ES" sz="2400" b="1" dirty="0" err="1">
+                <a:solidFill>
+                  <a:srgbClr val="00B0F0"/>
+                </a:solidFill>
+              </a:rPr>
+              <a:t>Payá</a:t>
+            </a:r>
+            <a:endParaRPr lang="es-ES" sz="2400" b="1" dirty="0">
+              <a:solidFill>
+                <a:srgbClr val="00B0F0"/>
+              </a:solidFill>
+            </a:endParaRPr>
+          </a:p>
+          <a:p>
+            <a:r>
+              <a:rPr lang="es-ES" sz="2000" b="1" dirty="0">
+                <a:solidFill>
+                  <a:srgbClr val="00B0F0"/>
+                </a:solidFill>
+                <a:hlinkClick r:id="rId8"/>
+              </a:rPr>
+              <a:t>https://es.linkedin.com/in/noelia-alafarga-backend</a:t>
+            </a:r>
+            <a:endParaRPr lang="es-ES" sz="2000" b="1" dirty="0">
+              <a:solidFill>
+                <a:srgbClr val="00B0F0"/>
+              </a:solidFill>
+            </a:endParaRPr>
+          </a:p>
+          <a:p>
+            <a:r>
+              <a:rPr lang="es-ES" sz="2000" b="1" u="sng" dirty="0">
+                <a:hlinkClick r:id="rId9"/>
+              </a:rPr>
+              <a:t>https://github.com/noelianikolatesla?tab=repositories</a:t>
+            </a:r>
+            <a:r>
+              <a:rPr lang="es-ES" sz="2000" b="1" u="sng" dirty="0"/>
+              <a:t> </a:t>
+            </a:r>
+            <a:endParaRPr lang="es-ES" sz="2800" b="1" dirty="0">
+              <a:solidFill>
+                <a:srgbClr val="00B0F0"/>
+              </a:solidFill>
+            </a:endParaRPr>
+          </a:p>
+        </p:txBody>
+      </p:sp>
+      <p:pic>
+        <p:nvPicPr>
+          <p:cNvPr id="58" name="Imagen 57">
+            <a:extLst>
+              <a:ext uri="{FF2B5EF4-FFF2-40B4-BE49-F238E27FC236}">
+                <a16:creationId xmlns:a16="http://schemas.microsoft.com/office/drawing/2014/main" id="{54FA581F-BED6-5C61-C40C-224B58272A02}"/>
+              </a:ext>
+            </a:extLst>
+          </p:cNvPr>
+          <p:cNvPicPr>
+            <a:picLocks noChangeAspect="1"/>
+          </p:cNvPicPr>
+          <p:nvPr/>
+        </p:nvPicPr>
+        <p:blipFill>
+          <a:blip r:embed="rId10">
+            <a:extLst>
+              <a:ext uri="{28A0092B-C50C-407E-A947-70E740481C1C}">
+                <a14:useLocalDpi xmlns:a14="http://schemas.microsoft.com/office/drawing/2010/main" val="0"/>
+              </a:ext>
+            </a:extLst>
+          </a:blip>
+          <a:stretch>
+            <a:fillRect/>
+          </a:stretch>
+        </p:blipFill>
+        <p:spPr>
+          <a:xfrm>
+            <a:off x="6576496" y="4814995"/>
+            <a:ext cx="3009900" cy="1524000"/>
+          </a:xfrm>
+          <a:prstGeom prst="rect">
+            <a:avLst/>
+          </a:prstGeom>
+        </p:spPr>
+      </p:pic>
+      <p:pic>
+        <p:nvPicPr>
+          <p:cNvPr id="59" name="Imagen 58">
+            <a:extLst>
+              <a:ext uri="{FF2B5EF4-FFF2-40B4-BE49-F238E27FC236}">
+                <a16:creationId xmlns:a16="http://schemas.microsoft.com/office/drawing/2014/main" id="{0384E17F-002C-F8A3-FD67-AE09BB6A547B}"/>
+              </a:ext>
+            </a:extLst>
+          </p:cNvPr>
+          <p:cNvPicPr>
+            <a:picLocks noChangeAspect="1"/>
+          </p:cNvPicPr>
+          <p:nvPr/>
+        </p:nvPicPr>
+        <p:blipFill>
+          <a:blip r:embed="rId11">
+            <a:extLst>
+              <a:ext uri="{28A0092B-C50C-407E-A947-70E740481C1C}">
+                <a14:useLocalDpi xmlns:a14="http://schemas.microsoft.com/office/drawing/2010/main" val="0"/>
+              </a:ext>
+            </a:extLst>
+          </a:blip>
+          <a:stretch>
+            <a:fillRect/>
+          </a:stretch>
+        </p:blipFill>
+        <p:spPr>
+          <a:xfrm>
+            <a:off x="4704276" y="5192490"/>
+            <a:ext cx="1473846" cy="1277333"/>
           </a:xfrm>
           <a:prstGeom prst="rect">
             <a:avLst/>
@@ -5321,7 +7220,1033 @@
 </p:sld>
 </file>
 
-<file path=ppt/slides/slide4.xml><?xml version="1.0" encoding="utf-8"?>
+<file path=ppt/slides/slide5.xml><?xml version="1.0" encoding="utf-8"?>
+<p:sld xmlns:a="http://schemas.openxmlformats.org/drawingml/2006/main" xmlns:r="http://schemas.openxmlformats.org/officeDocument/2006/relationships" xmlns:p="http://schemas.openxmlformats.org/presentationml/2006/main">
+  <p:cSld>
+    <p:spTree>
+      <p:nvGrpSpPr>
+        <p:cNvPr id="1" name="">
+          <a:extLst>
+            <a:ext uri="{FF2B5EF4-FFF2-40B4-BE49-F238E27FC236}">
+              <a16:creationId xmlns:a16="http://schemas.microsoft.com/office/drawing/2014/main" id="{2981642B-CAED-1F74-6C40-62F5E8CECE1A}"/>
+            </a:ext>
+          </a:extLst>
+        </p:cNvPr>
+        <p:cNvGrpSpPr/>
+        <p:nvPr/>
+      </p:nvGrpSpPr>
+      <p:grpSpPr>
+        <a:xfrm>
+          <a:off x="0" y="0"/>
+          <a:ext cx="0" cy="0"/>
+          <a:chOff x="0" y="0"/>
+          <a:chExt cx="0" cy="0"/>
+        </a:xfrm>
+      </p:grpSpPr>
+      <p:sp>
+        <p:nvSpPr>
+          <p:cNvPr id="2" name="Título 1">
+            <a:extLst>
+              <a:ext uri="{FF2B5EF4-FFF2-40B4-BE49-F238E27FC236}">
+                <a16:creationId xmlns:a16="http://schemas.microsoft.com/office/drawing/2014/main" id="{9FBA21FF-0BE6-9592-E4F1-05F09468313E}"/>
+              </a:ext>
+            </a:extLst>
+          </p:cNvPr>
+          <p:cNvSpPr>
+            <a:spLocks noGrp="1"/>
+          </p:cNvSpPr>
+          <p:nvPr>
+            <p:ph type="title"/>
+          </p:nvPr>
+        </p:nvSpPr>
+        <p:spPr>
+          <a:xfrm>
+            <a:off x="207392" y="289089"/>
+            <a:ext cx="6532773" cy="785567"/>
+          </a:xfrm>
+        </p:spPr>
+        <p:txBody>
+          <a:bodyPr>
+            <a:normAutofit/>
+          </a:bodyPr>
+          <a:lstStyle/>
+          <a:p>
+            <a:pPr algn="ctr"/>
+            <a:r>
+              <a:rPr lang="es-ES" b="1" u="sng" dirty="0">
+                <a:solidFill>
+                  <a:srgbClr val="00B0F0"/>
+                </a:solidFill>
+              </a:rPr>
+              <a:t>Redes, Git y Tecnologías Dominadas</a:t>
+            </a:r>
+          </a:p>
+        </p:txBody>
+      </p:sp>
+      <p:sp>
+        <p:nvSpPr>
+          <p:cNvPr id="3" name="Marcador de texto 2">
+            <a:extLst>
+              <a:ext uri="{FF2B5EF4-FFF2-40B4-BE49-F238E27FC236}">
+                <a16:creationId xmlns:a16="http://schemas.microsoft.com/office/drawing/2014/main" id="{7DFDB54F-2586-366C-8503-B1EFA79A6074}"/>
+              </a:ext>
+            </a:extLst>
+          </p:cNvPr>
+          <p:cNvSpPr>
+            <a:spLocks noGrp="1"/>
+          </p:cNvSpPr>
+          <p:nvPr>
+            <p:ph type="body" sz="half" idx="2"/>
+          </p:nvPr>
+        </p:nvSpPr>
+        <p:spPr>
+          <a:xfrm>
+            <a:off x="257667" y="1026844"/>
+            <a:ext cx="7293784" cy="1182201"/>
+          </a:xfrm>
+        </p:spPr>
+        <p:txBody>
+          <a:bodyPr anchor="t">
+            <a:normAutofit/>
+          </a:bodyPr>
+          <a:lstStyle/>
+          <a:p>
+            <a:r>
+              <a:rPr lang="es-ES" sz="2400" b="1" dirty="0">
+                <a:solidFill>
+                  <a:srgbClr val="00B0F0"/>
+                </a:solidFill>
+              </a:rPr>
+              <a:t>Ivan Goded Carrete</a:t>
+            </a:r>
+          </a:p>
+          <a:p>
+            <a:r>
+              <a:rPr lang="es-ES" sz="2000" b="1" u="sng" dirty="0">
+                <a:hlinkClick r:id="rId2"/>
+              </a:rPr>
+              <a:t>https://github.com/ivangc1?tab=repositories</a:t>
+            </a:r>
+            <a:endParaRPr lang="es-ES" sz="2800" b="1" dirty="0">
+              <a:solidFill>
+                <a:srgbClr val="00B0F0"/>
+              </a:solidFill>
+            </a:endParaRPr>
+          </a:p>
+        </p:txBody>
+      </p:sp>
+      <p:pic>
+        <p:nvPicPr>
+          <p:cNvPr id="5" name="Imagen 4">
+            <a:extLst>
+              <a:ext uri="{FF2B5EF4-FFF2-40B4-BE49-F238E27FC236}">
+                <a16:creationId xmlns:a16="http://schemas.microsoft.com/office/drawing/2014/main" id="{E4DBBC0F-5221-E5EB-2BC9-D4F4B670D8CE}"/>
+              </a:ext>
+            </a:extLst>
+          </p:cNvPr>
+          <p:cNvPicPr>
+            <a:picLocks noChangeAspect="1"/>
+          </p:cNvPicPr>
+          <p:nvPr/>
+        </p:nvPicPr>
+        <p:blipFill>
+          <a:blip r:embed="rId3">
+            <a:extLst>
+              <a:ext uri="{28A0092B-C50C-407E-A947-70E740481C1C}">
+                <a14:useLocalDpi xmlns:a14="http://schemas.microsoft.com/office/drawing/2010/main" val="0"/>
+              </a:ext>
+            </a:extLst>
+          </a:blip>
+          <a:stretch>
+            <a:fillRect/>
+          </a:stretch>
+        </p:blipFill>
+        <p:spPr>
+          <a:xfrm>
+            <a:off x="7956222" y="234963"/>
+            <a:ext cx="3978111" cy="1583763"/>
+          </a:xfrm>
+          <a:prstGeom prst="rect">
+            <a:avLst/>
+          </a:prstGeom>
+        </p:spPr>
+      </p:pic>
+      <p:pic>
+        <p:nvPicPr>
+          <p:cNvPr id="8" name="Imagen 7">
+            <a:extLst>
+              <a:ext uri="{FF2B5EF4-FFF2-40B4-BE49-F238E27FC236}">
+                <a16:creationId xmlns:a16="http://schemas.microsoft.com/office/drawing/2014/main" id="{7DF3FC1D-6CE1-ADAF-6932-20B492A26B45}"/>
+              </a:ext>
+            </a:extLst>
+          </p:cNvPr>
+          <p:cNvPicPr>
+            <a:picLocks noChangeAspect="1"/>
+          </p:cNvPicPr>
+          <p:nvPr/>
+        </p:nvPicPr>
+        <p:blipFill>
+          <a:blip r:embed="rId4">
+            <a:extLst>
+              <a:ext uri="{28A0092B-C50C-407E-A947-70E740481C1C}">
+                <a14:useLocalDpi xmlns:a14="http://schemas.microsoft.com/office/drawing/2010/main" val="0"/>
+              </a:ext>
+            </a:extLst>
+          </a:blip>
+          <a:stretch>
+            <a:fillRect/>
+          </a:stretch>
+        </p:blipFill>
+        <p:spPr>
+          <a:xfrm>
+            <a:off x="8830331" y="1919716"/>
+            <a:ext cx="1339099" cy="1339099"/>
+          </a:xfrm>
+          <a:prstGeom prst="rect">
+            <a:avLst/>
+          </a:prstGeom>
+        </p:spPr>
+      </p:pic>
+      <p:pic>
+        <p:nvPicPr>
+          <p:cNvPr id="10" name="Imagen 9">
+            <a:extLst>
+              <a:ext uri="{FF2B5EF4-FFF2-40B4-BE49-F238E27FC236}">
+                <a16:creationId xmlns:a16="http://schemas.microsoft.com/office/drawing/2014/main" id="{F04F848C-824B-8F29-8EB3-833972625526}"/>
+              </a:ext>
+            </a:extLst>
+          </p:cNvPr>
+          <p:cNvPicPr>
+            <a:picLocks noChangeAspect="1"/>
+          </p:cNvPicPr>
+          <p:nvPr/>
+        </p:nvPicPr>
+        <p:blipFill>
+          <a:blip r:embed="rId5">
+            <a:extLst>
+              <a:ext uri="{28A0092B-C50C-407E-A947-70E740481C1C}">
+                <a14:useLocalDpi xmlns:a14="http://schemas.microsoft.com/office/drawing/2010/main" val="0"/>
+              </a:ext>
+            </a:extLst>
+          </a:blip>
+          <a:stretch>
+            <a:fillRect/>
+          </a:stretch>
+        </p:blipFill>
+        <p:spPr>
+          <a:xfrm>
+            <a:off x="10318963" y="3171468"/>
+            <a:ext cx="1583763" cy="1583763"/>
+          </a:xfrm>
+          <a:prstGeom prst="rect">
+            <a:avLst/>
+          </a:prstGeom>
+        </p:spPr>
+      </p:pic>
+      <p:pic>
+        <p:nvPicPr>
+          <p:cNvPr id="12" name="Imagen 11">
+            <a:extLst>
+              <a:ext uri="{FF2B5EF4-FFF2-40B4-BE49-F238E27FC236}">
+                <a16:creationId xmlns:a16="http://schemas.microsoft.com/office/drawing/2014/main" id="{73919255-7E51-27D6-415F-189AF4427035}"/>
+              </a:ext>
+            </a:extLst>
+          </p:cNvPr>
+          <p:cNvPicPr>
+            <a:picLocks noChangeAspect="1"/>
+          </p:cNvPicPr>
+          <p:nvPr/>
+        </p:nvPicPr>
+        <p:blipFill>
+          <a:blip r:embed="rId6">
+            <a:extLst>
+              <a:ext uri="{28A0092B-C50C-407E-A947-70E740481C1C}">
+                <a14:useLocalDpi xmlns:a14="http://schemas.microsoft.com/office/drawing/2010/main" val="0"/>
+              </a:ext>
+            </a:extLst>
+          </a:blip>
+          <a:stretch>
+            <a:fillRect/>
+          </a:stretch>
+        </p:blipFill>
+        <p:spPr>
+          <a:xfrm>
+            <a:off x="10260596" y="1418040"/>
+            <a:ext cx="1670246" cy="1670246"/>
+          </a:xfrm>
+          <a:prstGeom prst="rect">
+            <a:avLst/>
+          </a:prstGeom>
+        </p:spPr>
+      </p:pic>
+    </p:spTree>
+    <p:extLst>
+      <p:ext uri="{BB962C8B-B14F-4D97-AF65-F5344CB8AC3E}">
+        <p14:creationId xmlns:p14="http://schemas.microsoft.com/office/powerpoint/2010/main" val="4059998662"/>
+      </p:ext>
+    </p:extLst>
+  </p:cSld>
+  <p:clrMapOvr>
+    <a:masterClrMapping/>
+  </p:clrMapOvr>
+</p:sld>
+</file>
+
+<file path=ppt/slides/slide6.xml><?xml version="1.0" encoding="utf-8"?>
+<p:sld xmlns:a="http://schemas.openxmlformats.org/drawingml/2006/main" xmlns:r="http://schemas.openxmlformats.org/officeDocument/2006/relationships" xmlns:p="http://schemas.openxmlformats.org/presentationml/2006/main">
+  <p:cSld>
+    <p:spTree>
+      <p:nvGrpSpPr>
+        <p:cNvPr id="1" name="">
+          <a:extLst>
+            <a:ext uri="{FF2B5EF4-FFF2-40B4-BE49-F238E27FC236}">
+              <a16:creationId xmlns:a16="http://schemas.microsoft.com/office/drawing/2014/main" id="{023DC358-4DC1-7A42-4369-319749985E15}"/>
+            </a:ext>
+          </a:extLst>
+        </p:cNvPr>
+        <p:cNvGrpSpPr/>
+        <p:nvPr/>
+      </p:nvGrpSpPr>
+      <p:grpSpPr>
+        <a:xfrm>
+          <a:off x="0" y="0"/>
+          <a:ext cx="0" cy="0"/>
+          <a:chOff x="0" y="0"/>
+          <a:chExt cx="0" cy="0"/>
+        </a:xfrm>
+      </p:grpSpPr>
+      <p:sp>
+        <p:nvSpPr>
+          <p:cNvPr id="2" name="Título 1">
+            <a:extLst>
+              <a:ext uri="{FF2B5EF4-FFF2-40B4-BE49-F238E27FC236}">
+                <a16:creationId xmlns:a16="http://schemas.microsoft.com/office/drawing/2014/main" id="{D95DA644-B948-DE62-5C20-54B4644A98DC}"/>
+              </a:ext>
+            </a:extLst>
+          </p:cNvPr>
+          <p:cNvSpPr>
+            <a:spLocks noGrp="1"/>
+          </p:cNvSpPr>
+          <p:nvPr>
+            <p:ph type="title"/>
+          </p:nvPr>
+        </p:nvSpPr>
+        <p:spPr>
+          <a:xfrm>
+            <a:off x="207392" y="289089"/>
+            <a:ext cx="6532773" cy="785567"/>
+          </a:xfrm>
+        </p:spPr>
+        <p:txBody>
+          <a:bodyPr>
+            <a:normAutofit/>
+          </a:bodyPr>
+          <a:lstStyle/>
+          <a:p>
+            <a:pPr algn="ctr"/>
+            <a:r>
+              <a:rPr lang="es-ES" b="1" u="sng" dirty="0">
+                <a:solidFill>
+                  <a:srgbClr val="00B0F0"/>
+                </a:solidFill>
+              </a:rPr>
+              <a:t>Redes, Git y Tecnologías Dominadas</a:t>
+            </a:r>
+          </a:p>
+        </p:txBody>
+      </p:sp>
+      <p:pic>
+        <p:nvPicPr>
+          <p:cNvPr id="5" name="Imagen 4">
+            <a:extLst>
+              <a:ext uri="{FF2B5EF4-FFF2-40B4-BE49-F238E27FC236}">
+                <a16:creationId xmlns:a16="http://schemas.microsoft.com/office/drawing/2014/main" id="{DEBF86EB-F6BD-030C-8A68-43712A355758}"/>
+              </a:ext>
+            </a:extLst>
+          </p:cNvPr>
+          <p:cNvPicPr>
+            <a:picLocks noChangeAspect="1"/>
+          </p:cNvPicPr>
+          <p:nvPr/>
+        </p:nvPicPr>
+        <p:blipFill>
+          <a:blip r:embed="rId2">
+            <a:extLst>
+              <a:ext uri="{28A0092B-C50C-407E-A947-70E740481C1C}">
+                <a14:useLocalDpi xmlns:a14="http://schemas.microsoft.com/office/drawing/2010/main" val="0"/>
+              </a:ext>
+            </a:extLst>
+          </a:blip>
+          <a:stretch>
+            <a:fillRect/>
+          </a:stretch>
+        </p:blipFill>
+        <p:spPr>
+          <a:xfrm>
+            <a:off x="7956222" y="234963"/>
+            <a:ext cx="3978111" cy="1583763"/>
+          </a:xfrm>
+          <a:prstGeom prst="rect">
+            <a:avLst/>
+          </a:prstGeom>
+        </p:spPr>
+      </p:pic>
+      <p:pic>
+        <p:nvPicPr>
+          <p:cNvPr id="8" name="Imagen 7">
+            <a:extLst>
+              <a:ext uri="{FF2B5EF4-FFF2-40B4-BE49-F238E27FC236}">
+                <a16:creationId xmlns:a16="http://schemas.microsoft.com/office/drawing/2014/main" id="{B7440FB5-2694-CC0C-EB91-FFAA7D7BBEFB}"/>
+              </a:ext>
+            </a:extLst>
+          </p:cNvPr>
+          <p:cNvPicPr>
+            <a:picLocks noChangeAspect="1"/>
+          </p:cNvPicPr>
+          <p:nvPr/>
+        </p:nvPicPr>
+        <p:blipFill>
+          <a:blip r:embed="rId3">
+            <a:extLst>
+              <a:ext uri="{28A0092B-C50C-407E-A947-70E740481C1C}">
+                <a14:useLocalDpi xmlns:a14="http://schemas.microsoft.com/office/drawing/2010/main" val="0"/>
+              </a:ext>
+            </a:extLst>
+          </a:blip>
+          <a:stretch>
+            <a:fillRect/>
+          </a:stretch>
+        </p:blipFill>
+        <p:spPr>
+          <a:xfrm>
+            <a:off x="8830331" y="1919716"/>
+            <a:ext cx="1339099" cy="1339099"/>
+          </a:xfrm>
+          <a:prstGeom prst="rect">
+            <a:avLst/>
+          </a:prstGeom>
+        </p:spPr>
+      </p:pic>
+      <p:pic>
+        <p:nvPicPr>
+          <p:cNvPr id="10" name="Imagen 9">
+            <a:extLst>
+              <a:ext uri="{FF2B5EF4-FFF2-40B4-BE49-F238E27FC236}">
+                <a16:creationId xmlns:a16="http://schemas.microsoft.com/office/drawing/2014/main" id="{A62F8936-048E-90B2-5A7D-7D30301B58B9}"/>
+              </a:ext>
+            </a:extLst>
+          </p:cNvPr>
+          <p:cNvPicPr>
+            <a:picLocks noChangeAspect="1"/>
+          </p:cNvPicPr>
+          <p:nvPr/>
+        </p:nvPicPr>
+        <p:blipFill>
+          <a:blip r:embed="rId4">
+            <a:extLst>
+              <a:ext uri="{28A0092B-C50C-407E-A947-70E740481C1C}">
+                <a14:useLocalDpi xmlns:a14="http://schemas.microsoft.com/office/drawing/2010/main" val="0"/>
+              </a:ext>
+            </a:extLst>
+          </a:blip>
+          <a:stretch>
+            <a:fillRect/>
+          </a:stretch>
+        </p:blipFill>
+        <p:spPr>
+          <a:xfrm>
+            <a:off x="10318963" y="3171468"/>
+            <a:ext cx="1583763" cy="1583763"/>
+          </a:xfrm>
+          <a:prstGeom prst="rect">
+            <a:avLst/>
+          </a:prstGeom>
+        </p:spPr>
+      </p:pic>
+      <p:pic>
+        <p:nvPicPr>
+          <p:cNvPr id="12" name="Imagen 11">
+            <a:extLst>
+              <a:ext uri="{FF2B5EF4-FFF2-40B4-BE49-F238E27FC236}">
+                <a16:creationId xmlns:a16="http://schemas.microsoft.com/office/drawing/2014/main" id="{5A0745A8-F135-2335-BAF2-BA5DBE6405CB}"/>
+              </a:ext>
+            </a:extLst>
+          </p:cNvPr>
+          <p:cNvPicPr>
+            <a:picLocks noChangeAspect="1"/>
+          </p:cNvPicPr>
+          <p:nvPr/>
+        </p:nvPicPr>
+        <p:blipFill>
+          <a:blip r:embed="rId5">
+            <a:extLst>
+              <a:ext uri="{28A0092B-C50C-407E-A947-70E740481C1C}">
+                <a14:useLocalDpi xmlns:a14="http://schemas.microsoft.com/office/drawing/2010/main" val="0"/>
+              </a:ext>
+            </a:extLst>
+          </a:blip>
+          <a:stretch>
+            <a:fillRect/>
+          </a:stretch>
+        </p:blipFill>
+        <p:spPr>
+          <a:xfrm>
+            <a:off x="10260596" y="1418040"/>
+            <a:ext cx="1670246" cy="1670246"/>
+          </a:xfrm>
+          <a:prstGeom prst="rect">
+            <a:avLst/>
+          </a:prstGeom>
+        </p:spPr>
+      </p:pic>
+      <p:pic>
+        <p:nvPicPr>
+          <p:cNvPr id="14" name="Imagen 13">
+            <a:extLst>
+              <a:ext uri="{FF2B5EF4-FFF2-40B4-BE49-F238E27FC236}">
+                <a16:creationId xmlns:a16="http://schemas.microsoft.com/office/drawing/2014/main" id="{F393EAA7-604A-5DB9-37A9-07211B7F7CAB}"/>
+              </a:ext>
+            </a:extLst>
+          </p:cNvPr>
+          <p:cNvPicPr>
+            <a:picLocks noChangeAspect="1"/>
+          </p:cNvPicPr>
+          <p:nvPr/>
+        </p:nvPicPr>
+        <p:blipFill>
+          <a:blip r:embed="rId6">
+            <a:extLst>
+              <a:ext uri="{28A0092B-C50C-407E-A947-70E740481C1C}">
+                <a14:useLocalDpi xmlns:a14="http://schemas.microsoft.com/office/drawing/2010/main" val="0"/>
+              </a:ext>
+            </a:extLst>
+          </a:blip>
+          <a:stretch>
+            <a:fillRect/>
+          </a:stretch>
+        </p:blipFill>
+        <p:spPr>
+          <a:xfrm>
+            <a:off x="7336629" y="3622819"/>
+            <a:ext cx="2505076" cy="1352741"/>
+          </a:xfrm>
+          <a:prstGeom prst="rect">
+            <a:avLst/>
+          </a:prstGeom>
+        </p:spPr>
+      </p:pic>
+      <p:sp>
+        <p:nvSpPr>
+          <p:cNvPr id="35" name="Marcador de texto 2">
+            <a:extLst>
+              <a:ext uri="{FF2B5EF4-FFF2-40B4-BE49-F238E27FC236}">
+                <a16:creationId xmlns:a16="http://schemas.microsoft.com/office/drawing/2014/main" id="{C220CE75-D800-3C5D-E1BF-9A0E7945016D}"/>
+              </a:ext>
+            </a:extLst>
+          </p:cNvPr>
+          <p:cNvSpPr txBox="1">
+            <a:spLocks/>
+          </p:cNvSpPr>
+          <p:nvPr/>
+        </p:nvSpPr>
+        <p:spPr>
+          <a:xfrm>
+            <a:off x="257667" y="1074656"/>
+            <a:ext cx="6925938" cy="1678641"/>
+          </a:xfrm>
+          <a:prstGeom prst="rect">
+            <a:avLst/>
+          </a:prstGeom>
+        </p:spPr>
+        <p:txBody>
+          <a:bodyPr vert="horz" lIns="91440" tIns="45720" rIns="91440" bIns="45720" rtlCol="0" anchor="t">
+            <a:normAutofit/>
+          </a:bodyPr>
+          <a:lstStyle>
+            <a:lvl1pPr marL="0" indent="0" algn="l" defTabSz="914400" rtl="0" eaLnBrk="1" latinLnBrk="0" hangingPunct="1">
+              <a:lnSpc>
+                <a:spcPct val="90000"/>
+              </a:lnSpc>
+              <a:spcBef>
+                <a:spcPts val="1400"/>
+              </a:spcBef>
+              <a:buClr>
+                <a:schemeClr val="accent1"/>
+              </a:buClr>
+              <a:buSzPct val="80000"/>
+              <a:buFont typeface="Corbel" pitchFamily="34" charset="0"/>
+              <a:buNone/>
+              <a:defRPr sz="1600" kern="1200">
+                <a:solidFill>
+                  <a:schemeClr val="accent1"/>
+                </a:solidFill>
+                <a:latin typeface="+mn-lt"/>
+                <a:ea typeface="+mn-ea"/>
+                <a:cs typeface="+mn-cs"/>
+              </a:defRPr>
+            </a:lvl1pPr>
+            <a:lvl2pPr marL="457200" indent="0" algn="l" defTabSz="914400" rtl="0" eaLnBrk="1" latinLnBrk="0" hangingPunct="1">
+              <a:lnSpc>
+                <a:spcPct val="90000"/>
+              </a:lnSpc>
+              <a:spcBef>
+                <a:spcPts val="200"/>
+              </a:spcBef>
+              <a:spcAft>
+                <a:spcPts val="400"/>
+              </a:spcAft>
+              <a:buClr>
+                <a:schemeClr val="accent1"/>
+              </a:buClr>
+              <a:buSzPct val="80000"/>
+              <a:buFont typeface="Corbel" pitchFamily="34" charset="0"/>
+              <a:buNone/>
+              <a:defRPr sz="1400" kern="1200">
+                <a:solidFill>
+                  <a:schemeClr val="accent1"/>
+                </a:solidFill>
+                <a:latin typeface="+mn-lt"/>
+                <a:ea typeface="+mn-ea"/>
+                <a:cs typeface="+mn-cs"/>
+              </a:defRPr>
+            </a:lvl2pPr>
+            <a:lvl3pPr marL="914400" indent="0" algn="l" defTabSz="914400" rtl="0" eaLnBrk="1" latinLnBrk="0" hangingPunct="1">
+              <a:lnSpc>
+                <a:spcPct val="90000"/>
+              </a:lnSpc>
+              <a:spcBef>
+                <a:spcPts val="200"/>
+              </a:spcBef>
+              <a:spcAft>
+                <a:spcPts val="400"/>
+              </a:spcAft>
+              <a:buClr>
+                <a:schemeClr val="accent1"/>
+              </a:buClr>
+              <a:buSzPct val="80000"/>
+              <a:buFont typeface="Corbel" pitchFamily="34" charset="0"/>
+              <a:buNone/>
+              <a:defRPr sz="1200" kern="1200">
+                <a:solidFill>
+                  <a:schemeClr val="accent1"/>
+                </a:solidFill>
+                <a:latin typeface="+mn-lt"/>
+                <a:ea typeface="+mn-ea"/>
+                <a:cs typeface="+mn-cs"/>
+              </a:defRPr>
+            </a:lvl3pPr>
+            <a:lvl4pPr marL="1371600" indent="0" algn="l" defTabSz="914400" rtl="0" eaLnBrk="1" latinLnBrk="0" hangingPunct="1">
+              <a:lnSpc>
+                <a:spcPct val="90000"/>
+              </a:lnSpc>
+              <a:spcBef>
+                <a:spcPts val="200"/>
+              </a:spcBef>
+              <a:spcAft>
+                <a:spcPts val="400"/>
+              </a:spcAft>
+              <a:buClr>
+                <a:schemeClr val="accent1"/>
+              </a:buClr>
+              <a:buSzPct val="80000"/>
+              <a:buFont typeface="Corbel" pitchFamily="34" charset="0"/>
+              <a:buNone/>
+              <a:defRPr sz="1000" kern="1200">
+                <a:solidFill>
+                  <a:schemeClr val="accent1"/>
+                </a:solidFill>
+                <a:latin typeface="+mn-lt"/>
+                <a:ea typeface="+mn-ea"/>
+                <a:cs typeface="+mn-cs"/>
+              </a:defRPr>
+            </a:lvl4pPr>
+            <a:lvl5pPr marL="1828800" indent="0" algn="l" defTabSz="914400" rtl="0" eaLnBrk="1" latinLnBrk="0" hangingPunct="1">
+              <a:lnSpc>
+                <a:spcPct val="90000"/>
+              </a:lnSpc>
+              <a:spcBef>
+                <a:spcPts val="200"/>
+              </a:spcBef>
+              <a:spcAft>
+                <a:spcPts val="400"/>
+              </a:spcAft>
+              <a:buClr>
+                <a:schemeClr val="accent1"/>
+              </a:buClr>
+              <a:buSzPct val="80000"/>
+              <a:buFont typeface="Corbel" pitchFamily="34" charset="0"/>
+              <a:buNone/>
+              <a:defRPr sz="1000" kern="1200">
+                <a:solidFill>
+                  <a:schemeClr val="accent1"/>
+                </a:solidFill>
+                <a:latin typeface="+mn-lt"/>
+                <a:ea typeface="+mn-ea"/>
+                <a:cs typeface="+mn-cs"/>
+              </a:defRPr>
+            </a:lvl5pPr>
+            <a:lvl6pPr marL="2286000" indent="0" algn="l" defTabSz="914400" rtl="0" eaLnBrk="1" latinLnBrk="0" hangingPunct="1">
+              <a:lnSpc>
+                <a:spcPct val="90000"/>
+              </a:lnSpc>
+              <a:spcBef>
+                <a:spcPts val="200"/>
+              </a:spcBef>
+              <a:spcAft>
+                <a:spcPts val="400"/>
+              </a:spcAft>
+              <a:buClr>
+                <a:schemeClr val="accent1"/>
+              </a:buClr>
+              <a:buSzPct val="80000"/>
+              <a:buFont typeface="Corbel" pitchFamily="34" charset="0"/>
+              <a:buNone/>
+              <a:defRPr sz="1000" kern="1200">
+                <a:solidFill>
+                  <a:schemeClr val="accent1"/>
+                </a:solidFill>
+                <a:latin typeface="+mn-lt"/>
+                <a:ea typeface="+mn-ea"/>
+                <a:cs typeface="+mn-cs"/>
+              </a:defRPr>
+            </a:lvl6pPr>
+            <a:lvl7pPr marL="2743200" indent="0" algn="l" defTabSz="914400" rtl="0" eaLnBrk="1" latinLnBrk="0" hangingPunct="1">
+              <a:lnSpc>
+                <a:spcPct val="90000"/>
+              </a:lnSpc>
+              <a:spcBef>
+                <a:spcPts val="200"/>
+              </a:spcBef>
+              <a:spcAft>
+                <a:spcPts val="400"/>
+              </a:spcAft>
+              <a:buClr>
+                <a:schemeClr val="accent1"/>
+              </a:buClr>
+              <a:buSzPct val="80000"/>
+              <a:buFont typeface="Corbel" pitchFamily="34" charset="0"/>
+              <a:buNone/>
+              <a:defRPr sz="1000" kern="1200">
+                <a:solidFill>
+                  <a:schemeClr val="accent1"/>
+                </a:solidFill>
+                <a:latin typeface="+mn-lt"/>
+                <a:ea typeface="+mn-ea"/>
+                <a:cs typeface="+mn-cs"/>
+              </a:defRPr>
+            </a:lvl7pPr>
+            <a:lvl8pPr marL="3200400" indent="0" algn="l" defTabSz="914400" rtl="0" eaLnBrk="1" latinLnBrk="0" hangingPunct="1">
+              <a:lnSpc>
+                <a:spcPct val="90000"/>
+              </a:lnSpc>
+              <a:spcBef>
+                <a:spcPts val="200"/>
+              </a:spcBef>
+              <a:spcAft>
+                <a:spcPts val="400"/>
+              </a:spcAft>
+              <a:buClr>
+                <a:schemeClr val="accent1"/>
+              </a:buClr>
+              <a:buSzPct val="80000"/>
+              <a:buFont typeface="Corbel" pitchFamily="34" charset="0"/>
+              <a:buNone/>
+              <a:defRPr sz="1000" kern="1200">
+                <a:solidFill>
+                  <a:schemeClr val="accent1"/>
+                </a:solidFill>
+                <a:latin typeface="+mn-lt"/>
+                <a:ea typeface="+mn-ea"/>
+                <a:cs typeface="+mn-cs"/>
+              </a:defRPr>
+            </a:lvl8pPr>
+            <a:lvl9pPr marL="3657600" indent="0" algn="l" defTabSz="914400" rtl="0" eaLnBrk="1" latinLnBrk="0" hangingPunct="1">
+              <a:lnSpc>
+                <a:spcPct val="90000"/>
+              </a:lnSpc>
+              <a:spcBef>
+                <a:spcPts val="200"/>
+              </a:spcBef>
+              <a:spcAft>
+                <a:spcPts val="400"/>
+              </a:spcAft>
+              <a:buClr>
+                <a:schemeClr val="accent1"/>
+              </a:buClr>
+              <a:buSzPct val="80000"/>
+              <a:buFont typeface="Corbel" pitchFamily="34" charset="0"/>
+              <a:buNone/>
+              <a:defRPr sz="1000" kern="1200">
+                <a:solidFill>
+                  <a:schemeClr val="accent1"/>
+                </a:solidFill>
+                <a:latin typeface="+mn-lt"/>
+                <a:ea typeface="+mn-ea"/>
+                <a:cs typeface="+mn-cs"/>
+              </a:defRPr>
+            </a:lvl9pPr>
+          </a:lstStyle>
+          <a:p>
+            <a:r>
+              <a:rPr lang="es-ES" sz="2400" b="1" dirty="0">
+                <a:solidFill>
+                  <a:srgbClr val="00B0F0"/>
+                </a:solidFill>
+              </a:rPr>
+              <a:t>Iker Martínez Velasco</a:t>
+            </a:r>
+          </a:p>
+          <a:p>
+            <a:r>
+              <a:rPr lang="es-ES" sz="2000" b="1" u="sng" dirty="0">
+                <a:hlinkClick r:id="rId7"/>
+              </a:rPr>
+              <a:t>https://es.linkedin.com/in/iker-martinez-dev/</a:t>
+            </a:r>
+            <a:endParaRPr lang="es-ES" sz="2000" b="1" u="sng" dirty="0"/>
+          </a:p>
+          <a:p>
+            <a:r>
+              <a:rPr lang="es-ES" sz="2000" b="1" u="sng" dirty="0">
+                <a:hlinkClick r:id="rId8"/>
+              </a:rPr>
+              <a:t>https://github.com/moimenta84?tab=repositories</a:t>
+            </a:r>
+            <a:endParaRPr lang="es-ES" sz="2000" b="1" u="sng" dirty="0"/>
+          </a:p>
+        </p:txBody>
+      </p:sp>
+      <p:pic>
+        <p:nvPicPr>
+          <p:cNvPr id="7" name="Imagen 6">
+            <a:extLst>
+              <a:ext uri="{FF2B5EF4-FFF2-40B4-BE49-F238E27FC236}">
+                <a16:creationId xmlns:a16="http://schemas.microsoft.com/office/drawing/2014/main" id="{9787D4B3-7B7F-4502-93B5-292D073751A8}"/>
+              </a:ext>
+            </a:extLst>
+          </p:cNvPr>
+          <p:cNvPicPr>
+            <a:picLocks noChangeAspect="1"/>
+          </p:cNvPicPr>
+          <p:nvPr/>
+        </p:nvPicPr>
+        <p:blipFill>
+          <a:blip r:embed="rId9">
+            <a:extLst>
+              <a:ext uri="{28A0092B-C50C-407E-A947-70E740481C1C}">
+                <a14:useLocalDpi xmlns:a14="http://schemas.microsoft.com/office/drawing/2010/main" val="0"/>
+              </a:ext>
+            </a:extLst>
+          </a:blip>
+          <a:stretch>
+            <a:fillRect/>
+          </a:stretch>
+        </p:blipFill>
+        <p:spPr>
+          <a:xfrm>
+            <a:off x="8336755" y="4975560"/>
+            <a:ext cx="3009900" cy="1524000"/>
+          </a:xfrm>
+          <a:prstGeom prst="rect">
+            <a:avLst/>
+          </a:prstGeom>
+        </p:spPr>
+      </p:pic>
+    </p:spTree>
+    <p:extLst>
+      <p:ext uri="{BB962C8B-B14F-4D97-AF65-F5344CB8AC3E}">
+        <p14:creationId xmlns:p14="http://schemas.microsoft.com/office/powerpoint/2010/main" val="117008217"/>
+      </p:ext>
+    </p:extLst>
+  </p:cSld>
+  <p:clrMapOvr>
+    <a:masterClrMapping/>
+  </p:clrMapOvr>
+</p:sld>
+</file>
+
+<file path=ppt/slides/slide7.xml><?xml version="1.0" encoding="utf-8"?>
+<p:sld xmlns:a="http://schemas.openxmlformats.org/drawingml/2006/main" xmlns:r="http://schemas.openxmlformats.org/officeDocument/2006/relationships" xmlns:p="http://schemas.openxmlformats.org/presentationml/2006/main">
+  <p:cSld>
+    <p:spTree>
+      <p:nvGrpSpPr>
+        <p:cNvPr id="1" name="">
+          <a:extLst>
+            <a:ext uri="{FF2B5EF4-FFF2-40B4-BE49-F238E27FC236}">
+              <a16:creationId xmlns:a16="http://schemas.microsoft.com/office/drawing/2014/main" id="{7B0B8F8E-F17C-BE33-E52E-ED2DA6A125D6}"/>
+            </a:ext>
+          </a:extLst>
+        </p:cNvPr>
+        <p:cNvGrpSpPr/>
+        <p:nvPr/>
+      </p:nvGrpSpPr>
+      <p:grpSpPr>
+        <a:xfrm>
+          <a:off x="0" y="0"/>
+          <a:ext cx="0" cy="0"/>
+          <a:chOff x="0" y="0"/>
+          <a:chExt cx="0" cy="0"/>
+        </a:xfrm>
+      </p:grpSpPr>
+      <p:sp>
+        <p:nvSpPr>
+          <p:cNvPr id="2" name="Título 1">
+            <a:extLst>
+              <a:ext uri="{FF2B5EF4-FFF2-40B4-BE49-F238E27FC236}">
+                <a16:creationId xmlns:a16="http://schemas.microsoft.com/office/drawing/2014/main" id="{077CDB5E-31B6-E771-3B56-DBB8540504DA}"/>
+              </a:ext>
+            </a:extLst>
+          </p:cNvPr>
+          <p:cNvSpPr>
+            <a:spLocks noGrp="1"/>
+          </p:cNvSpPr>
+          <p:nvPr>
+            <p:ph type="title"/>
+          </p:nvPr>
+        </p:nvSpPr>
+        <p:spPr>
+          <a:xfrm>
+            <a:off x="207391" y="289089"/>
+            <a:ext cx="11726943" cy="785567"/>
+          </a:xfrm>
+        </p:spPr>
+        <p:txBody>
+          <a:bodyPr>
+            <a:normAutofit/>
+          </a:bodyPr>
+          <a:lstStyle/>
+          <a:p>
+            <a:pPr algn="ctr"/>
+            <a:r>
+              <a:rPr lang="es-ES" sz="4000" b="1" u="sng" dirty="0">
+                <a:solidFill>
+                  <a:srgbClr val="00B0F0"/>
+                </a:solidFill>
+              </a:rPr>
+              <a:t>Descripción</a:t>
+            </a:r>
+          </a:p>
+        </p:txBody>
+      </p:sp>
+      <p:sp>
+        <p:nvSpPr>
+          <p:cNvPr id="3" name="Marcador de texto 2">
+            <a:extLst>
+              <a:ext uri="{FF2B5EF4-FFF2-40B4-BE49-F238E27FC236}">
+                <a16:creationId xmlns:a16="http://schemas.microsoft.com/office/drawing/2014/main" id="{842E4D53-690E-051E-5FD3-0D39B3D68066}"/>
+              </a:ext>
+            </a:extLst>
+          </p:cNvPr>
+          <p:cNvSpPr>
+            <a:spLocks noGrp="1"/>
+          </p:cNvSpPr>
+          <p:nvPr>
+            <p:ph type="body" sz="half" idx="2"/>
+          </p:nvPr>
+        </p:nvSpPr>
+        <p:spPr>
+          <a:xfrm>
+            <a:off x="257666" y="1074656"/>
+            <a:ext cx="8188750" cy="5494255"/>
+          </a:xfrm>
+        </p:spPr>
+        <p:txBody>
+          <a:bodyPr anchor="t">
+            <a:normAutofit/>
+          </a:bodyPr>
+          <a:lstStyle/>
+          <a:p>
+            <a:r>
+              <a:rPr lang="es-ES" sz="2800" b="1" dirty="0">
+                <a:solidFill>
+                  <a:srgbClr val="00B0F0"/>
+                </a:solidFill>
+              </a:rPr>
+              <a:t>Nuestra app de React es una tienda que reúne todo tipo de tecnologías, desde electrodomésticos, informática, sonido, hogar, etc.</a:t>
+            </a:r>
+          </a:p>
+          <a:p>
+            <a:r>
+              <a:rPr lang="es-ES" sz="2800" b="1" dirty="0">
+                <a:solidFill>
+                  <a:srgbClr val="00B0F0"/>
+                </a:solidFill>
+              </a:rPr>
+              <a:t>Además, te permite aprender sobre tecnologías con tarjetas de aprendizaje que puede crear el usuario. </a:t>
+            </a:r>
+          </a:p>
+          <a:p>
+            <a:r>
+              <a:rPr lang="es-ES" sz="2800" b="1" dirty="0">
+                <a:solidFill>
+                  <a:srgbClr val="00B0F0"/>
+                </a:solidFill>
+              </a:rPr>
+              <a:t>Puede buscar productos y filtrar por categoría. Añadir comentarios y valoraciones de productos.</a:t>
+            </a:r>
+          </a:p>
+          <a:p>
+            <a:r>
+              <a:rPr lang="es-ES" sz="2800" b="1" dirty="0">
+                <a:solidFill>
+                  <a:srgbClr val="00B0F0"/>
+                </a:solidFill>
+              </a:rPr>
+              <a:t>Tanto para comprar, comentar, valorar y crear tarjetas de aprendizaje el usuario debe estar registrado. </a:t>
+            </a:r>
+          </a:p>
+        </p:txBody>
+      </p:sp>
+      <p:pic>
+        <p:nvPicPr>
+          <p:cNvPr id="6" name="Imagen 5">
+            <a:extLst>
+              <a:ext uri="{FF2B5EF4-FFF2-40B4-BE49-F238E27FC236}">
+                <a16:creationId xmlns:a16="http://schemas.microsoft.com/office/drawing/2014/main" id="{E70AAA26-D3DC-864A-CB75-C28D901085E4}"/>
+              </a:ext>
+            </a:extLst>
+          </p:cNvPr>
+          <p:cNvPicPr>
+            <a:picLocks noChangeAspect="1"/>
+          </p:cNvPicPr>
+          <p:nvPr/>
+        </p:nvPicPr>
+        <p:blipFill>
+          <a:blip r:embed="rId2">
+            <a:extLst>
+              <a:ext uri="{28A0092B-C50C-407E-A947-70E740481C1C}">
+                <a14:useLocalDpi xmlns:a14="http://schemas.microsoft.com/office/drawing/2010/main" val="0"/>
+              </a:ext>
+            </a:extLst>
+          </a:blip>
+          <a:stretch>
+            <a:fillRect/>
+          </a:stretch>
+        </p:blipFill>
+        <p:spPr>
+          <a:xfrm>
+            <a:off x="7266495" y="1643406"/>
+            <a:ext cx="4925505" cy="4925505"/>
+          </a:xfrm>
+          <a:prstGeom prst="rect">
+            <a:avLst/>
+          </a:prstGeom>
+        </p:spPr>
+      </p:pic>
+    </p:spTree>
+    <p:extLst>
+      <p:ext uri="{BB962C8B-B14F-4D97-AF65-F5344CB8AC3E}">
+        <p14:creationId xmlns:p14="http://schemas.microsoft.com/office/powerpoint/2010/main" val="2335935981"/>
+      </p:ext>
+    </p:extLst>
+  </p:cSld>
+  <p:clrMapOvr>
+    <a:masterClrMapping/>
+  </p:clrMapOvr>
+</p:sld>
+</file>
+
+<file path=ppt/slides/slide8.xml><?xml version="1.0" encoding="utf-8"?>
 <p:sld xmlns:a="http://schemas.openxmlformats.org/drawingml/2006/main" xmlns:r="http://schemas.openxmlformats.org/officeDocument/2006/relationships" xmlns:p="http://schemas.openxmlformats.org/presentationml/2006/main">
   <p:cSld>
     <p:spTree>
@@ -5469,7 +8394,7 @@
 </p:sld>
 </file>
 
-<file path=ppt/slides/slide5.xml><?xml version="1.0" encoding="utf-8"?>
+<file path=ppt/slides/slide9.xml><?xml version="1.0" encoding="utf-8"?>
 <p:sld xmlns:a="http://schemas.openxmlformats.org/drawingml/2006/main" xmlns:r="http://schemas.openxmlformats.org/officeDocument/2006/relationships" xmlns:p="http://schemas.openxmlformats.org/presentationml/2006/main">
   <p:cSld>
     <p:spTree>
@@ -5645,525 +8570,6 @@
     <p:extLst>
       <p:ext uri="{BB962C8B-B14F-4D97-AF65-F5344CB8AC3E}">
         <p14:creationId xmlns:p14="http://schemas.microsoft.com/office/powerpoint/2010/main" val="1933394405"/>
-      </p:ext>
-    </p:extLst>
-  </p:cSld>
-  <p:clrMapOvr>
-    <a:masterClrMapping/>
-  </p:clrMapOvr>
-</p:sld>
-</file>
-
-<file path=ppt/slides/slide6.xml><?xml version="1.0" encoding="utf-8"?>
-<p:sld xmlns:a="http://schemas.openxmlformats.org/drawingml/2006/main" xmlns:r="http://schemas.openxmlformats.org/officeDocument/2006/relationships" xmlns:p="http://schemas.openxmlformats.org/presentationml/2006/main">
-  <p:cSld>
-    <p:spTree>
-      <p:nvGrpSpPr>
-        <p:cNvPr id="1" name="">
-          <a:extLst>
-            <a:ext uri="{FF2B5EF4-FFF2-40B4-BE49-F238E27FC236}">
-              <a16:creationId xmlns:a16="http://schemas.microsoft.com/office/drawing/2014/main" id="{57EA5ACD-B567-F69B-F39E-6C862B4754A7}"/>
-            </a:ext>
-          </a:extLst>
-        </p:cNvPr>
-        <p:cNvGrpSpPr/>
-        <p:nvPr/>
-      </p:nvGrpSpPr>
-      <p:grpSpPr>
-        <a:xfrm>
-          <a:off x="0" y="0"/>
-          <a:ext cx="0" cy="0"/>
-          <a:chOff x="0" y="0"/>
-          <a:chExt cx="0" cy="0"/>
-        </a:xfrm>
-      </p:grpSpPr>
-      <p:sp>
-        <p:nvSpPr>
-          <p:cNvPr id="2" name="Título 1">
-            <a:extLst>
-              <a:ext uri="{FF2B5EF4-FFF2-40B4-BE49-F238E27FC236}">
-                <a16:creationId xmlns:a16="http://schemas.microsoft.com/office/drawing/2014/main" id="{1BA2A386-798D-A4AA-7084-E6968799C741}"/>
-              </a:ext>
-            </a:extLst>
-          </p:cNvPr>
-          <p:cNvSpPr>
-            <a:spLocks noGrp="1"/>
-          </p:cNvSpPr>
-          <p:nvPr>
-            <p:ph type="title"/>
-          </p:nvPr>
-        </p:nvSpPr>
-        <p:spPr>
-          <a:xfrm>
-            <a:off x="207391" y="289089"/>
-            <a:ext cx="11726943" cy="785567"/>
-          </a:xfrm>
-        </p:spPr>
-        <p:txBody>
-          <a:bodyPr>
-            <a:normAutofit/>
-          </a:bodyPr>
-          <a:lstStyle/>
-          <a:p>
-            <a:pPr algn="ctr"/>
-            <a:r>
-              <a:rPr lang="es-ES" sz="4000" b="1" u="sng" dirty="0">
-                <a:solidFill>
-                  <a:srgbClr val="00B0F0"/>
-                </a:solidFill>
-              </a:rPr>
-              <a:t>Estudio de Tiendas Online</a:t>
-            </a:r>
-          </a:p>
-        </p:txBody>
-      </p:sp>
-      <p:sp>
-        <p:nvSpPr>
-          <p:cNvPr id="3" name="Marcador de texto 2">
-            <a:extLst>
-              <a:ext uri="{FF2B5EF4-FFF2-40B4-BE49-F238E27FC236}">
-                <a16:creationId xmlns:a16="http://schemas.microsoft.com/office/drawing/2014/main" id="{C5E68FD5-0D93-B3E3-7E8A-5D54643315CA}"/>
-              </a:ext>
-            </a:extLst>
-          </p:cNvPr>
-          <p:cNvSpPr>
-            <a:spLocks noGrp="1"/>
-          </p:cNvSpPr>
-          <p:nvPr>
-            <p:ph type="body" sz="half" idx="2"/>
-          </p:nvPr>
-        </p:nvSpPr>
-        <p:spPr>
-          <a:xfrm>
-            <a:off x="257666" y="1074656"/>
-            <a:ext cx="11676669" cy="5494255"/>
-          </a:xfrm>
-        </p:spPr>
-        <p:txBody>
-          <a:bodyPr anchor="t">
-            <a:normAutofit/>
-          </a:bodyPr>
-          <a:lstStyle/>
-          <a:p>
-            <a:pPr algn="ctr"/>
-            <a:r>
-              <a:rPr lang="es-ES" sz="2800" b="1" u="sng" dirty="0">
-                <a:solidFill>
-                  <a:srgbClr val="00B0F0"/>
-                </a:solidFill>
-              </a:rPr>
-              <a:t>Amazon</a:t>
-            </a:r>
-          </a:p>
-          <a:p>
-            <a:pPr algn="l"/>
-            <a:r>
-              <a:rPr lang="es-ES" sz="2800" b="1" dirty="0">
-                <a:solidFill>
-                  <a:srgbClr val="00B0F0"/>
-                </a:solidFill>
-              </a:rPr>
-              <a:t>Hemos analizado las interfaces principales de la tienda online Amazon como referencia para el diseño de una tienda de electrodomésticos propia. Es uno de los e-</a:t>
-            </a:r>
-            <a:r>
-              <a:rPr lang="es-ES" sz="2800" b="1" dirty="0" err="1">
-                <a:solidFill>
-                  <a:srgbClr val="00B0F0"/>
-                </a:solidFill>
-              </a:rPr>
-              <a:t>commerce</a:t>
-            </a:r>
-            <a:r>
-              <a:rPr lang="es-ES" sz="2800" b="1" dirty="0">
-                <a:solidFill>
-                  <a:srgbClr val="00B0F0"/>
-                </a:solidFill>
-              </a:rPr>
-              <a:t> lideres en venta online, por lo que su estructura, experiencia de usuario y elementos visuales resultan una guía útil para identificar buenas practicas y oportunidades de mejora.</a:t>
-            </a:r>
-          </a:p>
-          <a:p>
-            <a:pPr algn="l"/>
-            <a:r>
-              <a:rPr lang="es-ES" sz="2800" b="1" dirty="0">
-                <a:solidFill>
-                  <a:srgbClr val="00B0F0"/>
-                </a:solidFill>
-              </a:rPr>
-              <a:t>El análisis se centra en las siguientes pantallas clave del recorrido de compra: - Home o pagina principal - Pagina de categoría - Resultados de búsqueda - Ficha de producto - Carrito y proceso de compra - Area de usuario y postventa</a:t>
-            </a:r>
-          </a:p>
-          <a:p>
-            <a:r>
-              <a:rPr lang="es-ES" sz="2800" b="1" dirty="0">
-                <a:solidFill>
-                  <a:srgbClr val="00B0F0"/>
-                </a:solidFill>
-              </a:rPr>
-              <a:t>Mas info en: Estudio Amazon.docx</a:t>
-            </a:r>
-          </a:p>
-        </p:txBody>
-      </p:sp>
-    </p:spTree>
-    <p:extLst>
-      <p:ext uri="{BB962C8B-B14F-4D97-AF65-F5344CB8AC3E}">
-        <p14:creationId xmlns:p14="http://schemas.microsoft.com/office/powerpoint/2010/main" val="3447660507"/>
-      </p:ext>
-    </p:extLst>
-  </p:cSld>
-  <p:clrMapOvr>
-    <a:masterClrMapping/>
-  </p:clrMapOvr>
-</p:sld>
-</file>
-
-<file path=ppt/slides/slide7.xml><?xml version="1.0" encoding="utf-8"?>
-<p:sld xmlns:a="http://schemas.openxmlformats.org/drawingml/2006/main" xmlns:r="http://schemas.openxmlformats.org/officeDocument/2006/relationships" xmlns:p="http://schemas.openxmlformats.org/presentationml/2006/main">
-  <p:cSld>
-    <p:spTree>
-      <p:nvGrpSpPr>
-        <p:cNvPr id="1" name="">
-          <a:extLst>
-            <a:ext uri="{FF2B5EF4-FFF2-40B4-BE49-F238E27FC236}">
-              <a16:creationId xmlns:a16="http://schemas.microsoft.com/office/drawing/2014/main" id="{D5343680-B653-E750-2748-A981D9626033}"/>
-            </a:ext>
-          </a:extLst>
-        </p:cNvPr>
-        <p:cNvGrpSpPr/>
-        <p:nvPr/>
-      </p:nvGrpSpPr>
-      <p:grpSpPr>
-        <a:xfrm>
-          <a:off x="0" y="0"/>
-          <a:ext cx="0" cy="0"/>
-          <a:chOff x="0" y="0"/>
-          <a:chExt cx="0" cy="0"/>
-        </a:xfrm>
-      </p:grpSpPr>
-      <p:sp>
-        <p:nvSpPr>
-          <p:cNvPr id="2" name="Título 1">
-            <a:extLst>
-              <a:ext uri="{FF2B5EF4-FFF2-40B4-BE49-F238E27FC236}">
-                <a16:creationId xmlns:a16="http://schemas.microsoft.com/office/drawing/2014/main" id="{F52EC691-9DBF-9614-3318-0742C8D66302}"/>
-              </a:ext>
-            </a:extLst>
-          </p:cNvPr>
-          <p:cNvSpPr>
-            <a:spLocks noGrp="1"/>
-          </p:cNvSpPr>
-          <p:nvPr>
-            <p:ph type="title"/>
-          </p:nvPr>
-        </p:nvSpPr>
-        <p:spPr>
-          <a:xfrm>
-            <a:off x="207391" y="289089"/>
-            <a:ext cx="11726943" cy="785567"/>
-          </a:xfrm>
-        </p:spPr>
-        <p:txBody>
-          <a:bodyPr>
-            <a:normAutofit/>
-          </a:bodyPr>
-          <a:lstStyle/>
-          <a:p>
-            <a:pPr algn="ctr"/>
-            <a:r>
-              <a:rPr lang="es-ES" sz="4000" b="1" u="sng" dirty="0">
-                <a:solidFill>
-                  <a:srgbClr val="00B0F0"/>
-                </a:solidFill>
-              </a:rPr>
-              <a:t>Home (Inicio)</a:t>
-            </a:r>
-          </a:p>
-        </p:txBody>
-      </p:sp>
-      <p:sp>
-        <p:nvSpPr>
-          <p:cNvPr id="3" name="Marcador de texto 2">
-            <a:extLst>
-              <a:ext uri="{FF2B5EF4-FFF2-40B4-BE49-F238E27FC236}">
-                <a16:creationId xmlns:a16="http://schemas.microsoft.com/office/drawing/2014/main" id="{B018C736-3C65-68D6-745E-06829A41510A}"/>
-              </a:ext>
-            </a:extLst>
-          </p:cNvPr>
-          <p:cNvSpPr>
-            <a:spLocks noGrp="1"/>
-          </p:cNvSpPr>
-          <p:nvPr>
-            <p:ph type="body" sz="half" idx="2"/>
-          </p:nvPr>
-        </p:nvSpPr>
-        <p:spPr>
-          <a:xfrm>
-            <a:off x="257666" y="1074656"/>
-            <a:ext cx="11676669" cy="5494255"/>
-          </a:xfrm>
-        </p:spPr>
-        <p:txBody>
-          <a:bodyPr anchor="t">
-            <a:normAutofit/>
-          </a:bodyPr>
-          <a:lstStyle/>
-          <a:p>
-            <a:r>
-              <a:rPr lang="es-ES" sz="2800" b="1" dirty="0">
-                <a:solidFill>
-                  <a:srgbClr val="00B0F0"/>
-                </a:solidFill>
-              </a:rPr>
-              <a:t>Esta pagina es la de Inicio aparece si ha iniciado sesión el Nombre de Usuario. Al pulsar Cerrar Sesión cierra la sesión y vuelve a aparecer el botón Login. Al pulsar Login te lleva a la pagina de Login (Iniciar Sesión).</a:t>
-            </a:r>
-          </a:p>
-          <a:p>
-            <a:r>
-              <a:rPr lang="es-ES" sz="2800" b="1" dirty="0">
-                <a:solidFill>
-                  <a:srgbClr val="00B0F0"/>
-                </a:solidFill>
-              </a:rPr>
-              <a:t>Además, aparece en el menu superior el logo (te lleva a esta misma página), una barra de búsqueda para buscar en producto en la tienda y las diferentes páginas. En el centro una lista con los productos destacados. Y en el menu inferior el logo (te lleva a esta misma página), las diferentes páginas y el copyright.</a:t>
-            </a:r>
-          </a:p>
-        </p:txBody>
-      </p:sp>
-    </p:spTree>
-    <p:extLst>
-      <p:ext uri="{BB962C8B-B14F-4D97-AF65-F5344CB8AC3E}">
-        <p14:creationId xmlns:p14="http://schemas.microsoft.com/office/powerpoint/2010/main" val="1676473529"/>
-      </p:ext>
-    </p:extLst>
-  </p:cSld>
-  <p:clrMapOvr>
-    <a:masterClrMapping/>
-  </p:clrMapOvr>
-</p:sld>
-</file>
-
-<file path=ppt/slides/slide8.xml><?xml version="1.0" encoding="utf-8"?>
-<p:sld xmlns:a="http://schemas.openxmlformats.org/drawingml/2006/main" xmlns:r="http://schemas.openxmlformats.org/officeDocument/2006/relationships" xmlns:p="http://schemas.openxmlformats.org/presentationml/2006/main">
-  <p:cSld>
-    <p:spTree>
-      <p:nvGrpSpPr>
-        <p:cNvPr id="1" name="">
-          <a:extLst>
-            <a:ext uri="{FF2B5EF4-FFF2-40B4-BE49-F238E27FC236}">
-              <a16:creationId xmlns:a16="http://schemas.microsoft.com/office/drawing/2014/main" id="{05F97A8B-CC85-2590-71C9-89423ADB4576}"/>
-            </a:ext>
-          </a:extLst>
-        </p:cNvPr>
-        <p:cNvGrpSpPr/>
-        <p:nvPr/>
-      </p:nvGrpSpPr>
-      <p:grpSpPr>
-        <a:xfrm>
-          <a:off x="0" y="0"/>
-          <a:ext cx="0" cy="0"/>
-          <a:chOff x="0" y="0"/>
-          <a:chExt cx="0" cy="0"/>
-        </a:xfrm>
-      </p:grpSpPr>
-      <p:sp>
-        <p:nvSpPr>
-          <p:cNvPr id="2" name="Título 1">
-            <a:extLst>
-              <a:ext uri="{FF2B5EF4-FFF2-40B4-BE49-F238E27FC236}">
-                <a16:creationId xmlns:a16="http://schemas.microsoft.com/office/drawing/2014/main" id="{8FEEE2F4-9471-3268-F6DF-C77D4E2682EF}"/>
-              </a:ext>
-            </a:extLst>
-          </p:cNvPr>
-          <p:cNvSpPr>
-            <a:spLocks noGrp="1"/>
-          </p:cNvSpPr>
-          <p:nvPr>
-            <p:ph type="title"/>
-          </p:nvPr>
-        </p:nvSpPr>
-        <p:spPr>
-          <a:xfrm>
-            <a:off x="207391" y="289089"/>
-            <a:ext cx="11726943" cy="785567"/>
-          </a:xfrm>
-        </p:spPr>
-        <p:txBody>
-          <a:bodyPr>
-            <a:normAutofit/>
-          </a:bodyPr>
-          <a:lstStyle/>
-          <a:p>
-            <a:pPr algn="ctr"/>
-            <a:r>
-              <a:rPr lang="es-ES" sz="4000" b="1" u="sng" dirty="0">
-                <a:solidFill>
-                  <a:srgbClr val="00B0F0"/>
-                </a:solidFill>
-              </a:rPr>
-              <a:t>Login (Iniciar Sesión)</a:t>
-            </a:r>
-          </a:p>
-        </p:txBody>
-      </p:sp>
-      <p:sp>
-        <p:nvSpPr>
-          <p:cNvPr id="3" name="Marcador de texto 2">
-            <a:extLst>
-              <a:ext uri="{FF2B5EF4-FFF2-40B4-BE49-F238E27FC236}">
-                <a16:creationId xmlns:a16="http://schemas.microsoft.com/office/drawing/2014/main" id="{78411CAF-AA8E-D2FF-D8EF-9406DEEF37B9}"/>
-              </a:ext>
-            </a:extLst>
-          </p:cNvPr>
-          <p:cNvSpPr>
-            <a:spLocks noGrp="1"/>
-          </p:cNvSpPr>
-          <p:nvPr>
-            <p:ph type="body" sz="half" idx="2"/>
-          </p:nvPr>
-        </p:nvSpPr>
-        <p:spPr>
-          <a:xfrm>
-            <a:off x="257666" y="1074656"/>
-            <a:ext cx="11676669" cy="5494255"/>
-          </a:xfrm>
-        </p:spPr>
-        <p:txBody>
-          <a:bodyPr anchor="t">
-            <a:normAutofit/>
-          </a:bodyPr>
-          <a:lstStyle/>
-          <a:p>
-            <a:r>
-              <a:rPr lang="es-ES" sz="2800" b="1" dirty="0">
-                <a:solidFill>
-                  <a:srgbClr val="00B0F0"/>
-                </a:solidFill>
-              </a:rPr>
-              <a:t>Esta pagina es para Iniciar Sesión poniendo el Email y Contraseña. Al pulsar Iniciar Sesión te lleva a Home (Inicio) con la sesión iniciada.</a:t>
-            </a:r>
-          </a:p>
-        </p:txBody>
-      </p:sp>
-    </p:spTree>
-    <p:extLst>
-      <p:ext uri="{BB962C8B-B14F-4D97-AF65-F5344CB8AC3E}">
-        <p14:creationId xmlns:p14="http://schemas.microsoft.com/office/powerpoint/2010/main" val="1353400800"/>
-      </p:ext>
-    </p:extLst>
-  </p:cSld>
-  <p:clrMapOvr>
-    <a:masterClrMapping/>
-  </p:clrMapOvr>
-</p:sld>
-</file>
-
-<file path=ppt/slides/slide9.xml><?xml version="1.0" encoding="utf-8"?>
-<p:sld xmlns:a="http://schemas.openxmlformats.org/drawingml/2006/main" xmlns:r="http://schemas.openxmlformats.org/officeDocument/2006/relationships" xmlns:p="http://schemas.openxmlformats.org/presentationml/2006/main">
-  <p:cSld>
-    <p:spTree>
-      <p:nvGrpSpPr>
-        <p:cNvPr id="1" name="">
-          <a:extLst>
-            <a:ext uri="{FF2B5EF4-FFF2-40B4-BE49-F238E27FC236}">
-              <a16:creationId xmlns:a16="http://schemas.microsoft.com/office/drawing/2014/main" id="{0060C5B9-F702-32E6-E203-5789E7D7116D}"/>
-            </a:ext>
-          </a:extLst>
-        </p:cNvPr>
-        <p:cNvGrpSpPr/>
-        <p:nvPr/>
-      </p:nvGrpSpPr>
-      <p:grpSpPr>
-        <a:xfrm>
-          <a:off x="0" y="0"/>
-          <a:ext cx="0" cy="0"/>
-          <a:chOff x="0" y="0"/>
-          <a:chExt cx="0" cy="0"/>
-        </a:xfrm>
-      </p:grpSpPr>
-      <p:sp>
-        <p:nvSpPr>
-          <p:cNvPr id="2" name="Título 1">
-            <a:extLst>
-              <a:ext uri="{FF2B5EF4-FFF2-40B4-BE49-F238E27FC236}">
-                <a16:creationId xmlns:a16="http://schemas.microsoft.com/office/drawing/2014/main" id="{C962E0ED-3679-091B-AA9D-931D764686FA}"/>
-              </a:ext>
-            </a:extLst>
-          </p:cNvPr>
-          <p:cNvSpPr>
-            <a:spLocks noGrp="1"/>
-          </p:cNvSpPr>
-          <p:nvPr>
-            <p:ph type="title"/>
-          </p:nvPr>
-        </p:nvSpPr>
-        <p:spPr>
-          <a:xfrm>
-            <a:off x="207391" y="289089"/>
-            <a:ext cx="11726943" cy="785567"/>
-          </a:xfrm>
-        </p:spPr>
-        <p:txBody>
-          <a:bodyPr>
-            <a:normAutofit/>
-          </a:bodyPr>
-          <a:lstStyle/>
-          <a:p>
-            <a:pPr algn="ctr"/>
-            <a:r>
-              <a:rPr lang="es-ES" sz="4000" b="1" u="sng" dirty="0">
-                <a:solidFill>
-                  <a:srgbClr val="00B0F0"/>
-                </a:solidFill>
-              </a:rPr>
-              <a:t>Crear Usuario</a:t>
-            </a:r>
-          </a:p>
-        </p:txBody>
-      </p:sp>
-      <p:sp>
-        <p:nvSpPr>
-          <p:cNvPr id="3" name="Marcador de texto 2">
-            <a:extLst>
-              <a:ext uri="{FF2B5EF4-FFF2-40B4-BE49-F238E27FC236}">
-                <a16:creationId xmlns:a16="http://schemas.microsoft.com/office/drawing/2014/main" id="{AD998F6C-F44B-1D08-73C6-08C7A731E3F2}"/>
-              </a:ext>
-            </a:extLst>
-          </p:cNvPr>
-          <p:cNvSpPr>
-            <a:spLocks noGrp="1"/>
-          </p:cNvSpPr>
-          <p:nvPr>
-            <p:ph type="body" sz="half" idx="2"/>
-          </p:nvPr>
-        </p:nvSpPr>
-        <p:spPr>
-          <a:xfrm>
-            <a:off x="257666" y="1074656"/>
-            <a:ext cx="11676669" cy="5494255"/>
-          </a:xfrm>
-        </p:spPr>
-        <p:txBody>
-          <a:bodyPr anchor="t">
-            <a:normAutofit/>
-          </a:bodyPr>
-          <a:lstStyle/>
-          <a:p>
-            <a:r>
-              <a:rPr lang="es-ES" sz="2800" b="1" dirty="0">
-                <a:solidFill>
-                  <a:srgbClr val="00B0F0"/>
-                </a:solidFill>
-              </a:rPr>
-              <a:t>Esta pagina es para Crear Usuario poniendo el Nombre de Usuario, Email y Contraseña. Al pulsar Registrarse crea el usuario.</a:t>
-            </a:r>
-          </a:p>
-        </p:txBody>
-      </p:sp>
-    </p:spTree>
-    <p:extLst>
-      <p:ext uri="{BB962C8B-B14F-4D97-AF65-F5344CB8AC3E}">
-        <p14:creationId xmlns:p14="http://schemas.microsoft.com/office/powerpoint/2010/main" val="961258173"/>
       </p:ext>
     </p:extLst>
   </p:cSld>
